--- a/Prezentacie/Manažment komunikácie – vysvetľujúca prezentácia.pptx
+++ b/Prezentacie/Manažment komunikácie – vysvetľujúca prezentácia.pptx
@@ -120,20 +120,20 @@
   <p:extLst>
     <p:ext uri="{521415D9-36F7-43E2-AB2F-B90AF26B5E84}">
       <p14:sectionLst xmlns:p14="http://schemas.microsoft.com/office/powerpoint/2010/main">
-        <p14:section name="Úvod" id="{c4a5784c-e027-94cd-ac1d-6bc05e9e1107}">
+        <p14:section name="Úvod" id="{57c5c7ad-c5db-732d-c453-34831f85471d}">
           <p14:sldIdLst>
             <p14:sldId id="256"/>
             <p14:sldId id="257"/>
           </p14:sldIdLst>
         </p14:section>
-        <p14:section name="Čo je komunikácia" id="{f27925df-883d-3fa4-6533-48cf45368607}">
+        <p14:section name="Čo je komunikácia" id="{9fb155ea-5836-f208-b558-4ac1ea1d4d9a}">
           <p14:sldIdLst>
             <p14:sldId id="258"/>
             <p14:sldId id="259"/>
             <p14:sldId id="260"/>
           </p14:sldIdLst>
         </p14:section>
-        <p14:section name="Ako komunikáciu riadiť" id="{5cdf598f-b06f-cea2-1176-d250bf664fac}">
+        <p14:section name="Ako komunikáciu riadiť" id="{3900a750-b168-25c8-d674-6be8a2f5c2cb}">
           <p14:sldIdLst>
             <p14:sldId id="261"/>
             <p14:sldId id="262"/>
@@ -141,14 +141,14 @@
             <p14:sldId id="264"/>
           </p14:sldIdLst>
         </p14:section>
-        <p14:section name="Kancelária projektového manažmentu" id="{ec52fc57-76b4-ccaa-aa0d-cca0193e69f7}">
+        <p14:section name="Kancelária projektového manažmentu" id="{6338733c-5557-4e98-ca52-5caf0677f7ef}">
           <p14:sldIdLst>
             <p14:sldId id="265"/>
             <p14:sldId id="266"/>
             <p14:sldId id="267"/>
           </p14:sldIdLst>
         </p14:section>
-        <p14:section name="Záver" id="{d9672808-6a83-4168-daca-dea7fe6d2be4}">
+        <p14:section name="Záver" id="{79e2dda7-da6e-27a7-18ca-f4ea6f418bc8}">
           <p14:sldIdLst>
             <p14:sldId id="268"/>
             <p14:sldId id="269"/>
@@ -1635,8 +1635,8 @@
             <a:r>
               <a:rPr lang="en-US" dirty="0"/>
               <a:t>NIKOLAS · 35 s
-Takto zjednodušene vyzerá, kto s kým v projekte komunikuje. Všimnite si, že každý hovorí o niečom inom: klient o cieľoch, Product Owner o prioritách, vývojári o technickom riešení, vedenie o peniazoch a termínoch. Preto projekt potrebuje prekladateľov. Product Owner prekladá potreby klienta do úloh pre vývoj a projektový manažér prekladá technický stav do reči dopadov pre vedenie.
-Oranžové body sú tri miesta, kde sa informácia stráca najčastejšie – na tie sa pozrieme teraz.</a:t>
+Každý v projekte hovorí o tom, čo sám rieši: klient o cieľoch, vývojár o technickom riešení, vedenie o peniazoch a termínoch. Preto projekt potrebuje prekladateľov.
+Hore: klient povie, že chce, aby si zákazník vedel sám stiahnuť faktúru. Product Owner to preloží do konkrétnej úlohy – tlačidlo Stiahnuť PDF pri faktúre. Dole opačný smer: vývojár povie, že platobný modul má technický dlh. Vedeniu to nič nepovie, tak projektový manažér to preloží do dopadu – bez dvoch týždňov na opravu bude každá zmena platieb pomalšia a rizikovejšia. Keď tento preklad chýba, vznikajú bariéry, ktoré ukážeme teraz.</a:t>
             </a:r>
             <a:endParaRPr lang="en-US" dirty="0"/>
           </a:p>
@@ -3613,7 +3613,7 @@
       </p:sp>
       <p:sp>
         <p:nvSpPr>
-          <p:cNvPr id="4" name="card-261"/>
+          <p:cNvPr id="4" name="card-245"/>
           <p:cNvSpPr/>
           <p:nvPr/>
         </p:nvSpPr>
@@ -3635,7 +3635,7 @@
       </p:sp>
       <p:sp>
         <p:nvSpPr>
-          <p:cNvPr id="5" name="line-262"/>
+          <p:cNvPr id="5" name="line-246"/>
           <p:cNvSpPr/>
           <p:nvPr/>
         </p:nvSpPr>
@@ -3658,7 +3658,7 @@
       </p:sp>
       <p:sp>
         <p:nvSpPr>
-          <p:cNvPr id="6" name="line-263"/>
+          <p:cNvPr id="6" name="line-247"/>
           <p:cNvSpPr/>
           <p:nvPr/>
         </p:nvSpPr>
@@ -3681,7 +3681,7 @@
       </p:sp>
       <p:sp>
         <p:nvSpPr>
-          <p:cNvPr id="7" name="line-264"/>
+          <p:cNvPr id="7" name="line-248"/>
           <p:cNvSpPr/>
           <p:nvPr/>
         </p:nvSpPr>
@@ -3704,7 +3704,7 @@
       </p:sp>
       <p:sp>
         <p:nvSpPr>
-          <p:cNvPr id="8" name="card-265"/>
+          <p:cNvPr id="8" name="card-249"/>
           <p:cNvSpPr/>
           <p:nvPr/>
         </p:nvSpPr>
@@ -3731,7 +3731,7 @@
       </p:sp>
       <p:sp>
         <p:nvSpPr>
-          <p:cNvPr id="9" name="text-266"/>
+          <p:cNvPr id="9" name="text-250"/>
           <p:cNvSpPr txBox="1"/>
           <p:nvPr/>
         </p:nvSpPr>
@@ -3781,7 +3781,7 @@
       </p:sp>
       <p:sp>
         <p:nvSpPr>
-          <p:cNvPr id="10" name="card-267"/>
+          <p:cNvPr id="10" name="card-251"/>
           <p:cNvSpPr/>
           <p:nvPr/>
         </p:nvSpPr>
@@ -3808,7 +3808,7 @@
       </p:sp>
       <p:sp>
         <p:nvSpPr>
-          <p:cNvPr id="11" name="text-268"/>
+          <p:cNvPr id="11" name="text-252"/>
           <p:cNvSpPr txBox="1"/>
           <p:nvPr/>
         </p:nvSpPr>
@@ -3858,7 +3858,7 @@
       </p:sp>
       <p:sp>
         <p:nvSpPr>
-          <p:cNvPr id="12" name="card-269"/>
+          <p:cNvPr id="12" name="card-253"/>
           <p:cNvSpPr/>
           <p:nvPr/>
         </p:nvSpPr>
@@ -3885,7 +3885,7 @@
       </p:sp>
       <p:sp>
         <p:nvSpPr>
-          <p:cNvPr id="13" name="text-270"/>
+          <p:cNvPr id="13" name="text-254"/>
           <p:cNvSpPr txBox="1"/>
           <p:nvPr/>
         </p:nvSpPr>
@@ -3935,7 +3935,7 @@
       </p:sp>
       <p:sp>
         <p:nvSpPr>
-          <p:cNvPr id="14" name="dot-271"/>
+          <p:cNvPr id="14" name="dot-255"/>
           <p:cNvSpPr txBox="1"/>
           <p:nvPr/>
         </p:nvSpPr>
@@ -3976,7 +3976,7 @@
       </p:sp>
       <p:sp>
         <p:nvSpPr>
-          <p:cNvPr id="15" name="text-272"/>
+          <p:cNvPr id="15" name="text-256"/>
           <p:cNvSpPr txBox="1"/>
           <p:nvPr/>
         </p:nvSpPr>
@@ -4012,7 +4012,7 @@
       </p:sp>
       <p:sp>
         <p:nvSpPr>
-          <p:cNvPr id="16" name="text-273"/>
+          <p:cNvPr id="16" name="text-257"/>
           <p:cNvSpPr txBox="1"/>
           <p:nvPr/>
         </p:nvSpPr>
@@ -4059,7 +4059,7 @@
       </p:sp>
       <p:sp>
         <p:nvSpPr>
-          <p:cNvPr id="17" name="card-274"/>
+          <p:cNvPr id="17" name="card-258"/>
           <p:cNvSpPr/>
           <p:nvPr/>
         </p:nvSpPr>
@@ -4081,7 +4081,7 @@
       </p:sp>
       <p:sp>
         <p:nvSpPr>
-          <p:cNvPr id="18" name="text-275"/>
+          <p:cNvPr id="18" name="text-259"/>
           <p:cNvSpPr txBox="1"/>
           <p:nvPr/>
         </p:nvSpPr>
@@ -4120,7 +4120,7 @@
       </p:sp>
       <p:sp>
         <p:nvSpPr>
-          <p:cNvPr id="19" name="text-276"/>
+          <p:cNvPr id="19" name="text-260"/>
           <p:cNvSpPr txBox="1"/>
           <p:nvPr/>
         </p:nvSpPr>
@@ -4156,7 +4156,7 @@
       </p:sp>
       <p:sp>
         <p:nvSpPr>
-          <p:cNvPr id="20" name="card-277"/>
+          <p:cNvPr id="20" name="card-261"/>
           <p:cNvSpPr/>
           <p:nvPr/>
         </p:nvSpPr>
@@ -4178,7 +4178,7 @@
       </p:sp>
       <p:sp>
         <p:nvSpPr>
-          <p:cNvPr id="21" name="text-278"/>
+          <p:cNvPr id="21" name="text-262"/>
           <p:cNvSpPr txBox="1"/>
           <p:nvPr/>
         </p:nvSpPr>
@@ -4217,7 +4217,7 @@
       </p:sp>
       <p:sp>
         <p:nvSpPr>
-          <p:cNvPr id="22" name="text-279"/>
+          <p:cNvPr id="22" name="text-263"/>
           <p:cNvSpPr txBox="1"/>
           <p:nvPr/>
         </p:nvSpPr>
@@ -4253,7 +4253,7 @@
       </p:sp>
       <p:sp>
         <p:nvSpPr>
-          <p:cNvPr id="23" name="card-280"/>
+          <p:cNvPr id="23" name="card-264"/>
           <p:cNvSpPr/>
           <p:nvPr/>
         </p:nvSpPr>
@@ -4275,7 +4275,7 @@
       </p:sp>
       <p:sp>
         <p:nvSpPr>
-          <p:cNvPr id="24" name="text-281"/>
+          <p:cNvPr id="24" name="text-265"/>
           <p:cNvSpPr txBox="1"/>
           <p:nvPr/>
         </p:nvSpPr>
@@ -4314,7 +4314,7 @@
       </p:sp>
       <p:sp>
         <p:nvSpPr>
-          <p:cNvPr id="25" name="text-282"/>
+          <p:cNvPr id="25" name="text-266"/>
           <p:cNvSpPr txBox="1"/>
           <p:nvPr/>
         </p:nvSpPr>
@@ -4350,7 +4350,7 @@
       </p:sp>
       <p:sp>
         <p:nvSpPr>
-          <p:cNvPr id="26" name="card-283"/>
+          <p:cNvPr id="26" name="card-267"/>
           <p:cNvSpPr/>
           <p:nvPr/>
         </p:nvSpPr>
@@ -4372,7 +4372,7 @@
       </p:sp>
       <p:sp>
         <p:nvSpPr>
-          <p:cNvPr id="27" name="text-284"/>
+          <p:cNvPr id="27" name="text-268"/>
           <p:cNvSpPr txBox="1"/>
           <p:nvPr/>
         </p:nvSpPr>
@@ -4411,7 +4411,7 @@
       </p:sp>
       <p:sp>
         <p:nvSpPr>
-          <p:cNvPr id="28" name="text-285"/>
+          <p:cNvPr id="28" name="text-269"/>
           <p:cNvSpPr txBox="1"/>
           <p:nvPr/>
         </p:nvSpPr>
@@ -4593,7 +4593,7 @@
       </p:sp>
       <p:sp>
         <p:nvSpPr>
-          <p:cNvPr id="4" name="line-286"/>
+          <p:cNvPr id="4" name="line-270"/>
           <p:cNvSpPr/>
           <p:nvPr/>
         </p:nvSpPr>
@@ -4617,7 +4617,7 @@
       </p:sp>
       <p:sp>
         <p:nvSpPr>
-          <p:cNvPr id="5" name="text-287"/>
+          <p:cNvPr id="5" name="text-271"/>
           <p:cNvSpPr txBox="1"/>
           <p:nvPr/>
         </p:nvSpPr>
@@ -4653,7 +4653,7 @@
       </p:sp>
       <p:sp>
         <p:nvSpPr>
-          <p:cNvPr id="6" name="text-288"/>
+          <p:cNvPr id="6" name="text-272"/>
           <p:cNvSpPr txBox="1"/>
           <p:nvPr/>
         </p:nvSpPr>
@@ -4689,7 +4689,7 @@
       </p:sp>
       <p:sp>
         <p:nvSpPr>
-          <p:cNvPr id="7" name="card-289"/>
+          <p:cNvPr id="7" name="card-273"/>
           <p:cNvSpPr/>
           <p:nvPr/>
         </p:nvSpPr>
@@ -4711,7 +4711,7 @@
       </p:sp>
       <p:sp>
         <p:nvSpPr>
-          <p:cNvPr id="8" name="text-290"/>
+          <p:cNvPr id="8" name="text-274"/>
           <p:cNvSpPr txBox="1"/>
           <p:nvPr/>
         </p:nvSpPr>
@@ -4750,7 +4750,7 @@
       </p:sp>
       <p:sp>
         <p:nvSpPr>
-          <p:cNvPr id="9" name="text-291"/>
+          <p:cNvPr id="9" name="text-275"/>
           <p:cNvSpPr txBox="1"/>
           <p:nvPr/>
         </p:nvSpPr>
@@ -4789,7 +4789,7 @@
       </p:sp>
       <p:sp>
         <p:nvSpPr>
-          <p:cNvPr id="10" name="text-292"/>
+          <p:cNvPr id="10" name="text-276"/>
           <p:cNvSpPr txBox="1"/>
           <p:nvPr/>
         </p:nvSpPr>
@@ -4825,7 +4825,7 @@
       </p:sp>
       <p:sp>
         <p:nvSpPr>
-          <p:cNvPr id="11" name="text-293"/>
+          <p:cNvPr id="11" name="text-277"/>
           <p:cNvSpPr txBox="1"/>
           <p:nvPr/>
         </p:nvSpPr>
@@ -4915,7 +4915,7 @@
       </p:sp>
       <p:sp>
         <p:nvSpPr>
-          <p:cNvPr id="12" name="card-294"/>
+          <p:cNvPr id="12" name="card-278"/>
           <p:cNvSpPr/>
           <p:nvPr/>
         </p:nvSpPr>
@@ -4937,7 +4937,7 @@
       </p:sp>
       <p:sp>
         <p:nvSpPr>
-          <p:cNvPr id="13" name="text-295"/>
+          <p:cNvPr id="13" name="text-279"/>
           <p:cNvSpPr txBox="1"/>
           <p:nvPr/>
         </p:nvSpPr>
@@ -4976,7 +4976,7 @@
       </p:sp>
       <p:sp>
         <p:nvSpPr>
-          <p:cNvPr id="14" name="text-296"/>
+          <p:cNvPr id="14" name="text-280"/>
           <p:cNvSpPr txBox="1"/>
           <p:nvPr/>
         </p:nvSpPr>
@@ -5015,7 +5015,7 @@
       </p:sp>
       <p:sp>
         <p:nvSpPr>
-          <p:cNvPr id="15" name="text-297"/>
+          <p:cNvPr id="15" name="text-281"/>
           <p:cNvSpPr txBox="1"/>
           <p:nvPr/>
         </p:nvSpPr>
@@ -5051,7 +5051,7 @@
       </p:sp>
       <p:sp>
         <p:nvSpPr>
-          <p:cNvPr id="16" name="text-298"/>
+          <p:cNvPr id="16" name="text-282"/>
           <p:cNvSpPr txBox="1"/>
           <p:nvPr/>
         </p:nvSpPr>
@@ -5141,7 +5141,7 @@
       </p:sp>
       <p:sp>
         <p:nvSpPr>
-          <p:cNvPr id="17" name="card-299"/>
+          <p:cNvPr id="17" name="card-283"/>
           <p:cNvSpPr/>
           <p:nvPr/>
         </p:nvSpPr>
@@ -5163,7 +5163,7 @@
       </p:sp>
       <p:sp>
         <p:nvSpPr>
-          <p:cNvPr id="18" name="text-300"/>
+          <p:cNvPr id="18" name="text-284"/>
           <p:cNvSpPr txBox="1"/>
           <p:nvPr/>
         </p:nvSpPr>
@@ -5202,7 +5202,7 @@
       </p:sp>
       <p:sp>
         <p:nvSpPr>
-          <p:cNvPr id="19" name="text-301"/>
+          <p:cNvPr id="19" name="text-285"/>
           <p:cNvSpPr txBox="1"/>
           <p:nvPr/>
         </p:nvSpPr>
@@ -5241,7 +5241,7 @@
       </p:sp>
       <p:sp>
         <p:nvSpPr>
-          <p:cNvPr id="20" name="text-302"/>
+          <p:cNvPr id="20" name="text-286"/>
           <p:cNvSpPr txBox="1"/>
           <p:nvPr/>
         </p:nvSpPr>
@@ -5277,7 +5277,7 @@
       </p:sp>
       <p:sp>
         <p:nvSpPr>
-          <p:cNvPr id="21" name="text-303"/>
+          <p:cNvPr id="21" name="text-287"/>
           <p:cNvSpPr txBox="1"/>
           <p:nvPr/>
         </p:nvSpPr>
@@ -5513,7 +5513,7 @@
       </p:sp>
       <p:sp>
         <p:nvSpPr>
-          <p:cNvPr id="4" name="text-304"/>
+          <p:cNvPr id="4" name="text-288"/>
           <p:cNvSpPr txBox="1"/>
           <p:nvPr/>
         </p:nvSpPr>
@@ -5549,7 +5549,7 @@
       </p:sp>
       <p:sp>
         <p:nvSpPr>
-          <p:cNvPr id="5" name="line-305"/>
+          <p:cNvPr id="5" name="line-289"/>
           <p:cNvSpPr/>
           <p:nvPr/>
         </p:nvSpPr>
@@ -5573,7 +5573,7 @@
       </p:sp>
       <p:sp>
         <p:nvSpPr>
-          <p:cNvPr id="6" name="card-306"/>
+          <p:cNvPr id="6" name="card-290"/>
           <p:cNvSpPr/>
           <p:nvPr/>
         </p:nvSpPr>
@@ -5600,7 +5600,7 @@
       </p:sp>
       <p:sp>
         <p:nvSpPr>
-          <p:cNvPr id="7" name="text-307"/>
+          <p:cNvPr id="7" name="text-291"/>
           <p:cNvSpPr txBox="1"/>
           <p:nvPr/>
         </p:nvSpPr>
@@ -5636,7 +5636,7 @@
       </p:sp>
       <p:sp>
         <p:nvSpPr>
-          <p:cNvPr id="8" name="line-308"/>
+          <p:cNvPr id="8" name="line-292"/>
           <p:cNvSpPr/>
           <p:nvPr/>
         </p:nvSpPr>
@@ -5660,7 +5660,7 @@
       </p:sp>
       <p:sp>
         <p:nvSpPr>
-          <p:cNvPr id="9" name="card-309"/>
+          <p:cNvPr id="9" name="card-293"/>
           <p:cNvSpPr/>
           <p:nvPr/>
         </p:nvSpPr>
@@ -5687,7 +5687,7 @@
       </p:sp>
       <p:sp>
         <p:nvSpPr>
-          <p:cNvPr id="10" name="text-310"/>
+          <p:cNvPr id="10" name="text-294"/>
           <p:cNvSpPr txBox="1"/>
           <p:nvPr/>
         </p:nvSpPr>
@@ -5723,7 +5723,7 @@
       </p:sp>
       <p:sp>
         <p:nvSpPr>
-          <p:cNvPr id="11" name="line-311"/>
+          <p:cNvPr id="11" name="line-295"/>
           <p:cNvSpPr/>
           <p:nvPr/>
         </p:nvSpPr>
@@ -5747,7 +5747,7 @@
       </p:sp>
       <p:sp>
         <p:nvSpPr>
-          <p:cNvPr id="12" name="card-312"/>
+          <p:cNvPr id="12" name="card-296"/>
           <p:cNvSpPr/>
           <p:nvPr/>
         </p:nvSpPr>
@@ -5774,7 +5774,7 @@
       </p:sp>
       <p:sp>
         <p:nvSpPr>
-          <p:cNvPr id="13" name="text-313"/>
+          <p:cNvPr id="13" name="text-297"/>
           <p:cNvSpPr txBox="1"/>
           <p:nvPr/>
         </p:nvSpPr>
@@ -5810,7 +5810,7 @@
       </p:sp>
       <p:sp>
         <p:nvSpPr>
-          <p:cNvPr id="14" name="card-314"/>
+          <p:cNvPr id="14" name="card-298"/>
           <p:cNvSpPr/>
           <p:nvPr/>
         </p:nvSpPr>
@@ -5837,7 +5837,7 @@
       </p:sp>
       <p:sp>
         <p:nvSpPr>
-          <p:cNvPr id="15" name="text-315"/>
+          <p:cNvPr id="15" name="text-299"/>
           <p:cNvSpPr txBox="1"/>
           <p:nvPr/>
         </p:nvSpPr>
@@ -5887,7 +5887,7 @@
       </p:sp>
       <p:sp>
         <p:nvSpPr>
-          <p:cNvPr id="16" name="card-316"/>
+          <p:cNvPr id="16" name="card-300"/>
           <p:cNvSpPr/>
           <p:nvPr/>
         </p:nvSpPr>
@@ -5909,7 +5909,7 @@
       </p:sp>
       <p:sp>
         <p:nvSpPr>
-          <p:cNvPr id="17" name="text-317"/>
+          <p:cNvPr id="17" name="text-301"/>
           <p:cNvSpPr txBox="1"/>
           <p:nvPr/>
         </p:nvSpPr>
@@ -5948,7 +5948,7 @@
       </p:sp>
       <p:sp>
         <p:nvSpPr>
-          <p:cNvPr id="18" name="text-318"/>
+          <p:cNvPr id="18" name="text-302"/>
           <p:cNvSpPr txBox="1"/>
           <p:nvPr/>
         </p:nvSpPr>
@@ -5984,7 +5984,7 @@
       </p:sp>
       <p:sp>
         <p:nvSpPr>
-          <p:cNvPr id="19" name="card-319"/>
+          <p:cNvPr id="19" name="card-303"/>
           <p:cNvSpPr/>
           <p:nvPr/>
         </p:nvSpPr>
@@ -6006,7 +6006,7 @@
       </p:sp>
       <p:sp>
         <p:nvSpPr>
-          <p:cNvPr id="20" name="text-320"/>
+          <p:cNvPr id="20" name="text-304"/>
           <p:cNvSpPr txBox="1"/>
           <p:nvPr/>
         </p:nvSpPr>
@@ -6045,7 +6045,7 @@
       </p:sp>
       <p:sp>
         <p:nvSpPr>
-          <p:cNvPr id="21" name="text-321"/>
+          <p:cNvPr id="21" name="text-305"/>
           <p:cNvSpPr txBox="1"/>
           <p:nvPr/>
         </p:nvSpPr>
@@ -6081,7 +6081,7 @@
       </p:sp>
       <p:sp>
         <p:nvSpPr>
-          <p:cNvPr id="22" name="card-322"/>
+          <p:cNvPr id="22" name="card-306"/>
           <p:cNvSpPr/>
           <p:nvPr/>
         </p:nvSpPr>
@@ -6103,7 +6103,7 @@
       </p:sp>
       <p:sp>
         <p:nvSpPr>
-          <p:cNvPr id="23" name="text-323"/>
+          <p:cNvPr id="23" name="text-307"/>
           <p:cNvSpPr txBox="1"/>
           <p:nvPr/>
         </p:nvSpPr>
@@ -6142,7 +6142,7 @@
       </p:sp>
       <p:sp>
         <p:nvSpPr>
-          <p:cNvPr id="24" name="text-324"/>
+          <p:cNvPr id="24" name="text-308"/>
           <p:cNvSpPr txBox="1"/>
           <p:nvPr/>
         </p:nvSpPr>
@@ -6178,7 +6178,7 @@
       </p:sp>
       <p:sp>
         <p:nvSpPr>
-          <p:cNvPr id="25" name="text-325"/>
+          <p:cNvPr id="25" name="text-309"/>
           <p:cNvSpPr txBox="1"/>
           <p:nvPr/>
         </p:nvSpPr>
@@ -6371,7 +6371,7 @@
       </p:sp>
       <p:sp>
         <p:nvSpPr>
-          <p:cNvPr id="4" name="dot-326"/>
+          <p:cNvPr id="4" name="dot-310"/>
           <p:cNvSpPr txBox="1"/>
           <p:nvPr/>
         </p:nvSpPr>
@@ -6412,7 +6412,7 @@
       </p:sp>
       <p:sp>
         <p:nvSpPr>
-          <p:cNvPr id="5" name="text-327"/>
+          <p:cNvPr id="5" name="text-311"/>
           <p:cNvSpPr txBox="1"/>
           <p:nvPr/>
         </p:nvSpPr>
@@ -6451,7 +6451,7 @@
       </p:sp>
       <p:sp>
         <p:nvSpPr>
-          <p:cNvPr id="6" name="text-328"/>
+          <p:cNvPr id="6" name="text-312"/>
           <p:cNvSpPr txBox="1"/>
           <p:nvPr/>
         </p:nvSpPr>
@@ -6487,7 +6487,7 @@
       </p:sp>
       <p:sp>
         <p:nvSpPr>
-          <p:cNvPr id="7" name="dot-329"/>
+          <p:cNvPr id="7" name="dot-313"/>
           <p:cNvSpPr txBox="1"/>
           <p:nvPr/>
         </p:nvSpPr>
@@ -6528,7 +6528,7 @@
       </p:sp>
       <p:sp>
         <p:nvSpPr>
-          <p:cNvPr id="8" name="text-330"/>
+          <p:cNvPr id="8" name="text-314"/>
           <p:cNvSpPr txBox="1"/>
           <p:nvPr/>
         </p:nvSpPr>
@@ -6567,7 +6567,7 @@
       </p:sp>
       <p:sp>
         <p:nvSpPr>
-          <p:cNvPr id="9" name="text-331"/>
+          <p:cNvPr id="9" name="text-315"/>
           <p:cNvSpPr txBox="1"/>
           <p:nvPr/>
         </p:nvSpPr>
@@ -6603,7 +6603,7 @@
       </p:sp>
       <p:sp>
         <p:nvSpPr>
-          <p:cNvPr id="10" name="dot-332"/>
+          <p:cNvPr id="10" name="dot-316"/>
           <p:cNvSpPr txBox="1"/>
           <p:nvPr/>
         </p:nvSpPr>
@@ -6644,7 +6644,7 @@
       </p:sp>
       <p:sp>
         <p:nvSpPr>
-          <p:cNvPr id="11" name="text-333"/>
+          <p:cNvPr id="11" name="text-317"/>
           <p:cNvSpPr txBox="1"/>
           <p:nvPr/>
         </p:nvSpPr>
@@ -6683,7 +6683,7 @@
       </p:sp>
       <p:sp>
         <p:nvSpPr>
-          <p:cNvPr id="12" name="text-334"/>
+          <p:cNvPr id="12" name="text-318"/>
           <p:cNvSpPr txBox="1"/>
           <p:nvPr/>
         </p:nvSpPr>
@@ -6719,7 +6719,7 @@
       </p:sp>
       <p:sp>
         <p:nvSpPr>
-          <p:cNvPr id="13" name="card-335"/>
+          <p:cNvPr id="13" name="card-319"/>
           <p:cNvSpPr/>
           <p:nvPr/>
         </p:nvSpPr>
@@ -6741,7 +6741,7 @@
       </p:sp>
       <p:sp>
         <p:nvSpPr>
-          <p:cNvPr id="14" name="text-336"/>
+          <p:cNvPr id="14" name="text-320"/>
           <p:cNvSpPr txBox="1"/>
           <p:nvPr/>
         </p:nvSpPr>
@@ -6926,7 +6926,7 @@
       </p:sp>
       <p:sp>
         <p:nvSpPr>
-          <p:cNvPr id="4" name="text-337"/>
+          <p:cNvPr id="4" name="text-321"/>
           <p:cNvSpPr txBox="1"/>
           <p:nvPr/>
         </p:nvSpPr>
@@ -6962,7 +6962,7 @@
       </p:sp>
       <p:sp>
         <p:nvSpPr>
-          <p:cNvPr id="5" name="text-338"/>
+          <p:cNvPr id="5" name="text-322"/>
           <p:cNvSpPr txBox="1"/>
           <p:nvPr/>
         </p:nvSpPr>
@@ -6998,7 +6998,7 @@
       </p:sp>
       <p:sp>
         <p:nvSpPr>
-          <p:cNvPr id="6" name="text-339"/>
+          <p:cNvPr id="6" name="text-323"/>
           <p:cNvSpPr txBox="1"/>
           <p:nvPr/>
         </p:nvSpPr>
@@ -7034,7 +7034,7 @@
       </p:sp>
       <p:sp>
         <p:nvSpPr>
-          <p:cNvPr id="7" name="text-340"/>
+          <p:cNvPr id="7" name="text-324"/>
           <p:cNvSpPr txBox="1"/>
           <p:nvPr/>
         </p:nvSpPr>
@@ -7070,7 +7070,7 @@
       </p:sp>
       <p:sp>
         <p:nvSpPr>
-          <p:cNvPr id="8" name="text-341"/>
+          <p:cNvPr id="8" name="text-325"/>
           <p:cNvSpPr txBox="1"/>
           <p:nvPr/>
         </p:nvSpPr>
@@ -7106,7 +7106,7 @@
       </p:sp>
       <p:sp>
         <p:nvSpPr>
-          <p:cNvPr id="9" name="text-342"/>
+          <p:cNvPr id="9" name="text-326"/>
           <p:cNvSpPr txBox="1"/>
           <p:nvPr/>
         </p:nvSpPr>
@@ -15206,257 +15206,311 @@
         </p:nvSpPr>
         <p:spPr>
           <a:xfrm>
-            <a:off x="1600200" y="2125980"/>
-            <a:ext cx="2377440" cy="0"/>
+            <a:off x="4480560" y="2491740"/>
+            <a:ext cx="3230575" cy="0"/>
           </a:xfrm>
           <a:prstGeom prst="line">
             <a:avLst/>
           </a:prstGeom>
           <a:noFill/>
-          <a:ln w="25400">
+          <a:ln w="31750">
             <a:solidFill>
-              <a:schemeClr val="accent4"/>
+              <a:schemeClr val="accent1"/>
             </a:solidFill>
             <a:prstDash val="solid"/>
+            <a:tailEnd type="triangle"/>
           </a:ln>
         </p:spPr>
       </p:sp>
       <p:sp>
         <p:nvSpPr>
-          <p:cNvPr id="5" name="line-206"/>
+          <p:cNvPr id="5" name="card-206"/>
           <p:cNvSpPr/>
           <p:nvPr/>
         </p:nvSpPr>
         <p:spPr>
-          <a:xfrm flipH="1">
-            <a:off x="1600200" y="2125980"/>
-            <a:ext cx="2377440" cy="1737360"/>
-          </a:xfrm>
-          <a:prstGeom prst="line">
-            <a:avLst/>
-          </a:prstGeom>
-          <a:noFill/>
-          <a:ln w="25400">
-            <a:solidFill>
-              <a:schemeClr val="accent4"/>
-            </a:solidFill>
-            <a:prstDash val="solid"/>
-          </a:ln>
-        </p:spPr>
-      </p:sp>
-      <p:sp>
-        <p:nvSpPr>
-          <p:cNvPr id="6" name="line-207"/>
-          <p:cNvSpPr/>
-          <p:nvPr/>
-        </p:nvSpPr>
-        <p:spPr>
-          <a:xfrm>
-            <a:off x="3977640" y="2125980"/>
-            <a:ext cx="0" cy="1737360"/>
-          </a:xfrm>
-          <a:prstGeom prst="line">
-            <a:avLst/>
-          </a:prstGeom>
-          <a:noFill/>
-          <a:ln w="25400">
-            <a:solidFill>
-              <a:schemeClr val="accent4"/>
-            </a:solidFill>
-            <a:prstDash val="solid"/>
-          </a:ln>
-        </p:spPr>
-      </p:sp>
-      <p:sp>
-        <p:nvSpPr>
-          <p:cNvPr id="7" name="line-208"/>
-          <p:cNvSpPr/>
-          <p:nvPr/>
-        </p:nvSpPr>
-        <p:spPr>
-          <a:xfrm flipH="1">
-            <a:off x="3977640" y="2125980"/>
-            <a:ext cx="2377440" cy="1737360"/>
-          </a:xfrm>
-          <a:prstGeom prst="line">
-            <a:avLst/>
-          </a:prstGeom>
-          <a:noFill/>
-          <a:ln w="25400">
-            <a:solidFill>
-              <a:schemeClr val="accent4"/>
-            </a:solidFill>
-            <a:prstDash val="solid"/>
-          </a:ln>
-        </p:spPr>
-      </p:sp>
-      <p:sp>
-        <p:nvSpPr>
-          <p:cNvPr id="8" name="line-209"/>
-          <p:cNvSpPr/>
-          <p:nvPr/>
-        </p:nvSpPr>
-        <p:spPr>
-          <a:xfrm>
-            <a:off x="3977640" y="3863340"/>
-            <a:ext cx="2377440" cy="0"/>
-          </a:xfrm>
-          <a:prstGeom prst="line">
-            <a:avLst/>
-          </a:prstGeom>
-          <a:noFill/>
-          <a:ln w="25400">
-            <a:solidFill>
-              <a:schemeClr val="accent4"/>
-            </a:solidFill>
-            <a:prstDash val="solid"/>
-          </a:ln>
-        </p:spPr>
-      </p:sp>
-      <p:sp>
-        <p:nvSpPr>
-          <p:cNvPr id="9" name="line-210"/>
-          <p:cNvSpPr/>
-          <p:nvPr/>
-        </p:nvSpPr>
-        <p:spPr>
-          <a:xfrm>
-            <a:off x="1600200" y="3863340"/>
-            <a:ext cx="0" cy="1737360"/>
-          </a:xfrm>
-          <a:prstGeom prst="line">
-            <a:avLst/>
-          </a:prstGeom>
-          <a:noFill/>
-          <a:ln w="25400">
-            <a:solidFill>
-              <a:schemeClr val="accent4"/>
-            </a:solidFill>
-            <a:prstDash val="solid"/>
-          </a:ln>
-        </p:spPr>
-      </p:sp>
-      <p:sp>
-        <p:nvSpPr>
-          <p:cNvPr id="10" name="line-211"/>
-          <p:cNvSpPr/>
-          <p:nvPr/>
-        </p:nvSpPr>
-        <p:spPr>
-          <a:xfrm>
-            <a:off x="1600200" y="3863340"/>
-            <a:ext cx="2377440" cy="0"/>
-          </a:xfrm>
-          <a:prstGeom prst="line">
-            <a:avLst/>
-          </a:prstGeom>
-          <a:noFill/>
-          <a:ln w="25400">
-            <a:solidFill>
-              <a:schemeClr val="accent4"/>
-            </a:solidFill>
-            <a:prstDash val="solid"/>
-          </a:ln>
-        </p:spPr>
-      </p:sp>
-      <p:sp>
-        <p:nvSpPr>
-          <p:cNvPr id="11" name="card-212"/>
-          <p:cNvSpPr/>
-          <p:nvPr/>
-        </p:nvSpPr>
-        <p:spPr>
-          <a:xfrm>
-            <a:off x="548640" y="1691640"/>
-            <a:ext cx="2103120" cy="868680"/>
+          <a:xfrm>
+            <a:off x="548640" y="1645920"/>
+            <a:ext cx="3931920" cy="1691640"/>
           </a:xfrm>
           <a:prstGeom prst="roundRect">
             <a:avLst>
-              <a:gd name="adj" fmla="val 8421"/>
+              <a:gd name="adj" fmla="val 4324"/>
             </a:avLst>
           </a:prstGeom>
           <a:solidFill>
             <a:schemeClr val="bg2"/>
           </a:solidFill>
-          <a:ln w="12700">
+          <a:ln/>
+        </p:spPr>
+      </p:sp>
+      <p:sp>
+        <p:nvSpPr>
+          <p:cNvPr id="6" name="text-207"/>
+          <p:cNvSpPr txBox="1"/>
+          <p:nvPr/>
+        </p:nvSpPr>
+        <p:spPr>
+          <a:xfrm>
+            <a:off x="822960" y="1874520"/>
+            <a:ext cx="3383280" cy="274320"/>
+          </a:xfrm>
+          <a:prstGeom prst="rect">
+            <a:avLst/>
+          </a:prstGeom>
+          <a:noFill/>
+          <a:ln/>
+        </p:spPr>
+        <p:txBody>
+          <a:bodyPr wrap="square" lIns="0" tIns="0" rIns="0" bIns="0" rtlCol="0" anchor="t"/>
+          <a:lstStyle/>
+          <a:p>
+            <a:pPr indent="0" marL="0">
+              <a:buNone/>
+            </a:pPr>
+            <a:r>
+              <a:rPr lang="en-US" sz="1200" b="1" spc="100" kern="0" dirty="0">
+                <a:solidFill>
+                  <a:schemeClr val="accent5"/>
+                </a:solidFill>
+              </a:rPr>
+              <a:t>KLIENT POVIE</a:t>
+            </a:r>
+            <a:endParaRPr lang="en-US" sz="1200" dirty="0"/>
+          </a:p>
+        </p:txBody>
+      </p:sp>
+      <p:sp>
+        <p:nvSpPr>
+          <p:cNvPr id="7" name="text-208"/>
+          <p:cNvSpPr txBox="1"/>
+          <p:nvPr/>
+        </p:nvSpPr>
+        <p:spPr>
+          <a:xfrm>
+            <a:off x="822960" y="2212848"/>
+            <a:ext cx="3383280" cy="1005840"/>
+          </a:xfrm>
+          <a:prstGeom prst="rect">
+            <a:avLst/>
+          </a:prstGeom>
+          <a:noFill/>
+          <a:ln/>
+        </p:spPr>
+        <p:txBody>
+          <a:bodyPr wrap="square" lIns="0" tIns="0" rIns="0" bIns="0" rtlCol="0" anchor="t"/>
+          <a:lstStyle/>
+          <a:p>
+            <a:pPr indent="0" marL="0">
+              <a:buNone/>
+            </a:pPr>
+            <a:r>
+              <a:rPr lang="en-US" sz="1700" i="1" dirty="0">
+                <a:solidFill>
+                  <a:schemeClr val="tx1"/>
+                </a:solidFill>
+                <a:latin typeface="+mj-lt" pitchFamily="34" charset="0"/>
+                <a:ea typeface="+mj-lt" pitchFamily="34" charset="-122"/>
+                <a:cs typeface="+mj-lt" pitchFamily="34" charset="-120"/>
+              </a:rPr>
+              <a:t>„Chceme, aby si zákazník vedel sám stiahnuť faktúru.“</a:t>
+            </a:r>
+            <a:endParaRPr lang="en-US" sz="1700" dirty="0"/>
+          </a:p>
+        </p:txBody>
+      </p:sp>
+      <p:sp>
+        <p:nvSpPr>
+          <p:cNvPr id="8" name="card-209"/>
+          <p:cNvSpPr/>
+          <p:nvPr/>
+        </p:nvSpPr>
+        <p:spPr>
+          <a:xfrm>
+            <a:off x="7711135" y="1645920"/>
+            <a:ext cx="3931920" cy="1691640"/>
+          </a:xfrm>
+          <a:prstGeom prst="roundRect">
+            <a:avLst>
+              <a:gd name="adj" fmla="val 4324"/>
+            </a:avLst>
+          </a:prstGeom>
+          <a:solidFill>
+            <a:schemeClr val="accent3"/>
+          </a:solidFill>
+          <a:ln/>
+        </p:spPr>
+      </p:sp>
+      <p:sp>
+        <p:nvSpPr>
+          <p:cNvPr id="9" name="text-210"/>
+          <p:cNvSpPr txBox="1"/>
+          <p:nvPr/>
+        </p:nvSpPr>
+        <p:spPr>
+          <a:xfrm>
+            <a:off x="7985455" y="1874520"/>
+            <a:ext cx="3383280" cy="274320"/>
+          </a:xfrm>
+          <a:prstGeom prst="rect">
+            <a:avLst/>
+          </a:prstGeom>
+          <a:noFill/>
+          <a:ln/>
+        </p:spPr>
+        <p:txBody>
+          <a:bodyPr wrap="square" lIns="0" tIns="0" rIns="0" bIns="0" rtlCol="0" anchor="t"/>
+          <a:lstStyle/>
+          <a:p>
+            <a:pPr indent="0" marL="0">
+              <a:buNone/>
+            </a:pPr>
+            <a:r>
+              <a:rPr lang="en-US" sz="1200" b="1" spc="100" kern="0" dirty="0">
+                <a:solidFill>
+                  <a:schemeClr val="accent1"/>
+                </a:solidFill>
+              </a:rPr>
+              <a:t>VÝVOJÁR DOSTANE</a:t>
+            </a:r>
+            <a:endParaRPr lang="en-US" sz="1200" dirty="0"/>
+          </a:p>
+        </p:txBody>
+      </p:sp>
+      <p:sp>
+        <p:nvSpPr>
+          <p:cNvPr id="10" name="text-211"/>
+          <p:cNvSpPr txBox="1"/>
+          <p:nvPr/>
+        </p:nvSpPr>
+        <p:spPr>
+          <a:xfrm>
+            <a:off x="7985455" y="2212848"/>
+            <a:ext cx="3383280" cy="1005840"/>
+          </a:xfrm>
+          <a:prstGeom prst="rect">
+            <a:avLst/>
+          </a:prstGeom>
+          <a:noFill/>
+          <a:ln/>
+        </p:spPr>
+        <p:txBody>
+          <a:bodyPr wrap="square" lIns="0" tIns="0" rIns="0" bIns="0" rtlCol="0" anchor="t"/>
+          <a:lstStyle/>
+          <a:p>
+            <a:pPr indent="0" marL="0">
+              <a:buNone/>
+            </a:pPr>
+            <a:r>
+              <a:rPr lang="en-US" sz="1700" i="1" dirty="0">
+                <a:solidFill>
+                  <a:schemeClr val="tx1"/>
+                </a:solidFill>
+                <a:latin typeface="+mj-lt" pitchFamily="34" charset="0"/>
+                <a:ea typeface="+mj-lt" pitchFamily="34" charset="-122"/>
+                <a:cs typeface="+mj-lt" pitchFamily="34" charset="-120"/>
+              </a:rPr>
+              <a:t>„Tlačidlo Stiahnuť PDF pri každej faktúre v profile zákazníka.“</a:t>
+            </a:r>
+            <a:endParaRPr lang="en-US" sz="1700" dirty="0"/>
+          </a:p>
+        </p:txBody>
+      </p:sp>
+      <p:sp>
+        <p:nvSpPr>
+          <p:cNvPr id="11" name="card-212"/>
+          <p:cNvSpPr/>
+          <p:nvPr/>
+        </p:nvSpPr>
+        <p:spPr>
+          <a:xfrm>
+            <a:off x="4907128" y="2034540"/>
+            <a:ext cx="2377440" cy="914400"/>
+          </a:xfrm>
+          <a:prstGeom prst="roundRect">
+            <a:avLst>
+              <a:gd name="adj" fmla="val 8000"/>
+            </a:avLst>
+          </a:prstGeom>
+          <a:solidFill>
+            <a:schemeClr val="accent1"/>
+          </a:solidFill>
+          <a:ln/>
+        </p:spPr>
+      </p:sp>
+      <p:sp>
+        <p:nvSpPr>
+          <p:cNvPr id="12" name="text-213"/>
+          <p:cNvSpPr txBox="1"/>
+          <p:nvPr/>
+        </p:nvSpPr>
+        <p:spPr>
+          <a:xfrm>
+            <a:off x="4907128" y="2034540"/>
+            <a:ext cx="2377440" cy="914400"/>
+          </a:xfrm>
+          <a:prstGeom prst="rect">
+            <a:avLst/>
+          </a:prstGeom>
+          <a:noFill/>
+          <a:ln/>
+        </p:spPr>
+        <p:txBody>
+          <a:bodyPr wrap="square" lIns="0" tIns="0" rIns="0" bIns="0" rtlCol="0" anchor="ctr"/>
+          <a:lstStyle/>
+          <a:p>
+            <a:pPr algn="ctr" indent="0" marL="0">
+              <a:buNone/>
+            </a:pPr>
+            <a:r>
+              <a:rPr lang="en-US" sz="1600" b="1" dirty="0">
+                <a:solidFill>
+                  <a:schemeClr val="bg1"/>
+                </a:solidFill>
+              </a:rPr>
+              <a:t>Product Owner</a:t>
+            </a:r>
+            <a:endParaRPr lang="en-US" sz="1500" dirty="0"/>
+          </a:p>
+          <a:p>
+            <a:pPr algn="ctr" indent="0" marL="0">
+              <a:buNone/>
+            </a:pPr>
+            <a:r>
+              <a:rPr lang="en-US" sz="1300" dirty="0">
+                <a:solidFill>
+                  <a:schemeClr val="accent4"/>
+                </a:solidFill>
+              </a:rPr>
+              <a:t>prekladá cieľ do úlohy</a:t>
+            </a:r>
+            <a:endParaRPr lang="en-US" sz="1500" dirty="0"/>
+          </a:p>
+        </p:txBody>
+      </p:sp>
+      <p:sp>
+        <p:nvSpPr>
+          <p:cNvPr id="13" name="line-214"/>
+          <p:cNvSpPr/>
+          <p:nvPr/>
+        </p:nvSpPr>
+        <p:spPr>
+          <a:xfrm>
+            <a:off x="4480560" y="4457700"/>
+            <a:ext cx="3230575" cy="0"/>
+          </a:xfrm>
+          <a:prstGeom prst="line">
+            <a:avLst/>
+          </a:prstGeom>
+          <a:noFill/>
+          <a:ln w="31750">
             <a:solidFill>
-              <a:srgbClr val="CFE3DC"/>
+              <a:schemeClr val="accent1"/>
             </a:solidFill>
             <a:prstDash val="solid"/>
+            <a:tailEnd type="triangle"/>
           </a:ln>
         </p:spPr>
-      </p:sp>
-      <p:sp>
-        <p:nvSpPr>
-          <p:cNvPr id="12" name="text-213"/>
-          <p:cNvSpPr txBox="1"/>
-          <p:nvPr/>
-        </p:nvSpPr>
-        <p:spPr>
-          <a:xfrm>
-            <a:off x="621792" y="1783080"/>
-            <a:ext cx="1956816" cy="320040"/>
-          </a:xfrm>
-          <a:prstGeom prst="rect">
-            <a:avLst/>
-          </a:prstGeom>
-          <a:noFill/>
-          <a:ln/>
-        </p:spPr>
-        <p:txBody>
-          <a:bodyPr wrap="square" lIns="0" tIns="0" rIns="0" bIns="0" rtlCol="0" anchor="t"/>
-          <a:lstStyle/>
-          <a:p>
-            <a:pPr algn="ctr" indent="0" marL="0">
-              <a:buNone/>
-            </a:pPr>
-            <a:r>
-              <a:rPr lang="en-US" sz="1400" b="1" dirty="0">
-                <a:solidFill>
-                  <a:schemeClr val="tx1"/>
-                </a:solidFill>
-              </a:rPr>
-              <a:t>Klient</a:t>
-            </a:r>
-            <a:endParaRPr lang="en-US" sz="1400" dirty="0"/>
-          </a:p>
-        </p:txBody>
-      </p:sp>
-      <p:sp>
-        <p:nvSpPr>
-          <p:cNvPr id="13" name="text-214"/>
-          <p:cNvSpPr txBox="1"/>
-          <p:nvPr/>
-        </p:nvSpPr>
-        <p:spPr>
-          <a:xfrm>
-            <a:off x="658368" y="2121408"/>
-            <a:ext cx="1883664" cy="365760"/>
-          </a:xfrm>
-          <a:prstGeom prst="rect">
-            <a:avLst/>
-          </a:prstGeom>
-          <a:noFill/>
-          <a:ln/>
-        </p:spPr>
-        <p:txBody>
-          <a:bodyPr wrap="square" lIns="0" tIns="0" rIns="0" bIns="0" rtlCol="0" anchor="t"/>
-          <a:lstStyle/>
-          <a:p>
-            <a:pPr algn="ctr" indent="0" marL="0">
-              <a:buNone/>
-            </a:pPr>
-            <a:r>
-              <a:rPr lang="en-US" sz="1200" i="1" dirty="0">
-                <a:solidFill>
-                  <a:schemeClr val="accent5"/>
-                </a:solidFill>
-              </a:rPr>
-              <a:t>hovorí o: ciele a potreby</a:t>
-            </a:r>
-            <a:endParaRPr lang="en-US" sz="1200" dirty="0"/>
-          </a:p>
-        </p:txBody>
       </p:sp>
       <p:sp>
         <p:nvSpPr>
@@ -15466,23 +15520,18 @@
         </p:nvSpPr>
         <p:spPr>
           <a:xfrm>
-            <a:off x="2926080" y="1691640"/>
-            <a:ext cx="2103120" cy="868680"/>
+            <a:off x="548640" y="3611880"/>
+            <a:ext cx="3931920" cy="1691640"/>
           </a:xfrm>
           <a:prstGeom prst="roundRect">
             <a:avLst>
-              <a:gd name="adj" fmla="val 8421"/>
+              <a:gd name="adj" fmla="val 4324"/>
             </a:avLst>
           </a:prstGeom>
           <a:solidFill>
             <a:schemeClr val="bg2"/>
           </a:solidFill>
-          <a:ln w="12700">
-            <a:solidFill>
-              <a:srgbClr val="CFE3DC"/>
-            </a:solidFill>
-            <a:prstDash val="solid"/>
-          </a:ln>
+          <a:ln/>
         </p:spPr>
       </p:sp>
       <p:sp>
@@ -15493,8 +15542,8 @@
         </p:nvSpPr>
         <p:spPr>
           <a:xfrm>
-            <a:off x="2999232" y="1783080"/>
-            <a:ext cx="1956816" cy="320040"/>
+            <a:off x="822960" y="3840480"/>
+            <a:ext cx="3383280" cy="274320"/>
           </a:xfrm>
           <a:prstGeom prst="rect">
             <a:avLst/>
@@ -15506,54 +15555,57 @@
           <a:bodyPr wrap="square" lIns="0" tIns="0" rIns="0" bIns="0" rtlCol="0" anchor="t"/>
           <a:lstStyle/>
           <a:p>
-            <a:pPr algn="ctr" indent="0" marL="0">
-              <a:buNone/>
-            </a:pPr>
-            <a:r>
-              <a:rPr lang="en-US" sz="1400" b="1" dirty="0">
+            <a:pPr indent="0" marL="0">
+              <a:buNone/>
+            </a:pPr>
+            <a:r>
+              <a:rPr lang="en-US" sz="1200" b="1" spc="100" kern="0" dirty="0">
+                <a:solidFill>
+                  <a:schemeClr val="accent5"/>
+                </a:solidFill>
+              </a:rPr>
+              <a:t>VÝVOJÁR POVIE</a:t>
+            </a:r>
+            <a:endParaRPr lang="en-US" sz="1200" dirty="0"/>
+          </a:p>
+        </p:txBody>
+      </p:sp>
+      <p:sp>
+        <p:nvSpPr>
+          <p:cNvPr id="16" name="text-217"/>
+          <p:cNvSpPr txBox="1"/>
+          <p:nvPr/>
+        </p:nvSpPr>
+        <p:spPr>
+          <a:xfrm>
+            <a:off x="822960" y="4178808"/>
+            <a:ext cx="3383280" cy="1005840"/>
+          </a:xfrm>
+          <a:prstGeom prst="rect">
+            <a:avLst/>
+          </a:prstGeom>
+          <a:noFill/>
+          <a:ln/>
+        </p:spPr>
+        <p:txBody>
+          <a:bodyPr wrap="square" lIns="0" tIns="0" rIns="0" bIns="0" rtlCol="0" anchor="t"/>
+          <a:lstStyle/>
+          <a:p>
+            <a:pPr indent="0" marL="0">
+              <a:buNone/>
+            </a:pPr>
+            <a:r>
+              <a:rPr lang="en-US" sz="1700" i="1" dirty="0">
                 <a:solidFill>
                   <a:schemeClr val="tx1"/>
                 </a:solidFill>
-              </a:rPr>
-              <a:t>Product Owner</a:t>
-            </a:r>
-            <a:endParaRPr lang="en-US" sz="1400" dirty="0"/>
-          </a:p>
-        </p:txBody>
-      </p:sp>
-      <p:sp>
-        <p:nvSpPr>
-          <p:cNvPr id="16" name="text-217"/>
-          <p:cNvSpPr txBox="1"/>
-          <p:nvPr/>
-        </p:nvSpPr>
-        <p:spPr>
-          <a:xfrm>
-            <a:off x="3035808" y="2121408"/>
-            <a:ext cx="1883664" cy="365760"/>
-          </a:xfrm>
-          <a:prstGeom prst="rect">
-            <a:avLst/>
-          </a:prstGeom>
-          <a:noFill/>
-          <a:ln/>
-        </p:spPr>
-        <p:txBody>
-          <a:bodyPr wrap="square" lIns="0" tIns="0" rIns="0" bIns="0" rtlCol="0" anchor="t"/>
-          <a:lstStyle/>
-          <a:p>
-            <a:pPr algn="ctr" indent="0" marL="0">
-              <a:buNone/>
-            </a:pPr>
-            <a:r>
-              <a:rPr lang="en-US" sz="1200" i="1" dirty="0">
-                <a:solidFill>
-                  <a:schemeClr val="accent5"/>
-                </a:solidFill>
-              </a:rPr>
-              <a:t>hovorí o: priority</a:t>
-            </a:r>
-            <a:endParaRPr lang="en-US" sz="1200" dirty="0"/>
+                <a:latin typeface="+mj-lt" pitchFamily="34" charset="0"/>
+                <a:ea typeface="+mj-lt" pitchFamily="34" charset="-122"/>
+                <a:cs typeface="+mj-lt" pitchFamily="34" charset="-120"/>
+              </a:rPr>
+              <a:t>„Platobný modul má veľký technický dlh.“</a:t>
+            </a:r>
+            <a:endParaRPr lang="en-US" sz="1700" dirty="0"/>
           </a:p>
         </p:txBody>
       </p:sp>
@@ -15565,23 +15617,18 @@
         </p:nvSpPr>
         <p:spPr>
           <a:xfrm>
-            <a:off x="5303520" y="1691640"/>
-            <a:ext cx="2103120" cy="868680"/>
+            <a:off x="7711135" y="3611880"/>
+            <a:ext cx="3931920" cy="1691640"/>
           </a:xfrm>
           <a:prstGeom prst="roundRect">
             <a:avLst>
-              <a:gd name="adj" fmla="val 8421"/>
+              <a:gd name="adj" fmla="val 4324"/>
             </a:avLst>
           </a:prstGeom>
           <a:solidFill>
-            <a:schemeClr val="bg2"/>
+            <a:schemeClr val="accent3"/>
           </a:solidFill>
-          <a:ln w="12700">
-            <a:solidFill>
-              <a:srgbClr val="CFE3DC"/>
-            </a:solidFill>
-            <a:prstDash val="solid"/>
-          </a:ln>
+          <a:ln/>
         </p:spPr>
       </p:sp>
       <p:sp>
@@ -15592,8 +15639,8 @@
         </p:nvSpPr>
         <p:spPr>
           <a:xfrm>
-            <a:off x="5376672" y="1783080"/>
-            <a:ext cx="1956816" cy="320040"/>
+            <a:off x="7985455" y="3840480"/>
+            <a:ext cx="3383280" cy="274320"/>
           </a:xfrm>
           <a:prstGeom prst="rect">
             <a:avLst/>
@@ -15605,54 +15652,57 @@
           <a:bodyPr wrap="square" lIns="0" tIns="0" rIns="0" bIns="0" rtlCol="0" anchor="t"/>
           <a:lstStyle/>
           <a:p>
-            <a:pPr algn="ctr" indent="0" marL="0">
-              <a:buNone/>
-            </a:pPr>
-            <a:r>
-              <a:rPr lang="en-US" sz="1400" b="1" dirty="0">
+            <a:pPr indent="0" marL="0">
+              <a:buNone/>
+            </a:pPr>
+            <a:r>
+              <a:rPr lang="en-US" sz="1200" b="1" spc="100" kern="0" dirty="0">
+                <a:solidFill>
+                  <a:schemeClr val="accent1"/>
+                </a:solidFill>
+              </a:rPr>
+              <a:t>VEDENIE POČUJE</a:t>
+            </a:r>
+            <a:endParaRPr lang="en-US" sz="1200" dirty="0"/>
+          </a:p>
+        </p:txBody>
+      </p:sp>
+      <p:sp>
+        <p:nvSpPr>
+          <p:cNvPr id="19" name="text-220"/>
+          <p:cNvSpPr txBox="1"/>
+          <p:nvPr/>
+        </p:nvSpPr>
+        <p:spPr>
+          <a:xfrm>
+            <a:off x="7985455" y="4178808"/>
+            <a:ext cx="3383280" cy="1005840"/>
+          </a:xfrm>
+          <a:prstGeom prst="rect">
+            <a:avLst/>
+          </a:prstGeom>
+          <a:noFill/>
+          <a:ln/>
+        </p:spPr>
+        <p:txBody>
+          <a:bodyPr wrap="square" lIns="0" tIns="0" rIns="0" bIns="0" rtlCol="0" anchor="t"/>
+          <a:lstStyle/>
+          <a:p>
+            <a:pPr indent="0" marL="0">
+              <a:buNone/>
+            </a:pPr>
+            <a:r>
+              <a:rPr lang="en-US" sz="1700" i="1" dirty="0">
                 <a:solidFill>
                   <a:schemeClr val="tx1"/>
                 </a:solidFill>
-              </a:rPr>
-              <a:t>Sponzor a vedenie</a:t>
-            </a:r>
-            <a:endParaRPr lang="en-US" sz="1400" dirty="0"/>
-          </a:p>
-        </p:txBody>
-      </p:sp>
-      <p:sp>
-        <p:nvSpPr>
-          <p:cNvPr id="19" name="text-220"/>
-          <p:cNvSpPr txBox="1"/>
-          <p:nvPr/>
-        </p:nvSpPr>
-        <p:spPr>
-          <a:xfrm>
-            <a:off x="5413248" y="2121408"/>
-            <a:ext cx="1883664" cy="365760"/>
-          </a:xfrm>
-          <a:prstGeom prst="rect">
-            <a:avLst/>
-          </a:prstGeom>
-          <a:noFill/>
-          <a:ln/>
-        </p:spPr>
-        <p:txBody>
-          <a:bodyPr wrap="square" lIns="0" tIns="0" rIns="0" bIns="0" rtlCol="0" anchor="t"/>
-          <a:lstStyle/>
-          <a:p>
-            <a:pPr algn="ctr" indent="0" marL="0">
-              <a:buNone/>
-            </a:pPr>
-            <a:r>
-              <a:rPr lang="en-US" sz="1200" i="1" dirty="0">
-                <a:solidFill>
-                  <a:schemeClr val="accent5"/>
-                </a:solidFill>
-              </a:rPr>
-              <a:t>hovorí o: peniaze a termíny</a:t>
-            </a:r>
-            <a:endParaRPr lang="en-US" sz="1200" dirty="0"/>
+                <a:latin typeface="+mj-lt" pitchFamily="34" charset="0"/>
+                <a:ea typeface="+mj-lt" pitchFamily="34" charset="-122"/>
+                <a:cs typeface="+mj-lt" pitchFamily="34" charset="-120"/>
+              </a:rPr>
+              <a:t>„Bez dvoch týždňov na opravu bude každá zmena platieb pomalšia a rizikovejšia.“</a:t>
+            </a:r>
+            <a:endParaRPr lang="en-US" sz="1700" dirty="0"/>
           </a:p>
         </p:txBody>
       </p:sp>
@@ -15664,736 +15714,136 @@
         </p:nvSpPr>
         <p:spPr>
           <a:xfrm>
-            <a:off x="548640" y="3429000"/>
-            <a:ext cx="2103120" cy="868680"/>
+            <a:off x="4907128" y="4000500"/>
+            <a:ext cx="2377440" cy="914400"/>
           </a:xfrm>
           <a:prstGeom prst="roundRect">
             <a:avLst>
-              <a:gd name="adj" fmla="val 8421"/>
-            </a:avLst>
-          </a:prstGeom>
-          <a:solidFill>
-            <a:schemeClr val="bg2"/>
-          </a:solidFill>
-          <a:ln w="12700">
-            <a:solidFill>
-              <a:srgbClr val="CFE3DC"/>
-            </a:solidFill>
-            <a:prstDash val="solid"/>
-          </a:ln>
-        </p:spPr>
-      </p:sp>
-      <p:sp>
-        <p:nvSpPr>
-          <p:cNvPr id="21" name="text-222"/>
-          <p:cNvSpPr txBox="1"/>
-          <p:nvPr/>
-        </p:nvSpPr>
-        <p:spPr>
-          <a:xfrm>
-            <a:off x="621792" y="3520440"/>
-            <a:ext cx="1956816" cy="320040"/>
-          </a:xfrm>
-          <a:prstGeom prst="rect">
-            <a:avLst/>
-          </a:prstGeom>
-          <a:noFill/>
-          <a:ln/>
-        </p:spPr>
-        <p:txBody>
-          <a:bodyPr wrap="square" lIns="0" tIns="0" rIns="0" bIns="0" rtlCol="0" anchor="t"/>
-          <a:lstStyle/>
-          <a:p>
-            <a:pPr algn="ctr" indent="0" marL="0">
-              <a:buNone/>
-            </a:pPr>
-            <a:r>
-              <a:rPr lang="en-US" sz="1400" b="1" dirty="0">
-                <a:solidFill>
-                  <a:schemeClr val="tx1"/>
-                </a:solidFill>
-              </a:rPr>
-              <a:t>Vývojári</a:t>
-            </a:r>
-            <a:endParaRPr lang="en-US" sz="1400" dirty="0"/>
-          </a:p>
-        </p:txBody>
-      </p:sp>
-      <p:sp>
-        <p:nvSpPr>
-          <p:cNvPr id="22" name="text-223"/>
-          <p:cNvSpPr txBox="1"/>
-          <p:nvPr/>
-        </p:nvSpPr>
-        <p:spPr>
-          <a:xfrm>
-            <a:off x="658368" y="3858768"/>
-            <a:ext cx="1883664" cy="365760"/>
-          </a:xfrm>
-          <a:prstGeom prst="rect">
-            <a:avLst/>
-          </a:prstGeom>
-          <a:noFill/>
-          <a:ln/>
-        </p:spPr>
-        <p:txBody>
-          <a:bodyPr wrap="square" lIns="0" tIns="0" rIns="0" bIns="0" rtlCol="0" anchor="t"/>
-          <a:lstStyle/>
-          <a:p>
-            <a:pPr algn="ctr" indent="0" marL="0">
-              <a:buNone/>
-            </a:pPr>
-            <a:r>
-              <a:rPr lang="en-US" sz="1200" i="1" dirty="0">
-                <a:solidFill>
-                  <a:schemeClr val="accent5"/>
-                </a:solidFill>
-              </a:rPr>
-              <a:t>hovorí o: technické riešenie</a:t>
-            </a:r>
-            <a:endParaRPr lang="en-US" sz="1200" dirty="0"/>
-          </a:p>
-        </p:txBody>
-      </p:sp>
-      <p:sp>
-        <p:nvSpPr>
-          <p:cNvPr id="23" name="card-224"/>
-          <p:cNvSpPr/>
-          <p:nvPr/>
-        </p:nvSpPr>
-        <p:spPr>
-          <a:xfrm>
-            <a:off x="2926080" y="3429000"/>
-            <a:ext cx="2103120" cy="868680"/>
-          </a:xfrm>
-          <a:prstGeom prst="roundRect">
-            <a:avLst>
-              <a:gd name="adj" fmla="val 8421"/>
-            </a:avLst>
-          </a:prstGeom>
-          <a:solidFill>
-            <a:schemeClr val="bg2"/>
-          </a:solidFill>
-          <a:ln w="12700">
-            <a:solidFill>
-              <a:srgbClr val="CFE3DC"/>
-            </a:solidFill>
-            <a:prstDash val="solid"/>
-          </a:ln>
-        </p:spPr>
-      </p:sp>
-      <p:sp>
-        <p:nvSpPr>
-          <p:cNvPr id="24" name="text-225"/>
-          <p:cNvSpPr txBox="1"/>
-          <p:nvPr/>
-        </p:nvSpPr>
-        <p:spPr>
-          <a:xfrm>
-            <a:off x="2999232" y="3520440"/>
-            <a:ext cx="1956816" cy="320040"/>
-          </a:xfrm>
-          <a:prstGeom prst="rect">
-            <a:avLst/>
-          </a:prstGeom>
-          <a:noFill/>
-          <a:ln/>
-        </p:spPr>
-        <p:txBody>
-          <a:bodyPr wrap="square" lIns="0" tIns="0" rIns="0" bIns="0" rtlCol="0" anchor="t"/>
-          <a:lstStyle/>
-          <a:p>
-            <a:pPr algn="ctr" indent="0" marL="0">
-              <a:buNone/>
-            </a:pPr>
-            <a:r>
-              <a:rPr lang="en-US" sz="1400" b="1" dirty="0">
-                <a:solidFill>
-                  <a:schemeClr val="tx1"/>
-                </a:solidFill>
-              </a:rPr>
-              <a:t>Projektový manažér</a:t>
-            </a:r>
-            <a:endParaRPr lang="en-US" sz="1400" dirty="0"/>
-          </a:p>
-        </p:txBody>
-      </p:sp>
-      <p:sp>
-        <p:nvSpPr>
-          <p:cNvPr id="25" name="text-226"/>
-          <p:cNvSpPr txBox="1"/>
-          <p:nvPr/>
-        </p:nvSpPr>
-        <p:spPr>
-          <a:xfrm>
-            <a:off x="3035808" y="3858768"/>
-            <a:ext cx="1883664" cy="365760"/>
-          </a:xfrm>
-          <a:prstGeom prst="rect">
-            <a:avLst/>
-          </a:prstGeom>
-          <a:noFill/>
-          <a:ln/>
-        </p:spPr>
-        <p:txBody>
-          <a:bodyPr wrap="square" lIns="0" tIns="0" rIns="0" bIns="0" rtlCol="0" anchor="t"/>
-          <a:lstStyle/>
-          <a:p>
-            <a:pPr algn="ctr" indent="0" marL="0">
-              <a:buNone/>
-            </a:pPr>
-            <a:r>
-              <a:rPr lang="en-US" sz="1200" i="1" dirty="0">
-                <a:solidFill>
-                  <a:schemeClr val="accent5"/>
-                </a:solidFill>
-              </a:rPr>
-              <a:t>hovorí o: plán a riziká</a:t>
-            </a:r>
-            <a:endParaRPr lang="en-US" sz="1200" dirty="0"/>
-          </a:p>
-        </p:txBody>
-      </p:sp>
-      <p:sp>
-        <p:nvSpPr>
-          <p:cNvPr id="26" name="card-227"/>
-          <p:cNvSpPr/>
-          <p:nvPr/>
-        </p:nvSpPr>
-        <p:spPr>
-          <a:xfrm>
-            <a:off x="5303520" y="3429000"/>
-            <a:ext cx="2103120" cy="868680"/>
-          </a:xfrm>
-          <a:prstGeom prst="roundRect">
-            <a:avLst>
-              <a:gd name="adj" fmla="val 8421"/>
+              <a:gd name="adj" fmla="val 8000"/>
             </a:avLst>
           </a:prstGeom>
           <a:solidFill>
             <a:schemeClr val="accent1"/>
           </a:solidFill>
-          <a:ln w="12700">
-            <a:solidFill>
-              <a:srgbClr val="0E7C66"/>
-            </a:solidFill>
-            <a:prstDash val="solid"/>
-          </a:ln>
-        </p:spPr>
-      </p:sp>
-      <p:sp>
-        <p:nvSpPr>
-          <p:cNvPr id="27" name="text-228"/>
-          <p:cNvSpPr txBox="1"/>
-          <p:nvPr/>
-        </p:nvSpPr>
-        <p:spPr>
-          <a:xfrm>
-            <a:off x="5376672" y="3520440"/>
-            <a:ext cx="1956816" cy="320040"/>
-          </a:xfrm>
-          <a:prstGeom prst="rect">
-            <a:avLst/>
-          </a:prstGeom>
-          <a:noFill/>
-          <a:ln/>
-        </p:spPr>
-        <p:txBody>
-          <a:bodyPr wrap="square" lIns="0" tIns="0" rIns="0" bIns="0" rtlCol="0" anchor="t"/>
+          <a:ln/>
+        </p:spPr>
+      </p:sp>
+      <p:sp>
+        <p:nvSpPr>
+          <p:cNvPr id="21" name="text-222"/>
+          <p:cNvSpPr txBox="1"/>
+          <p:nvPr/>
+        </p:nvSpPr>
+        <p:spPr>
+          <a:xfrm>
+            <a:off x="4907128" y="4000500"/>
+            <a:ext cx="2377440" cy="914400"/>
+          </a:xfrm>
+          <a:prstGeom prst="rect">
+            <a:avLst/>
+          </a:prstGeom>
+          <a:noFill/>
+          <a:ln/>
+        </p:spPr>
+        <p:txBody>
+          <a:bodyPr wrap="square" lIns="0" tIns="0" rIns="0" bIns="0" rtlCol="0" anchor="ctr"/>
           <a:lstStyle/>
           <a:p>
             <a:pPr algn="ctr" indent="0" marL="0">
               <a:buNone/>
             </a:pPr>
             <a:r>
-              <a:rPr lang="en-US" sz="1400" b="1" dirty="0">
+              <a:rPr lang="en-US" sz="1600" b="1" dirty="0">
                 <a:solidFill>
                   <a:schemeClr val="bg1"/>
                 </a:solidFill>
               </a:rPr>
-              <a:t>PMO</a:t>
-            </a:r>
-            <a:endParaRPr lang="en-US" sz="1400" dirty="0"/>
-          </a:p>
-        </p:txBody>
-      </p:sp>
-      <p:sp>
-        <p:nvSpPr>
-          <p:cNvPr id="28" name="text-229"/>
-          <p:cNvSpPr txBox="1"/>
-          <p:nvPr/>
-        </p:nvSpPr>
-        <p:spPr>
-          <a:xfrm>
-            <a:off x="5413248" y="3858768"/>
-            <a:ext cx="1883664" cy="365760"/>
-          </a:xfrm>
-          <a:prstGeom prst="rect">
-            <a:avLst/>
-          </a:prstGeom>
-          <a:noFill/>
-          <a:ln/>
-        </p:spPr>
-        <p:txBody>
-          <a:bodyPr wrap="square" lIns="0" tIns="0" rIns="0" bIns="0" rtlCol="0" anchor="t"/>
-          <a:lstStyle/>
+              <a:t>Projektový manažér</a:t>
+            </a:r>
+            <a:endParaRPr lang="en-US" sz="1500" dirty="0"/>
+          </a:p>
           <a:p>
             <a:pPr algn="ctr" indent="0" marL="0">
               <a:buNone/>
             </a:pPr>
             <a:r>
-              <a:rPr lang="en-US" sz="1200" i="1" dirty="0">
+              <a:rPr lang="en-US" sz="1300" dirty="0">
                 <a:solidFill>
                   <a:schemeClr val="accent4"/>
                 </a:solidFill>
               </a:rPr>
-              <a:t>hovorí o: prehľad naprieč projektmi</a:t>
-            </a:r>
-            <a:endParaRPr lang="en-US" sz="1200" dirty="0"/>
-          </a:p>
-        </p:txBody>
-      </p:sp>
-      <p:sp>
-        <p:nvSpPr>
-          <p:cNvPr id="29" name="card-230"/>
+              <a:t>prekladá stav do dopadu</a:t>
+            </a:r>
+            <a:endParaRPr lang="en-US" sz="1500" dirty="0"/>
+          </a:p>
+        </p:txBody>
+      </p:sp>
+      <p:sp>
+        <p:nvSpPr>
+          <p:cNvPr id="22" name="card-223"/>
           <p:cNvSpPr/>
           <p:nvPr/>
         </p:nvSpPr>
         <p:spPr>
           <a:xfrm>
-            <a:off x="548640" y="5166360"/>
-            <a:ext cx="2103120" cy="868680"/>
+            <a:off x="548640" y="5486400"/>
+            <a:ext cx="11094415" cy="685800"/>
           </a:xfrm>
           <a:prstGeom prst="roundRect">
             <a:avLst>
-              <a:gd name="adj" fmla="val 8421"/>
+              <a:gd name="adj" fmla="val 10667"/>
             </a:avLst>
           </a:prstGeom>
           <a:solidFill>
-            <a:schemeClr val="bg2"/>
+            <a:schemeClr val="accent6"/>
           </a:solidFill>
-          <a:ln w="12700">
-            <a:solidFill>
-              <a:srgbClr val="CFE3DC"/>
-            </a:solidFill>
-            <a:prstDash val="solid"/>
-          </a:ln>
-        </p:spPr>
-      </p:sp>
-      <p:sp>
-        <p:nvSpPr>
-          <p:cNvPr id="30" name="text-231"/>
-          <p:cNvSpPr txBox="1"/>
-          <p:nvPr/>
-        </p:nvSpPr>
-        <p:spPr>
-          <a:xfrm>
-            <a:off x="621792" y="5257800"/>
-            <a:ext cx="1956816" cy="320040"/>
-          </a:xfrm>
-          <a:prstGeom prst="rect">
-            <a:avLst/>
-          </a:prstGeom>
-          <a:noFill/>
-          <a:ln/>
-        </p:spPr>
-        <p:txBody>
-          <a:bodyPr wrap="square" lIns="0" tIns="0" rIns="0" bIns="0" rtlCol="0" anchor="t"/>
-          <a:lstStyle/>
-          <a:p>
-            <a:pPr algn="ctr" indent="0" marL="0">
-              <a:buNone/>
-            </a:pPr>
-            <a:r>
-              <a:rPr lang="en-US" sz="1400" b="1" dirty="0">
+          <a:ln/>
+        </p:spPr>
+      </p:sp>
+      <p:sp>
+        <p:nvSpPr>
+          <p:cNvPr id="23" name="text-224"/>
+          <p:cNvSpPr txBox="1"/>
+          <p:nvPr/>
+        </p:nvSpPr>
+        <p:spPr>
+          <a:xfrm>
+            <a:off x="822960" y="5486400"/>
+            <a:ext cx="10545775" cy="685800"/>
+          </a:xfrm>
+          <a:prstGeom prst="rect">
+            <a:avLst/>
+          </a:prstGeom>
+          <a:noFill/>
+          <a:ln/>
+        </p:spPr>
+        <p:txBody>
+          <a:bodyPr wrap="square" lIns="0" tIns="0" rIns="0" bIns="0" rtlCol="0" anchor="ctr"/>
+          <a:lstStyle/>
+          <a:p>
+            <a:pPr indent="0" marL="0">
+              <a:buNone/>
+            </a:pPr>
+            <a:r>
+              <a:rPr lang="en-US" sz="1500" b="1" dirty="0">
+                <a:solidFill>
+                  <a:schemeClr val="accent2"/>
+                </a:solidFill>
+              </a:rPr>
+              <a:t>Každý hovorí o tom, čo sám rieši: </a:t>
+            </a:r>
+            <a:pPr indent="0" marL="0">
+              <a:buNone/>
+            </a:pPr>
+            <a:r>
+              <a:rPr lang="en-US" sz="1500" dirty="0">
                 <a:solidFill>
                   <a:schemeClr val="tx1"/>
                 </a:solidFill>
               </a:rPr>
-              <a:t>Testeri</a:t>
-            </a:r>
-            <a:endParaRPr lang="en-US" sz="1400" dirty="0"/>
-          </a:p>
-        </p:txBody>
-      </p:sp>
-      <p:sp>
-        <p:nvSpPr>
-          <p:cNvPr id="31" name="text-232"/>
-          <p:cNvSpPr txBox="1"/>
-          <p:nvPr/>
-        </p:nvSpPr>
-        <p:spPr>
-          <a:xfrm>
-            <a:off x="658368" y="5596128"/>
-            <a:ext cx="1883664" cy="365760"/>
-          </a:xfrm>
-          <a:prstGeom prst="rect">
-            <a:avLst/>
-          </a:prstGeom>
-          <a:noFill/>
-          <a:ln/>
-        </p:spPr>
-        <p:txBody>
-          <a:bodyPr wrap="square" lIns="0" tIns="0" rIns="0" bIns="0" rtlCol="0" anchor="t"/>
-          <a:lstStyle/>
-          <a:p>
-            <a:pPr algn="ctr" indent="0" marL="0">
-              <a:buNone/>
-            </a:pPr>
-            <a:r>
-              <a:rPr lang="en-US" sz="1200" i="1" dirty="0">
-                <a:solidFill>
-                  <a:schemeClr val="accent5"/>
-                </a:solidFill>
-              </a:rPr>
-              <a:t>hovorí o: chyby a kvalita</a:t>
-            </a:r>
-            <a:endParaRPr lang="en-US" sz="1200" dirty="0"/>
-          </a:p>
-        </p:txBody>
-      </p:sp>
-      <p:sp>
-        <p:nvSpPr>
-          <p:cNvPr id="32" name="dot-233"/>
-          <p:cNvSpPr txBox="1"/>
-          <p:nvPr/>
-        </p:nvSpPr>
-        <p:spPr>
-          <a:xfrm>
-            <a:off x="2606040" y="1943100"/>
-            <a:ext cx="365760" cy="365760"/>
-          </a:xfrm>
-          <a:prstGeom prst="ellipse">
-            <a:avLst/>
-          </a:prstGeom>
-          <a:solidFill>
-            <a:schemeClr val="accent2"/>
-          </a:solidFill>
-          <a:ln/>
-        </p:spPr>
-        <p:txBody>
-          <a:bodyPr wrap="square" lIns="0" tIns="0" rIns="0" bIns="0" rtlCol="0" anchor="ctr"/>
-          <a:lstStyle/>
-          <a:p>
-            <a:pPr algn="ctr" indent="0" marL="0">
-              <a:buNone/>
-            </a:pPr>
-            <a:r>
-              <a:rPr lang="en-US" sz="1300" b="1" dirty="0">
-                <a:solidFill>
-                  <a:schemeClr val="bg1"/>
-                </a:solidFill>
-                <a:latin typeface="+mj-lt" pitchFamily="34" charset="0"/>
-                <a:ea typeface="+mj-lt" pitchFamily="34" charset="-122"/>
-                <a:cs typeface="+mj-lt" pitchFamily="34" charset="-120"/>
-              </a:rPr>
-              <a:t>1</a:t>
-            </a:r>
-            <a:endParaRPr lang="en-US" sz="1300" dirty="0"/>
-          </a:p>
-        </p:txBody>
-      </p:sp>
-      <p:sp>
-        <p:nvSpPr>
-          <p:cNvPr id="33" name="dot-234"/>
-          <p:cNvSpPr txBox="1"/>
-          <p:nvPr/>
-        </p:nvSpPr>
-        <p:spPr>
-          <a:xfrm>
-            <a:off x="4983480" y="2811780"/>
-            <a:ext cx="365760" cy="365760"/>
-          </a:xfrm>
-          <a:prstGeom prst="ellipse">
-            <a:avLst/>
-          </a:prstGeom>
-          <a:solidFill>
-            <a:schemeClr val="accent2"/>
-          </a:solidFill>
-          <a:ln/>
-        </p:spPr>
-        <p:txBody>
-          <a:bodyPr wrap="square" lIns="0" tIns="0" rIns="0" bIns="0" rtlCol="0" anchor="ctr"/>
-          <a:lstStyle/>
-          <a:p>
-            <a:pPr algn="ctr" indent="0" marL="0">
-              <a:buNone/>
-            </a:pPr>
-            <a:r>
-              <a:rPr lang="en-US" sz="1300" b="1" dirty="0">
-                <a:solidFill>
-                  <a:schemeClr val="bg1"/>
-                </a:solidFill>
-                <a:latin typeface="+mj-lt" pitchFamily="34" charset="0"/>
-                <a:ea typeface="+mj-lt" pitchFamily="34" charset="-122"/>
-                <a:cs typeface="+mj-lt" pitchFamily="34" charset="-120"/>
-              </a:rPr>
-              <a:t>2</a:t>
-            </a:r>
-            <a:endParaRPr lang="en-US" sz="1300" dirty="0"/>
-          </a:p>
-        </p:txBody>
-      </p:sp>
-      <p:sp>
-        <p:nvSpPr>
-          <p:cNvPr id="34" name="dot-235"/>
-          <p:cNvSpPr txBox="1"/>
-          <p:nvPr/>
-        </p:nvSpPr>
-        <p:spPr>
-          <a:xfrm>
-            <a:off x="1417320" y="4549140"/>
-            <a:ext cx="365760" cy="365760"/>
-          </a:xfrm>
-          <a:prstGeom prst="ellipse">
-            <a:avLst/>
-          </a:prstGeom>
-          <a:solidFill>
-            <a:schemeClr val="accent2"/>
-          </a:solidFill>
-          <a:ln/>
-        </p:spPr>
-        <p:txBody>
-          <a:bodyPr wrap="square" lIns="0" tIns="0" rIns="0" bIns="0" rtlCol="0" anchor="ctr"/>
-          <a:lstStyle/>
-          <a:p>
-            <a:pPr algn="ctr" indent="0" marL="0">
-              <a:buNone/>
-            </a:pPr>
-            <a:r>
-              <a:rPr lang="en-US" sz="1300" b="1" dirty="0">
-                <a:solidFill>
-                  <a:schemeClr val="bg1"/>
-                </a:solidFill>
-                <a:latin typeface="+mj-lt" pitchFamily="34" charset="0"/>
-                <a:ea typeface="+mj-lt" pitchFamily="34" charset="-122"/>
-                <a:cs typeface="+mj-lt" pitchFamily="34" charset="-120"/>
-              </a:rPr>
-              <a:t>3</a:t>
-            </a:r>
-            <a:endParaRPr lang="en-US" sz="1300" dirty="0"/>
-          </a:p>
-        </p:txBody>
-      </p:sp>
-      <p:sp>
-        <p:nvSpPr>
-          <p:cNvPr id="35" name="card-236"/>
-          <p:cNvSpPr/>
-          <p:nvPr/>
-        </p:nvSpPr>
-        <p:spPr>
-          <a:xfrm>
-            <a:off x="7680960" y="1691640"/>
-            <a:ext cx="3959352" cy="4343400"/>
-          </a:xfrm>
-          <a:prstGeom prst="roundRect">
-            <a:avLst>
-              <a:gd name="adj" fmla="val 1848"/>
-            </a:avLst>
-          </a:prstGeom>
-          <a:solidFill>
-            <a:schemeClr val="bg2"/>
-          </a:solidFill>
-          <a:ln/>
-        </p:spPr>
-      </p:sp>
-      <p:sp>
-        <p:nvSpPr>
-          <p:cNvPr id="36" name="text-237"/>
-          <p:cNvSpPr txBox="1"/>
-          <p:nvPr/>
-        </p:nvSpPr>
-        <p:spPr>
-          <a:xfrm>
-            <a:off x="7955280" y="1920240"/>
-            <a:ext cx="3474720" cy="411480"/>
-          </a:xfrm>
-          <a:prstGeom prst="rect">
-            <a:avLst/>
-          </a:prstGeom>
-          <a:noFill/>
-          <a:ln/>
-        </p:spPr>
-        <p:txBody>
-          <a:bodyPr wrap="square" lIns="0" tIns="0" rIns="0" bIns="0" rtlCol="0" anchor="t"/>
-          <a:lstStyle/>
-          <a:p>
-            <a:pPr indent="0" marL="0">
-              <a:buNone/>
-            </a:pPr>
-            <a:r>
-              <a:rPr lang="en-US" sz="2000" b="1" dirty="0">
-                <a:solidFill>
-                  <a:schemeClr val="tx1"/>
-                </a:solidFill>
-                <a:latin typeface="+mj-lt" pitchFamily="34" charset="0"/>
-                <a:ea typeface="+mj-lt" pitchFamily="34" charset="-122"/>
-                <a:cs typeface="+mj-lt" pitchFamily="34" charset="-120"/>
-              </a:rPr>
-              <a:t>Niekto musí prekladať</a:t>
-            </a:r>
-            <a:endParaRPr lang="en-US" sz="2000" dirty="0"/>
-          </a:p>
-        </p:txBody>
-      </p:sp>
-      <p:sp>
-        <p:nvSpPr>
-          <p:cNvPr id="37" name="text-238"/>
-          <p:cNvSpPr txBox="1"/>
-          <p:nvPr/>
-        </p:nvSpPr>
-        <p:spPr>
-          <a:xfrm>
-            <a:off x="7955280" y="2468880"/>
-            <a:ext cx="3474720" cy="2240280"/>
-          </a:xfrm>
-          <a:prstGeom prst="rect">
-            <a:avLst/>
-          </a:prstGeom>
-          <a:noFill/>
-          <a:ln/>
-        </p:spPr>
-        <p:txBody>
-          <a:bodyPr wrap="square" lIns="0" tIns="0" rIns="0" bIns="0" rtlCol="0" anchor="t"/>
-          <a:lstStyle/>
-          <a:p>
-            <a:pPr indent="0" marL="0">
-              <a:spcAft>
-                <a:spcPts val="1000"/>
-              </a:spcAft>
-              <a:buNone/>
-            </a:pPr>
-            <a:r>
-              <a:rPr lang="en-US" sz="1500" b="1" dirty="0">
-                <a:solidFill>
-                  <a:schemeClr val="tx1"/>
-                </a:solidFill>
-              </a:rPr>
-              <a:t>Product Owner </a:t>
-            </a:r>
-            <a:pPr indent="0" marL="0">
-              <a:spcAft>
-                <a:spcPts val="1000"/>
-              </a:spcAft>
-              <a:buNone/>
-            </a:pPr>
-            <a:r>
-              <a:rPr lang="en-US" sz="1500" dirty="0">
-                <a:solidFill>
-                  <a:schemeClr val="tx1"/>
-                </a:solidFill>
-              </a:rPr>
-              <a:t>prekladá potreby klienta do zrozumiteľných úloh pre vývoj.</a:t>
+              <a:t>klient o cieľoch, vývoj o riešení, vedenie o peniazoch. Niekto to musí prekladať.</a:t>
             </a:r>
             <a:endParaRPr lang="en-US" sz="1500" dirty="0"/>
-          </a:p>
-          <a:p>
-            <a:pPr indent="0" marL="0">
-              <a:spcAft>
-                <a:spcPts val="1000"/>
-              </a:spcAft>
-              <a:buNone/>
-            </a:pPr>
-            <a:r>
-              <a:rPr lang="en-US" sz="1500" b="1" dirty="0">
-                <a:solidFill>
-                  <a:schemeClr val="tx1"/>
-                </a:solidFill>
-              </a:rPr>
-              <a:t>Projektový manažér </a:t>
-            </a:r>
-            <a:pPr indent="0" marL="0">
-              <a:spcAft>
-                <a:spcPts val="1000"/>
-              </a:spcAft>
-              <a:buNone/>
-            </a:pPr>
-            <a:r>
-              <a:rPr lang="en-US" sz="1500" dirty="0">
-                <a:solidFill>
-                  <a:schemeClr val="tx1"/>
-                </a:solidFill>
-              </a:rPr>
-              <a:t>prekladá technický stav do reči dopadov: čo to znamená pre termín, peniaze a aké rozhodnutie treba.</a:t>
-            </a:r>
-            <a:endParaRPr lang="en-US" sz="1500" dirty="0"/>
-          </a:p>
-        </p:txBody>
-      </p:sp>
-      <p:sp>
-        <p:nvSpPr>
-          <p:cNvPr id="38" name="dot-239"/>
-          <p:cNvSpPr txBox="1"/>
-          <p:nvPr/>
-        </p:nvSpPr>
-        <p:spPr>
-          <a:xfrm>
-            <a:off x="7955280" y="4983480"/>
-            <a:ext cx="365760" cy="365760"/>
-          </a:xfrm>
-          <a:prstGeom prst="ellipse">
-            <a:avLst/>
-          </a:prstGeom>
-          <a:solidFill>
-            <a:schemeClr val="accent2"/>
-          </a:solidFill>
-          <a:ln/>
-        </p:spPr>
-        <p:txBody>
-          <a:bodyPr wrap="square" lIns="0" tIns="0" rIns="0" bIns="0" rtlCol="0" anchor="ctr"/>
-          <a:lstStyle/>
-          <a:p>
-            <a:pPr algn="ctr" indent="0" marL="0">
-              <a:buNone/>
-            </a:pPr>
-            <a:r>
-              <a:rPr lang="en-US" sz="1300" b="1" dirty="0">
-                <a:solidFill>
-                  <a:schemeClr val="bg1"/>
-                </a:solidFill>
-                <a:latin typeface="+mj-lt" pitchFamily="34" charset="0"/>
-                <a:ea typeface="+mj-lt" pitchFamily="34" charset="-122"/>
-                <a:cs typeface="+mj-lt" pitchFamily="34" charset="-120"/>
-              </a:rPr>
-              <a:t>!</a:t>
-            </a:r>
-            <a:endParaRPr lang="en-US" sz="1300" dirty="0"/>
-          </a:p>
-        </p:txBody>
-      </p:sp>
-      <p:sp>
-        <p:nvSpPr>
-          <p:cNvPr id="39" name="text-240"/>
-          <p:cNvSpPr txBox="1"/>
-          <p:nvPr/>
-        </p:nvSpPr>
-        <p:spPr>
-          <a:xfrm>
-            <a:off x="8458200" y="4892040"/>
-            <a:ext cx="2971800" cy="594360"/>
-          </a:xfrm>
-          <a:prstGeom prst="rect">
-            <a:avLst/>
-          </a:prstGeom>
-          <a:noFill/>
-          <a:ln/>
-        </p:spPr>
-        <p:txBody>
-          <a:bodyPr wrap="square" lIns="0" tIns="0" rIns="0" bIns="0" rtlCol="0" anchor="ctr"/>
-          <a:lstStyle/>
-          <a:p>
-            <a:pPr indent="0" marL="0">
-              <a:buNone/>
-            </a:pPr>
-            <a:r>
-              <a:rPr lang="en-US" sz="1400" i="1" dirty="0">
-                <a:solidFill>
-                  <a:schemeClr val="accent5"/>
-                </a:solidFill>
-              </a:rPr>
-              <a:t>Oranžové body sú miesta, kde sa informácia najčastejšie stráca.</a:t>
-            </a:r>
-            <a:endParaRPr lang="en-US" sz="1400" dirty="0"/>
           </a:p>
         </p:txBody>
       </p:sp>
@@ -16545,7 +15995,7 @@
       </p:sp>
       <p:sp>
         <p:nvSpPr>
-          <p:cNvPr id="4" name="text-241"/>
+          <p:cNvPr id="4" name="text-225"/>
           <p:cNvSpPr txBox="1"/>
           <p:nvPr/>
         </p:nvSpPr>
@@ -16581,7 +16031,7 @@
       </p:sp>
       <p:sp>
         <p:nvSpPr>
-          <p:cNvPr id="5" name="text-242"/>
+          <p:cNvPr id="5" name="text-226"/>
           <p:cNvSpPr txBox="1"/>
           <p:nvPr/>
         </p:nvSpPr>
@@ -16617,7 +16067,7 @@
       </p:sp>
       <p:sp>
         <p:nvSpPr>
-          <p:cNvPr id="6" name="text-243"/>
+          <p:cNvPr id="6" name="text-227"/>
           <p:cNvSpPr txBox="1"/>
           <p:nvPr/>
         </p:nvSpPr>
@@ -16653,7 +16103,7 @@
       </p:sp>
       <p:sp>
         <p:nvSpPr>
-          <p:cNvPr id="7" name="card-244"/>
+          <p:cNvPr id="7" name="card-228"/>
           <p:cNvSpPr/>
           <p:nvPr/>
         </p:nvSpPr>
@@ -16675,7 +16125,7 @@
       </p:sp>
       <p:sp>
         <p:nvSpPr>
-          <p:cNvPr id="8" name="dot-245"/>
+          <p:cNvPr id="8" name="dot-229"/>
           <p:cNvSpPr txBox="1"/>
           <p:nvPr/>
         </p:nvSpPr>
@@ -16716,7 +16166,7 @@
       </p:sp>
       <p:sp>
         <p:nvSpPr>
-          <p:cNvPr id="9" name="text-246"/>
+          <p:cNvPr id="9" name="text-230"/>
           <p:cNvSpPr txBox="1"/>
           <p:nvPr/>
         </p:nvSpPr>
@@ -16755,7 +16205,7 @@
       </p:sp>
       <p:sp>
         <p:nvSpPr>
-          <p:cNvPr id="10" name="text-247"/>
+          <p:cNvPr id="10" name="text-231"/>
           <p:cNvSpPr txBox="1"/>
           <p:nvPr/>
         </p:nvSpPr>
@@ -16791,7 +16241,7 @@
       </p:sp>
       <p:sp>
         <p:nvSpPr>
-          <p:cNvPr id="11" name="text-248"/>
+          <p:cNvPr id="11" name="text-232"/>
           <p:cNvSpPr txBox="1"/>
           <p:nvPr/>
         </p:nvSpPr>
@@ -16827,7 +16277,7 @@
       </p:sp>
       <p:sp>
         <p:nvSpPr>
-          <p:cNvPr id="12" name="card-249"/>
+          <p:cNvPr id="12" name="card-233"/>
           <p:cNvSpPr/>
           <p:nvPr/>
         </p:nvSpPr>
@@ -16849,7 +16299,7 @@
       </p:sp>
       <p:sp>
         <p:nvSpPr>
-          <p:cNvPr id="13" name="dot-250"/>
+          <p:cNvPr id="13" name="dot-234"/>
           <p:cNvSpPr txBox="1"/>
           <p:nvPr/>
         </p:nvSpPr>
@@ -16890,7 +16340,7 @@
       </p:sp>
       <p:sp>
         <p:nvSpPr>
-          <p:cNvPr id="14" name="text-251"/>
+          <p:cNvPr id="14" name="text-235"/>
           <p:cNvSpPr txBox="1"/>
           <p:nvPr/>
         </p:nvSpPr>
@@ -16929,7 +16379,7 @@
       </p:sp>
       <p:sp>
         <p:nvSpPr>
-          <p:cNvPr id="15" name="text-252"/>
+          <p:cNvPr id="15" name="text-236"/>
           <p:cNvSpPr txBox="1"/>
           <p:nvPr/>
         </p:nvSpPr>
@@ -16965,7 +16415,7 @@
       </p:sp>
       <p:sp>
         <p:nvSpPr>
-          <p:cNvPr id="16" name="text-253"/>
+          <p:cNvPr id="16" name="text-237"/>
           <p:cNvSpPr txBox="1"/>
           <p:nvPr/>
         </p:nvSpPr>
@@ -17001,7 +16451,7 @@
       </p:sp>
       <p:sp>
         <p:nvSpPr>
-          <p:cNvPr id="17" name="card-254"/>
+          <p:cNvPr id="17" name="card-238"/>
           <p:cNvSpPr/>
           <p:nvPr/>
         </p:nvSpPr>
@@ -17023,7 +16473,7 @@
       </p:sp>
       <p:sp>
         <p:nvSpPr>
-          <p:cNvPr id="18" name="dot-255"/>
+          <p:cNvPr id="18" name="dot-239"/>
           <p:cNvSpPr txBox="1"/>
           <p:nvPr/>
         </p:nvSpPr>
@@ -17064,7 +16514,7 @@
       </p:sp>
       <p:sp>
         <p:nvSpPr>
-          <p:cNvPr id="19" name="text-256"/>
+          <p:cNvPr id="19" name="text-240"/>
           <p:cNvSpPr txBox="1"/>
           <p:nvPr/>
         </p:nvSpPr>
@@ -17103,7 +16553,7 @@
       </p:sp>
       <p:sp>
         <p:nvSpPr>
-          <p:cNvPr id="20" name="text-257"/>
+          <p:cNvPr id="20" name="text-241"/>
           <p:cNvSpPr txBox="1"/>
           <p:nvPr/>
         </p:nvSpPr>
@@ -17139,7 +16589,7 @@
       </p:sp>
       <p:sp>
         <p:nvSpPr>
-          <p:cNvPr id="21" name="text-258"/>
+          <p:cNvPr id="21" name="text-242"/>
           <p:cNvSpPr txBox="1"/>
           <p:nvPr/>
         </p:nvSpPr>
@@ -17175,7 +16625,7 @@
       </p:sp>
       <p:sp>
         <p:nvSpPr>
-          <p:cNvPr id="22" name="card-259"/>
+          <p:cNvPr id="22" name="card-243"/>
           <p:cNvSpPr/>
           <p:nvPr/>
         </p:nvSpPr>
@@ -17197,7 +16647,7 @@
       </p:sp>
       <p:sp>
         <p:nvSpPr>
-          <p:cNvPr id="23" name="text-260"/>
+          <p:cNvPr id="23" name="text-244"/>
           <p:cNvSpPr txBox="1"/>
           <p:nvPr/>
         </p:nvSpPr>

--- a/Prezentacie/Manažment komunikácie – vysvetľujúca prezentácia.pptx
+++ b/Prezentacie/Manažment komunikácie – vysvetľujúca prezentácia.pptx
@@ -19,7 +19,9 @@
     <p:sldId id="264" r:id="rId12"/>
     <p:sldId id="265" r:id="rId13"/>
     <p:sldId id="266" r:id="rId14"/>
+    <p:sldId id="270" r:id="rId19"/>
     <p:sldId id="267" r:id="rId15"/>
+    <p:sldId id="271" r:id="rId20"/>
     <p:sldId id="268" r:id="rId16"/>
     <p:sldId id="269" r:id="rId17"/>
   </p:sldIdLst>
@@ -1291,7 +1293,7 @@
                 <a:uFillTx/>
                 <a:latin typeface="Arial"/>
               </a:rPr>
-              <a:t>Ukážeme to na vymyslenom príklade. Firma má tri projekty a jedného bezpečnostného testera. Každý manažér ho plánuje, akoby bol iba jeho, a všetky tri termíny padnú na ten istý týždeň.</a:t>
+              <a:t>Druhý príklad: firma má tri projekty a jedného bezpečnostného testera. Každý manažér ho plánuje, akoby bol iba jeho, a všetky tri termíny padnú na ten istý týždeň.</a:t>
             </a:r>
             <a:endParaRPr lang="en-US" sz="2000" b="0" u="none" strike="noStrike">
               <a:solidFill>
@@ -1317,9 +1319,6 @@
           </a:p>
           <a:p>
             <a:pPr indent="0" algn="l">
-              <a:lnSpc>
-                <a:spcPct val="100000"/>
-              </a:lnSpc>
               <a:buNone/>
             </a:pPr>
             <a:r>
@@ -1331,7 +1330,7 @@
                 <a:uFillTx/>
                 <a:latin typeface="Arial"/>
               </a:rPr>
-              <a:t>Podporné PMO by iba poradilo plánovať skôr – ale konflikt by to nevyriešilo. Direktívne PMO by to vyriešilo, no pri troch projektoch je to zbytočne drahé. Riadiace PMO zavedie spoločný kalendár zdieľaných ľudí a pravidlo, že o prioritách rozhodne vedenie podľa podkladov od PMO. Typ PMO teda vyberáme podľa problému.</a:t>
+              <a:t>Podporné PMO by iba poradilo plánovať skôr – ale konflikt by to nevyriešilo. Direktívne PMO by to vyriešilo, no pri troch projektoch je to zbytočne drahé. Riadiace PMO zavedie spoločný kalendár zdieľaných ľudí a pravidlo, že o prioritách rozhodne vedenie podľa podkladov od PMO.</a:t>
             </a:r>
             <a:endParaRPr lang="en-US" sz="2000" b="0" u="none" strike="noStrike">
               <a:solidFill>
@@ -1830,6 +1829,498 @@
                 <a:ea typeface="+mn-ea"/>
               </a:rPr>
               <a:t>&lt;number&gt;</a:t>
+            </a:fld>
+            <a:endParaRPr lang="en-US" sz="1200" b="0" u="none" strike="noStrike">
+              <a:solidFill>
+                <a:srgbClr val="000000"/>
+              </a:solidFill>
+              <a:effectLst/>
+              <a:uFillTx/>
+              <a:latin typeface="Times New Roman"/>
+            </a:endParaRPr>
+          </a:p>
+        </p:txBody>
+      </p:sp>
+    </p:spTree>
+  </p:cSld>
+</p:notes>
+</file>
+
+<file path=ppt/notesSlides/notesSlide15.xml><?xml version="1.0" encoding="utf-8"?>
+<p:notes xmlns:a="http://schemas.openxmlformats.org/drawingml/2006/main" xmlns:p="http://schemas.openxmlformats.org/presentationml/2006/main" xmlns:r="http://schemas.openxmlformats.org/officeDocument/2006/relationships" xmlns:p14="http://schemas.microsoft.com/office/powerpoint/2010/main" xmlns:p15="http://schemas.microsoft.com/office/powerpoint/2012/main" xmlns:mc="http://schemas.openxmlformats.org/markup-compatibility/2006">
+  <p:cSld>
+    <p:spTree>
+      <p:nvGrpSpPr>
+        <p:cNvPr id="1" name=""/>
+        <p:cNvGrpSpPr/>
+        <p:nvPr/>
+      </p:nvGrpSpPr>
+      <p:grpSpPr>
+        <a:xfrm>
+          <a:off x="0" y="0"/>
+          <a:ext cx="0" cy="0"/>
+          <a:chOff x="0" y="0"/>
+          <a:chExt cx="0" cy="0"/>
+        </a:xfrm>
+      </p:grpSpPr>
+      <p:sp>
+        <p:nvSpPr>
+          <p:cNvPr id="407" name="PlaceHolder 1"/>
+          <p:cNvSpPr>
+            <a:spLocks noGrp="1"/>
+          </p:cNvSpPr>
+          <p:nvPr>
+            <p:ph type="sldImg"/>
+          </p:nvPr>
+        </p:nvSpPr>
+        <p:spPr>
+          <a:xfrm>
+            <a:off x="685800" y="1143000"/>
+            <a:ext cx="5486040" cy="3085920"/>
+          </a:xfrm>
+          <a:prstGeom prst="rect">
+            <a:avLst/>
+          </a:prstGeom>
+          <a:ln w="0">
+            <a:noFill/>
+          </a:ln>
+        </p:spPr>
+      </p:sp>
+      <p:sp>
+        <p:nvSpPr>
+          <p:cNvPr id="408" name="PlaceHolder 2"/>
+          <p:cNvSpPr>
+            <a:spLocks noGrp="1"/>
+          </p:cNvSpPr>
+          <p:nvPr>
+            <p:ph type="body"/>
+          </p:nvPr>
+        </p:nvSpPr>
+        <p:spPr>
+          <a:xfrm>
+            <a:off x="685800" y="4400640"/>
+            <a:ext cx="5486040" cy="3600000"/>
+          </a:xfrm>
+          <a:prstGeom prst="rect">
+            <a:avLst/>
+          </a:prstGeom>
+          <a:noFill/>
+          <a:ln w="0">
+            <a:noFill/>
+          </a:ln>
+        </p:spPr>
+        <p:txBody>
+          <a:bodyPr lIns="91440" tIns="45720" rIns="91440" bIns="45720" anchor="t">
+            <a:noAutofit/>
+          </a:bodyPr>
+          <a:p>
+            <a:pPr indent="0" algn="l">
+              <a:buNone/>
+            </a:pPr>
+            <a:r>
+              <a:rPr lang="en-US" sz="2000" b="0" u="none" strike="noStrike">
+                <a:solidFill>
+                  <a:srgbClr val="000000"/>
+                </a:solidFill>
+                <a:effectLst/>
+                <a:uFillTx/>
+                <a:latin typeface="Arial"/>
+              </a:rPr>
+              <a:t>NIKOLAS · 35 s</a:t>
+            </a:r>
+            <a:endParaRPr lang="en-US" sz="2000" b="0" u="none" strike="noStrike">
+              <a:solidFill>
+                <a:srgbClr val="000000"/>
+              </a:solidFill>
+              <a:effectLst/>
+              <a:uFillTx/>
+              <a:latin typeface="Arial"/>
+            </a:endParaRPr>
+          </a:p>
+          <a:p>
+            <a:pPr indent="0" algn="l">
+              <a:buNone/>
+            </a:pPr>
+            <a:endParaRPr lang="en-US" sz="2000" b="0" u="none" strike="noStrike">
+              <a:solidFill>
+                <a:srgbClr val="000000"/>
+              </a:solidFill>
+              <a:effectLst/>
+              <a:uFillTx/>
+              <a:latin typeface="Arial"/>
+            </a:endParaRPr>
+          </a:p>
+          <a:p>
+            <a:pPr indent="0" algn="l">
+              <a:buNone/>
+            </a:pPr>
+            <a:r>
+              <a:rPr lang="en-US" sz="2000" b="0" u="none" strike="noStrike">
+                <a:solidFill>
+                  <a:srgbClr val="000000"/>
+                </a:solidFill>
+                <a:effectLst/>
+                <a:uFillTx/>
+                <a:latin typeface="Arial"/>
+              </a:rPr>
+              <a:t>Ukážeme si každý typ PMO na jednom vymyslenom príklade. Prvý: malá firma má tri projekty a skúsených manažérov. Každý však píše report po svojom a „zelený“ znamená u jedného „ideme podľa plánu“, u druhého „zatiaľ to nehorí“. Vedenie dostane tri reporty a nevie ich porovnať.</a:t>
+            </a:r>
+            <a:endParaRPr lang="en-US" sz="2000" b="0" u="none" strike="noStrike">
+              <a:solidFill>
+                <a:srgbClr val="000000"/>
+              </a:solidFill>
+              <a:effectLst/>
+              <a:uFillTx/>
+              <a:latin typeface="Arial"/>
+            </a:endParaRPr>
+          </a:p>
+          <a:p>
+            <a:pPr indent="0" algn="l">
+              <a:buNone/>
+            </a:pPr>
+            <a:endParaRPr lang="en-US" sz="2000" b="0" u="none" strike="noStrike">
+              <a:solidFill>
+                <a:srgbClr val="000000"/>
+              </a:solidFill>
+              <a:effectLst/>
+              <a:uFillTx/>
+              <a:latin typeface="Arial"/>
+            </a:endParaRPr>
+          </a:p>
+          <a:p>
+            <a:pPr indent="0" algn="l">
+              <a:buNone/>
+            </a:pPr>
+            <a:r>
+              <a:rPr lang="en-US" sz="2000" b="0" u="none" strike="noStrike">
+                <a:solidFill>
+                  <a:srgbClr val="000000"/>
+                </a:solidFill>
+                <a:effectLst/>
+                <a:uFillTx/>
+                <a:latin typeface="Arial"/>
+              </a:rPr>
+              <a:t>Tu stačí podporné PMO. Dá jednu šablónu reportu a vysvetlí, čo znamená zelená, oranžová a červená – a skúsení manažéri ju radi prevezmú, lebo im to uľahčí prácu. Riadiace PMO by fungovalo tiež, ale povinné kontroly by boli zbytočná byrokracia. A direktívne PMO by bolo strieľanie kanónom na vrabce.</a:t>
+            </a:r>
+            <a:endParaRPr lang="en-US" sz="2000" b="0" u="none" strike="noStrike">
+              <a:solidFill>
+                <a:srgbClr val="000000"/>
+              </a:solidFill>
+              <a:effectLst/>
+              <a:uFillTx/>
+              <a:latin typeface="Arial"/>
+            </a:endParaRPr>
+          </a:p>
+        </p:txBody>
+      </p:sp>
+      <p:sp>
+        <p:nvSpPr>
+          <p:cNvPr id="409" name="PlaceHolder 3"/>
+          <p:cNvSpPr>
+            <a:spLocks noGrp="1"/>
+          </p:cNvSpPr>
+          <p:nvPr>
+            <p:ph type="sldNum" idx="30"/>
+          </p:nvPr>
+        </p:nvSpPr>
+        <p:spPr>
+          <a:xfrm>
+            <a:off x="3884760" y="8685360"/>
+            <a:ext cx="2971440" cy="458280"/>
+          </a:xfrm>
+          <a:prstGeom prst="rect">
+            <a:avLst/>
+          </a:prstGeom>
+          <a:noFill/>
+          <a:ln w="0">
+            <a:noFill/>
+          </a:ln>
+        </p:spPr>
+        <p:txBody>
+          <a:bodyPr lIns="91440" tIns="45720" rIns="91440" bIns="45720" anchor="b">
+            <a:noAutofit/>
+          </a:bodyPr>
+          <a:lstStyle>
+            <a:lvl1pPr indent="0" algn="r" defTabSz="914400">
+              <a:lnSpc>
+                <a:spcPct val="100000"/>
+              </a:lnSpc>
+              <a:buNone/>
+              <a:defRPr lang="en-US" sz="1200" b="0" u="none" strike="noStrike">
+                <a:solidFill>
+                  <a:schemeClr val="dk1"/>
+                </a:solidFill>
+                <a:effectLst/>
+                <a:uFillTx/>
+                <a:latin typeface="+mn-lt"/>
+                <a:ea typeface="+mn-ea"/>
+              </a:defRPr>
+            </a:lvl1pPr>
+          </a:lstStyle>
+          <a:p>
+            <a:pPr indent="0" algn="r" defTabSz="914400">
+              <a:lnSpc>
+                <a:spcPct val="100000"/>
+              </a:lnSpc>
+              <a:buNone/>
+            </a:pPr>
+            <a:fld id="{F513EDE7-9558-4DA4-B757-92504AE5E3B7}" type="slidenum">
+              <a:rPr lang="en-US" sz="1200" b="0" u="none" strike="noStrike">
+                <a:solidFill>
+                  <a:schemeClr val="dk1"/>
+                </a:solidFill>
+                <a:effectLst/>
+                <a:uFillTx/>
+                <a:latin typeface="+mn-lt"/>
+                <a:ea typeface="+mn-ea"/>
+              </a:rPr>
+              <a:t>12</a:t>
+            </a:fld>
+            <a:endParaRPr lang="en-US" sz="1200" b="0" u="none" strike="noStrike">
+              <a:solidFill>
+                <a:srgbClr val="000000"/>
+              </a:solidFill>
+              <a:effectLst/>
+              <a:uFillTx/>
+              <a:latin typeface="Times New Roman"/>
+            </a:endParaRPr>
+          </a:p>
+        </p:txBody>
+      </p:sp>
+    </p:spTree>
+  </p:cSld>
+</p:notes>
+</file>
+
+<file path=ppt/notesSlides/notesSlide16.xml><?xml version="1.0" encoding="utf-8"?>
+<p:notes xmlns:a="http://schemas.openxmlformats.org/drawingml/2006/main" xmlns:p="http://schemas.openxmlformats.org/presentationml/2006/main" xmlns:r="http://schemas.openxmlformats.org/officeDocument/2006/relationships" xmlns:p14="http://schemas.microsoft.com/office/powerpoint/2010/main" xmlns:p15="http://schemas.microsoft.com/office/powerpoint/2012/main" xmlns:mc="http://schemas.openxmlformats.org/markup-compatibility/2006">
+  <p:cSld>
+    <p:spTree>
+      <p:nvGrpSpPr>
+        <p:cNvPr id="1" name=""/>
+        <p:cNvGrpSpPr/>
+        <p:nvPr/>
+      </p:nvGrpSpPr>
+      <p:grpSpPr>
+        <a:xfrm>
+          <a:off x="0" y="0"/>
+          <a:ext cx="0" cy="0"/>
+          <a:chOff x="0" y="0"/>
+          <a:chExt cx="0" cy="0"/>
+        </a:xfrm>
+      </p:grpSpPr>
+      <p:sp>
+        <p:nvSpPr>
+          <p:cNvPr id="407" name="PlaceHolder 1"/>
+          <p:cNvSpPr>
+            <a:spLocks noGrp="1"/>
+          </p:cNvSpPr>
+          <p:nvPr>
+            <p:ph type="sldImg"/>
+          </p:nvPr>
+        </p:nvSpPr>
+        <p:spPr>
+          <a:xfrm>
+            <a:off x="685800" y="1143000"/>
+            <a:ext cx="5486040" cy="3085920"/>
+          </a:xfrm>
+          <a:prstGeom prst="rect">
+            <a:avLst/>
+          </a:prstGeom>
+          <a:ln w="0">
+            <a:noFill/>
+          </a:ln>
+        </p:spPr>
+      </p:sp>
+      <p:sp>
+        <p:nvSpPr>
+          <p:cNvPr id="408" name="PlaceHolder 2"/>
+          <p:cNvSpPr>
+            <a:spLocks noGrp="1"/>
+          </p:cNvSpPr>
+          <p:nvPr>
+            <p:ph type="body"/>
+          </p:nvPr>
+        </p:nvSpPr>
+        <p:spPr>
+          <a:xfrm>
+            <a:off x="685800" y="4400640"/>
+            <a:ext cx="5486040" cy="3600000"/>
+          </a:xfrm>
+          <a:prstGeom prst="rect">
+            <a:avLst/>
+          </a:prstGeom>
+          <a:noFill/>
+          <a:ln w="0">
+            <a:noFill/>
+          </a:ln>
+        </p:spPr>
+        <p:txBody>
+          <a:bodyPr lIns="91440" tIns="45720" rIns="91440" bIns="45720" anchor="t">
+            <a:noAutofit/>
+          </a:bodyPr>
+          <a:p>
+            <a:pPr indent="0" algn="l">
+              <a:buNone/>
+            </a:pPr>
+            <a:r>
+              <a:rPr lang="en-US" sz="2000" b="0" u="none" strike="noStrike">
+                <a:solidFill>
+                  <a:srgbClr val="000000"/>
+                </a:solidFill>
+                <a:effectLst/>
+                <a:uFillTx/>
+                <a:latin typeface="Arial"/>
+              </a:rPr>
+              <a:t>NIKOLAS · 35 s</a:t>
+            </a:r>
+            <a:endParaRPr lang="en-US" sz="2000" b="0" u="none" strike="noStrike">
+              <a:solidFill>
+                <a:srgbClr val="000000"/>
+              </a:solidFill>
+              <a:effectLst/>
+              <a:uFillTx/>
+              <a:latin typeface="Arial"/>
+            </a:endParaRPr>
+          </a:p>
+          <a:p>
+            <a:pPr indent="0" algn="l">
+              <a:buNone/>
+            </a:pPr>
+            <a:endParaRPr lang="en-US" sz="2000" b="0" u="none" strike="noStrike">
+              <a:solidFill>
+                <a:srgbClr val="000000"/>
+              </a:solidFill>
+              <a:effectLst/>
+              <a:uFillTx/>
+              <a:latin typeface="Arial"/>
+            </a:endParaRPr>
+          </a:p>
+          <a:p>
+            <a:pPr indent="0" algn="l">
+              <a:buNone/>
+            </a:pPr>
+            <a:r>
+              <a:rPr lang="en-US" sz="2000" b="0" u="none" strike="noStrike">
+                <a:solidFill>
+                  <a:srgbClr val="000000"/>
+                </a:solidFill>
+                <a:effectLst/>
+                <a:uFillTx/>
+                <a:latin typeface="Arial"/>
+              </a:rPr>
+              <a:t>Tretí príklad: banka musí do zákonného termínu prejsť na nový platobný systém. Robia na ňom traja dodávatelia, každý komunikuje s bankou zvlášť a na rozhodnutia sa čaká týždne. Ak termín nestihnú, hrozí pokuta.</a:t>
+            </a:r>
+            <a:endParaRPr lang="en-US" sz="2000" b="0" u="none" strike="noStrike">
+              <a:solidFill>
+                <a:srgbClr val="000000"/>
+              </a:solidFill>
+              <a:effectLst/>
+              <a:uFillTx/>
+              <a:latin typeface="Arial"/>
+            </a:endParaRPr>
+          </a:p>
+          <a:p>
+            <a:pPr indent="0" algn="l">
+              <a:buNone/>
+            </a:pPr>
+            <a:endParaRPr lang="en-US" sz="2000" b="0" u="none" strike="noStrike">
+              <a:solidFill>
+                <a:srgbClr val="000000"/>
+              </a:solidFill>
+              <a:effectLst/>
+              <a:uFillTx/>
+              <a:latin typeface="Arial"/>
+            </a:endParaRPr>
+          </a:p>
+          <a:p>
+            <a:pPr indent="0" algn="l">
+              <a:buNone/>
+            </a:pPr>
+            <a:r>
+              <a:rPr lang="en-US" sz="2000" b="0" u="none" strike="noStrike">
+                <a:solidFill>
+                  <a:srgbClr val="000000"/>
+                </a:solidFill>
+                <a:effectLst/>
+                <a:uFillTx/>
+                <a:latin typeface="Arial"/>
+              </a:rPr>
+              <a:t>Podporné PMO tu nepomôže – problém nie je vo formáte reportu, ale v tom, že nikto nerozhoduje. Riadiace PMO by aspoň ukázalo, kde to viazne, ale rozhodovanie by zostalo rozdrobené. Direktívne PMO prevezme riadenie celého programu: jeden manažér, spoločné denné stretnutie a rozhodnutia v ten istý deň. Je to drahé, ale pri takomto projekte sa to oplatí. Typ PMO teda vyberáme podľa problému.</a:t>
+            </a:r>
+            <a:endParaRPr lang="en-US" sz="2000" b="0" u="none" strike="noStrike">
+              <a:solidFill>
+                <a:srgbClr val="000000"/>
+              </a:solidFill>
+              <a:effectLst/>
+              <a:uFillTx/>
+              <a:latin typeface="Arial"/>
+            </a:endParaRPr>
+          </a:p>
+        </p:txBody>
+      </p:sp>
+      <p:sp>
+        <p:nvSpPr>
+          <p:cNvPr id="409" name="PlaceHolder 3"/>
+          <p:cNvSpPr>
+            <a:spLocks noGrp="1"/>
+          </p:cNvSpPr>
+          <p:nvPr>
+            <p:ph type="sldNum" idx="30"/>
+          </p:nvPr>
+        </p:nvSpPr>
+        <p:spPr>
+          <a:xfrm>
+            <a:off x="3884760" y="8685360"/>
+            <a:ext cx="2971440" cy="458280"/>
+          </a:xfrm>
+          <a:prstGeom prst="rect">
+            <a:avLst/>
+          </a:prstGeom>
+          <a:noFill/>
+          <a:ln w="0">
+            <a:noFill/>
+          </a:ln>
+        </p:spPr>
+        <p:txBody>
+          <a:bodyPr lIns="91440" tIns="45720" rIns="91440" bIns="45720" anchor="b">
+            <a:noAutofit/>
+          </a:bodyPr>
+          <a:lstStyle>
+            <a:lvl1pPr indent="0" algn="r" defTabSz="914400">
+              <a:lnSpc>
+                <a:spcPct val="100000"/>
+              </a:lnSpc>
+              <a:buNone/>
+              <a:defRPr lang="en-US" sz="1200" b="0" u="none" strike="noStrike">
+                <a:solidFill>
+                  <a:schemeClr val="dk1"/>
+                </a:solidFill>
+                <a:effectLst/>
+                <a:uFillTx/>
+                <a:latin typeface="+mn-lt"/>
+                <a:ea typeface="+mn-ea"/>
+              </a:defRPr>
+            </a:lvl1pPr>
+          </a:lstStyle>
+          <a:p>
+            <a:pPr indent="0" algn="r" defTabSz="914400">
+              <a:lnSpc>
+                <a:spcPct val="100000"/>
+              </a:lnSpc>
+              <a:buNone/>
+            </a:pPr>
+            <a:fld id="{F513EDE7-9558-4DA4-B757-92504AE5E3B7}" type="slidenum">
+              <a:rPr lang="en-US" sz="1200" b="0" u="none" strike="noStrike">
+                <a:solidFill>
+                  <a:schemeClr val="dk1"/>
+                </a:solidFill>
+                <a:effectLst/>
+                <a:uFillTx/>
+                <a:latin typeface="+mn-lt"/>
+                <a:ea typeface="+mn-ea"/>
+              </a:rPr>
+              <a:t>12</a:t>
             </a:fld>
             <a:endParaRPr lang="en-US" sz="1200" b="0" u="none" strike="noStrike">
               <a:solidFill>
@@ -10647,7 +11138,7 @@
                 <a:uFillTx/>
                 <a:latin typeface="Cambria"/>
               </a:rPr>
-              <a:t>Príklad: jeden tester a tri projekty</a:t>
+              <a:t>Príklad 2: jeden tester a tri projekty</a:t>
             </a:r>
             <a:endParaRPr lang="en-US" sz="3000" b="0" u="none" strike="noStrike">
               <a:solidFill>
@@ -11869,7 +12360,7 @@
                 <a:uFillTx/>
                 <a:latin typeface="Calibri"/>
               </a:rPr>
-              <a:t>typ PMO sa vyberá podľa problému, ktorý má riešiť.</a:t>
+              <a:t>keď si projekty delia ľudí, treba spoločné pravidlá.</a:t>
             </a:r>
             <a:endParaRPr lang="en-US" sz="1600" b="0" u="none" strike="noStrike">
               <a:solidFill>
@@ -13397,6 +13888,2896 @@
               <a:buNone/>
             </a:pPr>
             <a:fld id="{A2322367-B259-4EE7-B80E-9AC6DDCE5C23}" type="slidenum">
+              <a:rPr lang="en-US" sz="1000" b="0" u="none" strike="noStrike">
+                <a:solidFill>
+                  <a:schemeClr val="accent5"/>
+                </a:solidFill>
+                <a:effectLst/>
+                <a:uFillTx/>
+                <a:latin typeface="Calibri"/>
+              </a:rPr>
+              <a:t>12</a:t>
+            </a:fld>
+            <a:endParaRPr lang="en-US" sz="1000" b="0" u="none" strike="noStrike">
+              <a:solidFill>
+                <a:srgbClr val="000000"/>
+              </a:solidFill>
+              <a:effectLst/>
+              <a:uFillTx/>
+              <a:latin typeface="Times New Roman"/>
+            </a:endParaRPr>
+          </a:p>
+        </p:txBody>
+      </p:sp>
+    </p:spTree>
+  </p:cSld>
+  <mc:AlternateContent>
+    <mc:Choice Requires="p14">
+      <p:transition spd="slow" p14:dur="2000"/>
+    </mc:Choice>
+    <mc:Fallback>
+      <p:transition spd="slow"/>
+    </mc:Fallback>
+  </mc:AlternateContent>
+</p:sld>
+</file>
+
+<file path=ppt/slides/slide15.xml><?xml version="1.0" encoding="utf-8"?>
+<p:sld xmlns:a="http://schemas.openxmlformats.org/drawingml/2006/main" xmlns:p="http://schemas.openxmlformats.org/presentationml/2006/main" xmlns:r="http://schemas.openxmlformats.org/officeDocument/2006/relationships" xmlns:p14="http://schemas.microsoft.com/office/powerpoint/2010/main" xmlns:p15="http://schemas.microsoft.com/office/powerpoint/2012/main" xmlns:mc="http://schemas.openxmlformats.org/markup-compatibility/2006">
+  <p:cSld>
+    <p:spTree>
+      <p:nvGrpSpPr>
+        <p:cNvPr id="1" name=""/>
+        <p:cNvGrpSpPr/>
+        <p:nvPr/>
+      </p:nvGrpSpPr>
+      <p:grpSpPr>
+        <a:xfrm>
+          <a:off x="0" y="0"/>
+          <a:ext cx="0" cy="0"/>
+          <a:chOff x="0" y="0"/>
+          <a:chExt cx="0" cy="0"/>
+        </a:xfrm>
+      </p:grpSpPr>
+      <p:sp>
+        <p:nvSpPr>
+          <p:cNvPr id="326" name="PlaceHolder 1"/>
+          <p:cNvSpPr>
+            <a:spLocks noGrp="1"/>
+          </p:cNvSpPr>
+          <p:nvPr>
+            <p:ph hasCustomPrompt="1"/>
+          </p:nvPr>
+        </p:nvSpPr>
+        <p:spPr>
+          <a:xfrm>
+            <a:off x="548640" y="384120"/>
+            <a:ext cx="11094120" cy="273960"/>
+          </a:xfrm>
+          <a:prstGeom prst="rect">
+            <a:avLst/>
+          </a:prstGeom>
+          <a:noFill/>
+          <a:ln w="0">
+            <a:noFill/>
+          </a:ln>
+        </p:spPr>
+        <p:txBody>
+          <a:bodyPr lIns="0" tIns="0" rIns="0" bIns="0" anchor="t">
+            <a:noAutofit/>
+          </a:bodyPr>
+          <a:p>
+            <a:pPr indent="0" algn="l" defTabSz="914400">
+              <a:lnSpc>
+                <a:spcPct val="100000"/>
+              </a:lnSpc>
+              <a:spcBef>
+                <a:spcPts val="221"/>
+              </a:spcBef>
+              <a:buNone/>
+              <a:tabLst>
+                <a:tab pos="0" algn="l"/>
+              </a:tabLst>
+            </a:pPr>
+            <a:r>
+              <a:rPr lang="en-US" sz="1100" b="1" u="none" spc="201" strike="noStrike">
+                <a:solidFill>
+                  <a:schemeClr val="accent1"/>
+                </a:solidFill>
+                <a:effectLst/>
+                <a:uFillTx/>
+                <a:latin typeface="Calibri"/>
+              </a:rPr>
+              <a:t>03 – KANCELÁRIA PROJEKTOVÉHO MANAŽMENTU</a:t>
+            </a:r>
+            <a:endParaRPr lang="en-US" sz="1100" b="0" u="none" strike="noStrike">
+              <a:solidFill>
+                <a:schemeClr val="dk1"/>
+              </a:solidFill>
+              <a:effectLst/>
+              <a:uFillTx/>
+              <a:latin typeface="Calibri"/>
+            </a:endParaRPr>
+          </a:p>
+        </p:txBody>
+      </p:sp>
+      <p:sp>
+        <p:nvSpPr>
+          <p:cNvPr id="327" name="PlaceHolder 2"/>
+          <p:cNvSpPr>
+            <a:spLocks noGrp="1"/>
+          </p:cNvSpPr>
+          <p:nvPr>
+            <p:ph type="title" hasCustomPrompt="1"/>
+          </p:nvPr>
+        </p:nvSpPr>
+        <p:spPr>
+          <a:xfrm>
+            <a:off x="548640" y="676800"/>
+            <a:ext cx="11094120" cy="685440"/>
+          </a:xfrm>
+          <a:prstGeom prst="rect">
+            <a:avLst/>
+          </a:prstGeom>
+          <a:noFill/>
+          <a:ln w="0">
+            <a:noFill/>
+          </a:ln>
+        </p:spPr>
+        <p:txBody>
+          <a:bodyPr lIns="0" tIns="0" rIns="0" bIns="0" anchor="t">
+            <a:noAutofit/>
+          </a:bodyPr>
+          <a:p>
+            <a:pPr indent="0" algn="l" defTabSz="914400">
+              <a:lnSpc>
+                <a:spcPct val="100000"/>
+              </a:lnSpc>
+              <a:buNone/>
+              <a:tabLst>
+                <a:tab pos="0" algn="l"/>
+              </a:tabLst>
+            </a:pPr>
+            <a:r>
+              <a:rPr lang="en-US" sz="3000" b="1" u="none" strike="noStrike">
+                <a:solidFill>
+                  <a:schemeClr val="dk1"/>
+                </a:solidFill>
+                <a:effectLst/>
+                <a:uFillTx/>
+                <a:latin typeface="Cambria"/>
+              </a:rPr>
+              <a:t>Príklad 1: tri reporty a každý je iný</a:t>
+            </a:r>
+            <a:endParaRPr lang="en-US" sz="3000" b="0" u="none" strike="noStrike">
+              <a:solidFill>
+                <a:schemeClr val="dk1"/>
+              </a:solidFill>
+              <a:effectLst/>
+              <a:uFillTx/>
+              <a:latin typeface="Calibri"/>
+            </a:endParaRPr>
+          </a:p>
+        </p:txBody>
+      </p:sp>
+      <p:sp>
+        <p:nvSpPr>
+          <p:cNvPr id="328" name="text-288"/>
+          <p:cNvSpPr/>
+          <p:nvPr/>
+        </p:nvSpPr>
+        <p:spPr>
+          <a:xfrm>
+            <a:off x="548640" y="1600200"/>
+            <a:ext cx="5028840" cy="1234080"/>
+          </a:xfrm>
+          <a:prstGeom prst="rect">
+            <a:avLst/>
+          </a:prstGeom>
+          <a:noFill/>
+          <a:ln w="0">
+            <a:noFill/>
+          </a:ln>
+        </p:spPr>
+        <p:style>
+          <a:lnRef idx="0"/>
+          <a:fillRef idx="0"/>
+          <a:effectRef idx="0"/>
+          <a:fontRef idx="minor"/>
+        </p:style>
+        <p:txBody>
+          <a:bodyPr lIns="0" tIns="0" rIns="0" bIns="0" anchor="t">
+            <a:noAutofit/>
+          </a:bodyPr>
+          <a:p>
+            <a:pPr defTabSz="914400">
+              <a:lnSpc>
+                <a:spcPct val="100000"/>
+              </a:lnSpc>
+              <a:tabLst>
+                <a:tab pos="0" algn="l"/>
+              </a:tabLst>
+            </a:pPr>
+            <a:r>
+              <a:rPr lang="en-US" sz="1600" b="0" u="none" strike="noStrike">
+                <a:solidFill>
+                  <a:schemeClr val="dk1"/>
+                </a:solidFill>
+                <a:effectLst/>
+                <a:uFillTx/>
+                <a:latin typeface="Calibri"/>
+              </a:rPr>
+              <a:t>Malá firma má tri projekty so skúsenými manažérmi. Každý píše report po svojom a „zelený“ znamená u každého niečo iné. Vedenie ich nevie porovnať.</a:t>
+            </a:r>
+            <a:endParaRPr lang="en-US" sz="1600" b="0" u="none" strike="noStrike">
+              <a:solidFill>
+                <a:srgbClr val="000000"/>
+              </a:solidFill>
+              <a:effectLst/>
+              <a:uFillTx/>
+              <a:latin typeface="Arial"/>
+            </a:endParaRPr>
+          </a:p>
+        </p:txBody>
+      </p:sp>
+      <p:sp>
+        <p:nvSpPr>
+          <p:cNvPr id="329" name="line-289"/>
+          <p:cNvSpPr/>
+          <p:nvPr/>
+        </p:nvSpPr>
+        <p:spPr>
+          <a:xfrm>
+            <a:off x="1325880" y="3611880"/>
+            <a:ext cx="1737360" cy="822960"/>
+          </a:xfrm>
+          <a:prstGeom prst="line">
+            <a:avLst/>
+          </a:prstGeom>
+          <a:ln w="22225">
+            <a:solidFill>
+              <a:srgbClr val="D97A1E"/>
+            </a:solidFill>
+            <a:round/>
+            <a:tailEnd len="med" type="triangle" w="med"/>
+          </a:ln>
+        </p:spPr>
+        <p:style>
+          <a:lnRef idx="0"/>
+          <a:fillRef idx="0"/>
+          <a:effectRef idx="0"/>
+          <a:fontRef idx="minor"/>
+        </p:style>
+        <p:txBody>
+          <a:bodyPr lIns="90000" tIns="45000" rIns="90000" bIns="45000" anchor="t" anchorCtr="1">
+            <a:noAutofit/>
+          </a:bodyPr>
+          <a:p>
+            <a:endParaRPr lang="en-US" sz="1800" b="0" u="none" strike="noStrike">
+              <a:solidFill>
+                <a:srgbClr val="000000"/>
+              </a:solidFill>
+              <a:effectLst/>
+              <a:uFillTx/>
+              <a:latin typeface="Arial"/>
+            </a:endParaRPr>
+          </a:p>
+        </p:txBody>
+      </p:sp>
+      <p:sp>
+        <p:nvSpPr>
+          <p:cNvPr id="330" name="card-290"/>
+          <p:cNvSpPr/>
+          <p:nvPr/>
+        </p:nvSpPr>
+        <p:spPr>
+          <a:xfrm>
+            <a:off x="594360" y="3154680"/>
+            <a:ext cx="1462680" cy="548280"/>
+          </a:xfrm>
+          <a:prstGeom prst="roundRect">
+            <a:avLst>
+              <a:gd name="adj" fmla="val 13333"/>
+            </a:avLst>
+          </a:prstGeom>
+          <a:solidFill>
+            <a:schemeClr val="bg2"/>
+          </a:solidFill>
+          <a:ln w="12700">
+            <a:solidFill>
+              <a:srgbClr val="CFE3DC"/>
+            </a:solidFill>
+            <a:round/>
+          </a:ln>
+        </p:spPr>
+        <p:style>
+          <a:lnRef idx="0"/>
+          <a:fillRef idx="0"/>
+          <a:effectRef idx="0"/>
+          <a:fontRef idx="minor"/>
+        </p:style>
+        <p:txBody>
+          <a:bodyPr lIns="90000" tIns="45000" rIns="90000" bIns="45000" anchor="t">
+            <a:noAutofit/>
+          </a:bodyPr>
+          <a:p>
+            <a:endParaRPr lang="en-US" sz="1800" b="0" u="none" strike="noStrike">
+              <a:solidFill>
+                <a:srgbClr val="000000"/>
+              </a:solidFill>
+              <a:effectLst/>
+              <a:uFillTx/>
+              <a:latin typeface="Arial"/>
+            </a:endParaRPr>
+          </a:p>
+        </p:txBody>
+      </p:sp>
+      <p:sp>
+        <p:nvSpPr>
+          <p:cNvPr id="331" name="text-291"/>
+          <p:cNvSpPr/>
+          <p:nvPr/>
+        </p:nvSpPr>
+        <p:spPr>
+          <a:xfrm>
+            <a:off x="594360" y="3154680"/>
+            <a:ext cx="1462680" cy="548280"/>
+          </a:xfrm>
+          <a:prstGeom prst="rect">
+            <a:avLst/>
+          </a:prstGeom>
+          <a:noFill/>
+          <a:ln w="0">
+            <a:noFill/>
+          </a:ln>
+        </p:spPr>
+        <p:style>
+          <a:lnRef idx="0"/>
+          <a:fillRef idx="0"/>
+          <a:effectRef idx="0"/>
+          <a:fontRef idx="minor"/>
+        </p:style>
+        <p:txBody>
+          <a:bodyPr lIns="0" tIns="0" rIns="0" bIns="0" anchor="ctr">
+            <a:noAutofit/>
+          </a:bodyPr>
+          <a:p>
+            <a:pPr algn="ctr" defTabSz="914400">
+              <a:lnSpc>
+                <a:spcPct val="100000"/>
+              </a:lnSpc>
+              <a:tabLst>
+                <a:tab pos="0" algn="l"/>
+              </a:tabLst>
+            </a:pPr>
+            <a:r>
+              <a:rPr lang="en-US" sz="1500" b="1" u="none" strike="noStrike">
+                <a:solidFill>
+                  <a:schemeClr val="dk1"/>
+                </a:solidFill>
+                <a:effectLst/>
+                <a:uFillTx/>
+                <a:latin typeface="Calibri"/>
+              </a:rPr>
+              <a:t>Report A</a:t>
+            </a:r>
+            <a:endParaRPr lang="en-US" sz="1500" b="0" u="none" strike="noStrike">
+              <a:solidFill>
+                <a:srgbClr val="000000"/>
+              </a:solidFill>
+              <a:effectLst/>
+              <a:uFillTx/>
+              <a:latin typeface="Arial"/>
+            </a:endParaRPr>
+          </a:p>
+        </p:txBody>
+      </p:sp>
+      <p:sp>
+        <p:nvSpPr>
+          <p:cNvPr id="332" name="line-292"/>
+          <p:cNvSpPr/>
+          <p:nvPr/>
+        </p:nvSpPr>
+        <p:spPr>
+          <a:xfrm>
+            <a:off x="3063240" y="3611880"/>
+            <a:ext cx="360" cy="822960"/>
+          </a:xfrm>
+          <a:prstGeom prst="line">
+            <a:avLst/>
+          </a:prstGeom>
+          <a:ln w="22225">
+            <a:solidFill>
+              <a:srgbClr val="D97A1E"/>
+            </a:solidFill>
+            <a:round/>
+            <a:tailEnd len="med" type="triangle" w="med"/>
+          </a:ln>
+        </p:spPr>
+        <p:style>
+          <a:lnRef idx="0"/>
+          <a:fillRef idx="0"/>
+          <a:effectRef idx="0"/>
+          <a:fontRef idx="minor"/>
+        </p:style>
+        <p:txBody>
+          <a:bodyPr lIns="90000" tIns="45000" rIns="90000" bIns="45000" anchor="t" anchorCtr="1">
+            <a:noAutofit/>
+          </a:bodyPr>
+          <a:p>
+            <a:endParaRPr lang="en-US" sz="1800" b="0" u="none" strike="noStrike">
+              <a:solidFill>
+                <a:srgbClr val="000000"/>
+              </a:solidFill>
+              <a:effectLst/>
+              <a:uFillTx/>
+              <a:latin typeface="Arial"/>
+            </a:endParaRPr>
+          </a:p>
+        </p:txBody>
+      </p:sp>
+      <p:sp>
+        <p:nvSpPr>
+          <p:cNvPr id="333" name="card-293"/>
+          <p:cNvSpPr/>
+          <p:nvPr/>
+        </p:nvSpPr>
+        <p:spPr>
+          <a:xfrm>
+            <a:off x="2331720" y="3154680"/>
+            <a:ext cx="1462680" cy="548280"/>
+          </a:xfrm>
+          <a:prstGeom prst="roundRect">
+            <a:avLst>
+              <a:gd name="adj" fmla="val 13333"/>
+            </a:avLst>
+          </a:prstGeom>
+          <a:solidFill>
+            <a:schemeClr val="bg2"/>
+          </a:solidFill>
+          <a:ln w="12700">
+            <a:solidFill>
+              <a:srgbClr val="CFE3DC"/>
+            </a:solidFill>
+            <a:round/>
+          </a:ln>
+        </p:spPr>
+        <p:style>
+          <a:lnRef idx="0"/>
+          <a:fillRef idx="0"/>
+          <a:effectRef idx="0"/>
+          <a:fontRef idx="minor"/>
+        </p:style>
+        <p:txBody>
+          <a:bodyPr lIns="90000" tIns="45000" rIns="90000" bIns="45000" anchor="t">
+            <a:noAutofit/>
+          </a:bodyPr>
+          <a:p>
+            <a:endParaRPr lang="en-US" sz="1800" b="0" u="none" strike="noStrike">
+              <a:solidFill>
+                <a:srgbClr val="000000"/>
+              </a:solidFill>
+              <a:effectLst/>
+              <a:uFillTx/>
+              <a:latin typeface="Arial"/>
+            </a:endParaRPr>
+          </a:p>
+        </p:txBody>
+      </p:sp>
+      <p:sp>
+        <p:nvSpPr>
+          <p:cNvPr id="334" name="text-294"/>
+          <p:cNvSpPr/>
+          <p:nvPr/>
+        </p:nvSpPr>
+        <p:spPr>
+          <a:xfrm>
+            <a:off x="2331720" y="3154680"/>
+            <a:ext cx="1462680" cy="548280"/>
+          </a:xfrm>
+          <a:prstGeom prst="rect">
+            <a:avLst/>
+          </a:prstGeom>
+          <a:noFill/>
+          <a:ln w="0">
+            <a:noFill/>
+          </a:ln>
+        </p:spPr>
+        <p:style>
+          <a:lnRef idx="0"/>
+          <a:fillRef idx="0"/>
+          <a:effectRef idx="0"/>
+          <a:fontRef idx="minor"/>
+        </p:style>
+        <p:txBody>
+          <a:bodyPr lIns="0" tIns="0" rIns="0" bIns="0" anchor="ctr">
+            <a:noAutofit/>
+          </a:bodyPr>
+          <a:p>
+            <a:pPr algn="ctr" defTabSz="914400">
+              <a:lnSpc>
+                <a:spcPct val="100000"/>
+              </a:lnSpc>
+              <a:tabLst>
+                <a:tab pos="0" algn="l"/>
+              </a:tabLst>
+            </a:pPr>
+            <a:r>
+              <a:rPr lang="en-US" sz="1500" b="1" u="none" strike="noStrike">
+                <a:solidFill>
+                  <a:schemeClr val="dk1"/>
+                </a:solidFill>
+                <a:effectLst/>
+                <a:uFillTx/>
+                <a:latin typeface="Calibri"/>
+              </a:rPr>
+              <a:t>Report B</a:t>
+            </a:r>
+            <a:endParaRPr lang="en-US" sz="1500" b="0" u="none" strike="noStrike">
+              <a:solidFill>
+                <a:srgbClr val="000000"/>
+              </a:solidFill>
+              <a:effectLst/>
+              <a:uFillTx/>
+              <a:latin typeface="Arial"/>
+            </a:endParaRPr>
+          </a:p>
+        </p:txBody>
+      </p:sp>
+      <p:sp>
+        <p:nvSpPr>
+          <p:cNvPr id="335" name="line-295"/>
+          <p:cNvSpPr/>
+          <p:nvPr/>
+        </p:nvSpPr>
+        <p:spPr>
+          <a:xfrm flipH="1">
+            <a:off x="3063240" y="3611880"/>
+            <a:ext cx="1737360" cy="822960"/>
+          </a:xfrm>
+          <a:prstGeom prst="line">
+            <a:avLst/>
+          </a:prstGeom>
+          <a:ln w="22225">
+            <a:solidFill>
+              <a:srgbClr val="D97A1E"/>
+            </a:solidFill>
+            <a:round/>
+            <a:tailEnd len="med" type="triangle" w="med"/>
+          </a:ln>
+        </p:spPr>
+        <p:style>
+          <a:lnRef idx="0"/>
+          <a:fillRef idx="0"/>
+          <a:effectRef idx="0"/>
+          <a:fontRef idx="minor"/>
+        </p:style>
+        <p:txBody>
+          <a:bodyPr lIns="90000" tIns="45000" rIns="90000" bIns="45000" anchor="t" anchorCtr="1">
+            <a:noAutofit/>
+          </a:bodyPr>
+          <a:p>
+            <a:endParaRPr lang="en-US" sz="1800" b="0" u="none" strike="noStrike">
+              <a:solidFill>
+                <a:srgbClr val="000000"/>
+              </a:solidFill>
+              <a:effectLst/>
+              <a:uFillTx/>
+              <a:latin typeface="Arial"/>
+            </a:endParaRPr>
+          </a:p>
+        </p:txBody>
+      </p:sp>
+      <p:sp>
+        <p:nvSpPr>
+          <p:cNvPr id="336" name="card-296"/>
+          <p:cNvSpPr/>
+          <p:nvPr/>
+        </p:nvSpPr>
+        <p:spPr>
+          <a:xfrm>
+            <a:off x="4069080" y="3154680"/>
+            <a:ext cx="1462680" cy="548280"/>
+          </a:xfrm>
+          <a:prstGeom prst="roundRect">
+            <a:avLst>
+              <a:gd name="adj" fmla="val 13333"/>
+            </a:avLst>
+          </a:prstGeom>
+          <a:solidFill>
+            <a:schemeClr val="bg2"/>
+          </a:solidFill>
+          <a:ln w="12700">
+            <a:solidFill>
+              <a:srgbClr val="CFE3DC"/>
+            </a:solidFill>
+            <a:round/>
+          </a:ln>
+        </p:spPr>
+        <p:style>
+          <a:lnRef idx="0"/>
+          <a:fillRef idx="0"/>
+          <a:effectRef idx="0"/>
+          <a:fontRef idx="minor"/>
+        </p:style>
+        <p:txBody>
+          <a:bodyPr lIns="90000" tIns="45000" rIns="90000" bIns="45000" anchor="t">
+            <a:noAutofit/>
+          </a:bodyPr>
+          <a:p>
+            <a:endParaRPr lang="en-US" sz="1800" b="0" u="none" strike="noStrike">
+              <a:solidFill>
+                <a:srgbClr val="000000"/>
+              </a:solidFill>
+              <a:effectLst/>
+              <a:uFillTx/>
+              <a:latin typeface="Arial"/>
+            </a:endParaRPr>
+          </a:p>
+        </p:txBody>
+      </p:sp>
+      <p:sp>
+        <p:nvSpPr>
+          <p:cNvPr id="337" name="text-297"/>
+          <p:cNvSpPr/>
+          <p:nvPr/>
+        </p:nvSpPr>
+        <p:spPr>
+          <a:xfrm>
+            <a:off x="4069080" y="3154680"/>
+            <a:ext cx="1462680" cy="548280"/>
+          </a:xfrm>
+          <a:prstGeom prst="rect">
+            <a:avLst/>
+          </a:prstGeom>
+          <a:noFill/>
+          <a:ln w="0">
+            <a:noFill/>
+          </a:ln>
+        </p:spPr>
+        <p:style>
+          <a:lnRef idx="0"/>
+          <a:fillRef idx="0"/>
+          <a:effectRef idx="0"/>
+          <a:fontRef idx="minor"/>
+        </p:style>
+        <p:txBody>
+          <a:bodyPr lIns="0" tIns="0" rIns="0" bIns="0" anchor="ctr">
+            <a:noAutofit/>
+          </a:bodyPr>
+          <a:p>
+            <a:pPr algn="ctr" defTabSz="914400">
+              <a:lnSpc>
+                <a:spcPct val="100000"/>
+              </a:lnSpc>
+              <a:tabLst>
+                <a:tab pos="0" algn="l"/>
+              </a:tabLst>
+            </a:pPr>
+            <a:r>
+              <a:rPr lang="en-US" sz="1500" b="1" u="none" strike="noStrike">
+                <a:solidFill>
+                  <a:schemeClr val="dk1"/>
+                </a:solidFill>
+                <a:effectLst/>
+                <a:uFillTx/>
+                <a:latin typeface="Calibri"/>
+              </a:rPr>
+              <a:t>Report C</a:t>
+            </a:r>
+            <a:endParaRPr lang="en-US" sz="1500" b="0" u="none" strike="noStrike">
+              <a:solidFill>
+                <a:srgbClr val="000000"/>
+              </a:solidFill>
+              <a:effectLst/>
+              <a:uFillTx/>
+              <a:latin typeface="Arial"/>
+            </a:endParaRPr>
+          </a:p>
+        </p:txBody>
+      </p:sp>
+      <p:sp>
+        <p:nvSpPr>
+          <p:cNvPr id="338" name="card-298"/>
+          <p:cNvSpPr/>
+          <p:nvPr/>
+        </p:nvSpPr>
+        <p:spPr>
+          <a:xfrm>
+            <a:off x="1965960" y="4434840"/>
+            <a:ext cx="2194200" cy="822600"/>
+          </a:xfrm>
+          <a:prstGeom prst="roundRect">
+            <a:avLst>
+              <a:gd name="adj" fmla="val 8889"/>
+            </a:avLst>
+          </a:prstGeom>
+          <a:solidFill>
+            <a:schemeClr val="accent6"/>
+          </a:solidFill>
+          <a:ln w="19050">
+            <a:solidFill>
+              <a:srgbClr val="D97A1E"/>
+            </a:solidFill>
+            <a:round/>
+          </a:ln>
+        </p:spPr>
+        <p:style>
+          <a:lnRef idx="0"/>
+          <a:fillRef idx="0"/>
+          <a:effectRef idx="0"/>
+          <a:fontRef idx="minor"/>
+        </p:style>
+        <p:txBody>
+          <a:bodyPr lIns="90000" tIns="45000" rIns="90000" bIns="45000" anchor="t">
+            <a:noAutofit/>
+          </a:bodyPr>
+          <a:p>
+            <a:endParaRPr lang="en-US" sz="1800" b="0" u="none" strike="noStrike">
+              <a:solidFill>
+                <a:srgbClr val="000000"/>
+              </a:solidFill>
+              <a:effectLst/>
+              <a:uFillTx/>
+              <a:latin typeface="Arial"/>
+            </a:endParaRPr>
+          </a:p>
+        </p:txBody>
+      </p:sp>
+      <p:sp>
+        <p:nvSpPr>
+          <p:cNvPr id="339" name="text-299"/>
+          <p:cNvSpPr/>
+          <p:nvPr/>
+        </p:nvSpPr>
+        <p:spPr>
+          <a:xfrm>
+            <a:off x="1965960" y="4434840"/>
+            <a:ext cx="2194200" cy="822600"/>
+          </a:xfrm>
+          <a:prstGeom prst="rect">
+            <a:avLst/>
+          </a:prstGeom>
+          <a:noFill/>
+          <a:ln w="0">
+            <a:noFill/>
+          </a:ln>
+        </p:spPr>
+        <p:style>
+          <a:lnRef idx="0"/>
+          <a:fillRef idx="0"/>
+          <a:effectRef idx="0"/>
+          <a:fontRef idx="minor"/>
+        </p:style>
+        <p:txBody>
+          <a:bodyPr lIns="0" tIns="0" rIns="0" bIns="0" anchor="ctr">
+            <a:noAutofit/>
+          </a:bodyPr>
+          <a:p>
+            <a:pPr algn="ctr" defTabSz="914400">
+              <a:lnSpc>
+                <a:spcPct val="100000"/>
+              </a:lnSpc>
+              <a:tabLst>
+                <a:tab pos="0" algn="l"/>
+              </a:tabLst>
+            </a:pPr>
+            <a:r>
+              <a:rPr lang="en-US" sz="1500" b="1" u="none" strike="noStrike">
+                <a:solidFill>
+                  <a:schemeClr val="dk1"/>
+                </a:solidFill>
+                <a:effectLst/>
+                <a:uFillTx/>
+                <a:latin typeface="Calibri"/>
+              </a:rPr>
+              <a:t>Vedenie</a:t>
+            </a:r>
+            <a:endParaRPr lang="en-US" sz="1500" b="0" u="none" strike="noStrike">
+              <a:solidFill>
+                <a:srgbClr val="000000"/>
+              </a:solidFill>
+              <a:effectLst/>
+              <a:uFillTx/>
+              <a:latin typeface="Arial"/>
+            </a:endParaRPr>
+          </a:p>
+          <a:p>
+            <a:pPr algn="ctr" defTabSz="914400">
+              <a:lnSpc>
+                <a:spcPct val="100000"/>
+              </a:lnSpc>
+              <a:tabLst>
+                <a:tab pos="0" algn="l"/>
+              </a:tabLst>
+            </a:pPr>
+            <a:r>
+              <a:rPr lang="en-US" sz="1300" b="0" i="1" u="none" strike="noStrike">
+                <a:solidFill>
+                  <a:schemeClr val="accent2"/>
+                </a:solidFill>
+                <a:effectLst/>
+                <a:uFillTx/>
+                <a:latin typeface="Calibri"/>
+              </a:rPr>
+              <a:t>3 reporty, 3 formáty</a:t>
+            </a:r>
+            <a:endParaRPr lang="en-US" sz="1300" b="0" u="none" strike="noStrike">
+              <a:solidFill>
+                <a:srgbClr val="000000"/>
+              </a:solidFill>
+              <a:effectLst/>
+              <a:uFillTx/>
+              <a:latin typeface="Arial"/>
+            </a:endParaRPr>
+          </a:p>
+        </p:txBody>
+      </p:sp>
+      <p:sp>
+        <p:nvSpPr>
+          <p:cNvPr id="340" name="card-300"/>
+          <p:cNvSpPr/>
+          <p:nvPr/>
+        </p:nvSpPr>
+        <p:spPr>
+          <a:xfrm>
+            <a:off x="6035040" y="1600200"/>
+            <a:ext cx="5604840" cy="1115280"/>
+          </a:xfrm>
+          <a:prstGeom prst="roundRect">
+            <a:avLst>
+              <a:gd name="adj" fmla="val 6557"/>
+            </a:avLst>
+          </a:prstGeom>
+          <a:solidFill>
+            <a:schemeClr val="accent1"/>
+          </a:solidFill>
+          <a:ln w="0">
+            <a:noFill/>
+          </a:ln>
+        </p:spPr>
+        <p:style>
+          <a:lnRef idx="0"/>
+          <a:fillRef idx="0"/>
+          <a:effectRef idx="0"/>
+          <a:fontRef idx="minor"/>
+        </p:style>
+        <p:txBody>
+          <a:bodyPr lIns="90000" tIns="45000" rIns="90000" bIns="45000" anchor="t">
+            <a:noAutofit/>
+          </a:bodyPr>
+          <a:p>
+            <a:endParaRPr lang="en-US" sz="1800" b="0" u="none" strike="noStrike">
+              <a:solidFill>
+                <a:srgbClr val="000000"/>
+              </a:solidFill>
+              <a:effectLst/>
+              <a:uFillTx/>
+              <a:latin typeface="Arial"/>
+            </a:endParaRPr>
+          </a:p>
+        </p:txBody>
+      </p:sp>
+      <p:sp>
+        <p:nvSpPr>
+          <p:cNvPr id="341" name="text-301"/>
+          <p:cNvSpPr/>
+          <p:nvPr/>
+        </p:nvSpPr>
+        <p:spPr>
+          <a:xfrm>
+            <a:off x="6309360" y="1737360"/>
+            <a:ext cx="5028840" cy="347040"/>
+          </a:xfrm>
+          <a:prstGeom prst="rect">
+            <a:avLst/>
+          </a:prstGeom>
+          <a:noFill/>
+          <a:ln w="0">
+            <a:noFill/>
+          </a:ln>
+        </p:spPr>
+        <p:style>
+          <a:lnRef idx="0"/>
+          <a:fillRef idx="0"/>
+          <a:effectRef idx="0"/>
+          <a:fontRef idx="minor"/>
+        </p:style>
+        <p:txBody>
+          <a:bodyPr lIns="0" tIns="0" rIns="0" bIns="0" anchor="t">
+            <a:noAutofit/>
+          </a:bodyPr>
+          <a:p>
+            <a:pPr defTabSz="914400">
+              <a:lnSpc>
+                <a:spcPct val="100000"/>
+              </a:lnSpc>
+              <a:tabLst>
+                <a:tab pos="0" algn="l"/>
+              </a:tabLst>
+            </a:pPr>
+            <a:r>
+              <a:rPr lang="en-US" sz="1700" b="1" u="none" strike="noStrike">
+                <a:solidFill>
+                  <a:schemeClr val="lt1"/>
+                </a:solidFill>
+                <a:effectLst/>
+                <a:uFillTx/>
+                <a:latin typeface="Cambria"/>
+                <a:ea typeface="Cambria"/>
+              </a:rPr>
+              <a:t>Podporné PMO</a:t>
+            </a:r>
+            <a:endParaRPr lang="en-US" sz="1700" b="0" u="none" strike="noStrike">
+              <a:solidFill>
+                <a:srgbClr val="000000"/>
+              </a:solidFill>
+              <a:effectLst/>
+              <a:uFillTx/>
+              <a:latin typeface="Arial"/>
+            </a:endParaRPr>
+          </a:p>
+        </p:txBody>
+      </p:sp>
+      <p:sp>
+        <p:nvSpPr>
+          <p:cNvPr id="342" name="text-302"/>
+          <p:cNvSpPr/>
+          <p:nvPr/>
+        </p:nvSpPr>
+        <p:spPr>
+          <a:xfrm>
+            <a:off x="6309360" y="2103120"/>
+            <a:ext cx="5120280" cy="548280"/>
+          </a:xfrm>
+          <a:prstGeom prst="rect">
+            <a:avLst/>
+          </a:prstGeom>
+          <a:noFill/>
+          <a:ln w="0">
+            <a:noFill/>
+          </a:ln>
+        </p:spPr>
+        <p:style>
+          <a:lnRef idx="0"/>
+          <a:fillRef idx="0"/>
+          <a:effectRef idx="0"/>
+          <a:fontRef idx="minor"/>
+        </p:style>
+        <p:txBody>
+          <a:bodyPr lIns="0" tIns="0" rIns="0" bIns="0" anchor="t">
+            <a:noAutofit/>
+          </a:bodyPr>
+          <a:p>
+            <a:pPr defTabSz="914400">
+              <a:lnSpc>
+                <a:spcPct val="100000"/>
+              </a:lnSpc>
+              <a:tabLst>
+                <a:tab pos="0" algn="l"/>
+              </a:tabLst>
+            </a:pPr>
+            <a:r>
+              <a:rPr lang="en-US" sz="1400" b="0" u="none" strike="noStrike">
+                <a:solidFill>
+                  <a:schemeClr val="lt1"/>
+                </a:solidFill>
+                <a:effectLst/>
+                <a:uFillTx/>
+                <a:latin typeface="Calibri"/>
+              </a:rPr>
+              <a:t>Dá jednu šablónu reportu a vysvetlí, čo znamená zelená, oranžová a červená. Skúsení manažéri ju radi prevezmú.</a:t>
+            </a:r>
+            <a:endParaRPr lang="en-US" sz="1400" b="0" u="none" strike="noStrike">
+              <a:solidFill>
+                <a:srgbClr val="000000"/>
+              </a:solidFill>
+              <a:effectLst/>
+              <a:uFillTx/>
+              <a:latin typeface="Arial"/>
+            </a:endParaRPr>
+          </a:p>
+        </p:txBody>
+      </p:sp>
+      <p:sp>
+        <p:nvSpPr>
+          <p:cNvPr id="343" name="card-303"/>
+          <p:cNvSpPr/>
+          <p:nvPr/>
+        </p:nvSpPr>
+        <p:spPr>
+          <a:xfrm>
+            <a:off x="6035040" y="2898720"/>
+            <a:ext cx="5604840" cy="1115280"/>
+          </a:xfrm>
+          <a:prstGeom prst="roundRect">
+            <a:avLst>
+              <a:gd name="adj" fmla="val 6557"/>
+            </a:avLst>
+          </a:prstGeom>
+          <a:solidFill>
+            <a:schemeClr val="bg2"/>
+          </a:solidFill>
+          <a:ln w="0">
+            <a:noFill/>
+          </a:ln>
+        </p:spPr>
+        <p:style>
+          <a:lnRef idx="0"/>
+          <a:fillRef idx="0"/>
+          <a:effectRef idx="0"/>
+          <a:fontRef idx="minor"/>
+        </p:style>
+        <p:txBody>
+          <a:bodyPr lIns="90000" tIns="45000" rIns="90000" bIns="45000" anchor="t">
+            <a:noAutofit/>
+          </a:bodyPr>
+          <a:p>
+            <a:endParaRPr lang="en-US" sz="1800" b="0" u="none" strike="noStrike">
+              <a:solidFill>
+                <a:srgbClr val="FFFFFF"/>
+              </a:solidFill>
+              <a:effectLst/>
+              <a:uFillTx/>
+              <a:latin typeface="Arial"/>
+            </a:endParaRPr>
+          </a:p>
+        </p:txBody>
+      </p:sp>
+      <p:sp>
+        <p:nvSpPr>
+          <p:cNvPr id="344" name="text-304"/>
+          <p:cNvSpPr/>
+          <p:nvPr/>
+        </p:nvSpPr>
+        <p:spPr>
+          <a:xfrm>
+            <a:off x="6309360" y="3035880"/>
+            <a:ext cx="5028840" cy="347040"/>
+          </a:xfrm>
+          <a:prstGeom prst="rect">
+            <a:avLst/>
+          </a:prstGeom>
+          <a:noFill/>
+          <a:ln w="0">
+            <a:noFill/>
+          </a:ln>
+        </p:spPr>
+        <p:style>
+          <a:lnRef idx="0"/>
+          <a:fillRef idx="0"/>
+          <a:effectRef idx="0"/>
+          <a:fontRef idx="minor"/>
+        </p:style>
+        <p:txBody>
+          <a:bodyPr lIns="0" tIns="0" rIns="0" bIns="0" anchor="t">
+            <a:noAutofit/>
+          </a:bodyPr>
+          <a:p>
+            <a:pPr defTabSz="914400">
+              <a:lnSpc>
+                <a:spcPct val="100000"/>
+              </a:lnSpc>
+              <a:tabLst>
+                <a:tab pos="0" algn="l"/>
+              </a:tabLst>
+            </a:pPr>
+            <a:r>
+              <a:rPr lang="en-US" sz="1700" b="1" u="none" strike="noStrike">
+                <a:solidFill>
+                  <a:schemeClr val="dk1"/>
+                </a:solidFill>
+                <a:effectLst/>
+                <a:uFillTx/>
+                <a:latin typeface="Cambria"/>
+                <a:ea typeface="Cambria"/>
+              </a:rPr>
+              <a:t>Riadiace PMO</a:t>
+            </a:r>
+            <a:endParaRPr lang="en-US" sz="1700" b="0" u="none" strike="noStrike">
+              <a:solidFill>
+                <a:srgbClr val="000000"/>
+              </a:solidFill>
+              <a:effectLst/>
+              <a:uFillTx/>
+              <a:latin typeface="Arial"/>
+            </a:endParaRPr>
+          </a:p>
+        </p:txBody>
+      </p:sp>
+      <p:sp>
+        <p:nvSpPr>
+          <p:cNvPr id="345" name="text-305"/>
+          <p:cNvSpPr/>
+          <p:nvPr/>
+        </p:nvSpPr>
+        <p:spPr>
+          <a:xfrm>
+            <a:off x="6309360" y="3401640"/>
+            <a:ext cx="5120280" cy="548280"/>
+          </a:xfrm>
+          <a:prstGeom prst="rect">
+            <a:avLst/>
+          </a:prstGeom>
+          <a:noFill/>
+          <a:ln w="0">
+            <a:noFill/>
+          </a:ln>
+        </p:spPr>
+        <p:style>
+          <a:lnRef idx="0"/>
+          <a:fillRef idx="0"/>
+          <a:effectRef idx="0"/>
+          <a:fontRef idx="minor"/>
+        </p:style>
+        <p:txBody>
+          <a:bodyPr lIns="0" tIns="0" rIns="0" bIns="0" anchor="t">
+            <a:noAutofit/>
+          </a:bodyPr>
+          <a:p>
+            <a:pPr defTabSz="914400">
+              <a:lnSpc>
+                <a:spcPct val="100000"/>
+              </a:lnSpc>
+              <a:tabLst>
+                <a:tab pos="0" algn="l"/>
+              </a:tabLst>
+            </a:pPr>
+            <a:r>
+              <a:rPr lang="en-US" sz="1400" b="0" u="none" strike="noStrike">
+                <a:solidFill>
+                  <a:schemeClr val="accent5"/>
+                </a:solidFill>
+                <a:effectLst/>
+                <a:uFillTx/>
+                <a:latin typeface="Calibri"/>
+              </a:rPr>
+              <a:t>Fungovalo by, ale povinné kontroly troch skúsených manažérov sú zbytočná byrokracia.</a:t>
+            </a:r>
+            <a:endParaRPr lang="en-US" sz="1400" b="0" u="none" strike="noStrike">
+              <a:solidFill>
+                <a:srgbClr val="000000"/>
+              </a:solidFill>
+              <a:effectLst/>
+              <a:uFillTx/>
+              <a:latin typeface="Arial"/>
+            </a:endParaRPr>
+          </a:p>
+        </p:txBody>
+      </p:sp>
+      <p:sp>
+        <p:nvSpPr>
+          <p:cNvPr id="346" name="card-306"/>
+          <p:cNvSpPr/>
+          <p:nvPr/>
+        </p:nvSpPr>
+        <p:spPr>
+          <a:xfrm>
+            <a:off x="6035040" y="4197240"/>
+            <a:ext cx="5604840" cy="1115280"/>
+          </a:xfrm>
+          <a:prstGeom prst="roundRect">
+            <a:avLst>
+              <a:gd name="adj" fmla="val 6557"/>
+            </a:avLst>
+          </a:prstGeom>
+          <a:solidFill>
+            <a:schemeClr val="bg2"/>
+          </a:solidFill>
+          <a:ln w="0">
+            <a:noFill/>
+          </a:ln>
+        </p:spPr>
+        <p:style>
+          <a:lnRef idx="0"/>
+          <a:fillRef idx="0"/>
+          <a:effectRef idx="0"/>
+          <a:fontRef idx="minor"/>
+        </p:style>
+        <p:txBody>
+          <a:bodyPr lIns="90000" tIns="45000" rIns="90000" bIns="45000" anchor="t">
+            <a:noAutofit/>
+          </a:bodyPr>
+          <a:p>
+            <a:endParaRPr lang="en-US" sz="1800" b="0" u="none" strike="noStrike">
+              <a:solidFill>
+                <a:srgbClr val="000000"/>
+              </a:solidFill>
+              <a:effectLst/>
+              <a:uFillTx/>
+              <a:latin typeface="Arial"/>
+            </a:endParaRPr>
+          </a:p>
+        </p:txBody>
+      </p:sp>
+      <p:sp>
+        <p:nvSpPr>
+          <p:cNvPr id="347" name="text-307"/>
+          <p:cNvSpPr/>
+          <p:nvPr/>
+        </p:nvSpPr>
+        <p:spPr>
+          <a:xfrm>
+            <a:off x="6309360" y="4334400"/>
+            <a:ext cx="5028840" cy="347040"/>
+          </a:xfrm>
+          <a:prstGeom prst="rect">
+            <a:avLst/>
+          </a:prstGeom>
+          <a:noFill/>
+          <a:ln w="0">
+            <a:noFill/>
+          </a:ln>
+        </p:spPr>
+        <p:style>
+          <a:lnRef idx="0"/>
+          <a:fillRef idx="0"/>
+          <a:effectRef idx="0"/>
+          <a:fontRef idx="minor"/>
+        </p:style>
+        <p:txBody>
+          <a:bodyPr lIns="0" tIns="0" rIns="0" bIns="0" anchor="t">
+            <a:noAutofit/>
+          </a:bodyPr>
+          <a:p>
+            <a:pPr defTabSz="914400">
+              <a:lnSpc>
+                <a:spcPct val="100000"/>
+              </a:lnSpc>
+              <a:tabLst>
+                <a:tab pos="0" algn="l"/>
+              </a:tabLst>
+            </a:pPr>
+            <a:r>
+              <a:rPr lang="en-US" sz="1700" b="1" u="none" strike="noStrike">
+                <a:solidFill>
+                  <a:schemeClr val="dk1"/>
+                </a:solidFill>
+                <a:effectLst/>
+                <a:uFillTx/>
+                <a:latin typeface="Cambria"/>
+                <a:ea typeface="Cambria"/>
+              </a:rPr>
+              <a:t>Direktívne PMO</a:t>
+            </a:r>
+            <a:endParaRPr lang="en-US" sz="1700" b="0" u="none" strike="noStrike">
+              <a:solidFill>
+                <a:srgbClr val="000000"/>
+              </a:solidFill>
+              <a:effectLst/>
+              <a:uFillTx/>
+              <a:latin typeface="Arial"/>
+            </a:endParaRPr>
+          </a:p>
+        </p:txBody>
+      </p:sp>
+      <p:sp>
+        <p:nvSpPr>
+          <p:cNvPr id="348" name="text-308"/>
+          <p:cNvSpPr/>
+          <p:nvPr/>
+        </p:nvSpPr>
+        <p:spPr>
+          <a:xfrm>
+            <a:off x="6309360" y="4700160"/>
+            <a:ext cx="5120280" cy="548280"/>
+          </a:xfrm>
+          <a:prstGeom prst="rect">
+            <a:avLst/>
+          </a:prstGeom>
+          <a:noFill/>
+          <a:ln w="0">
+            <a:noFill/>
+          </a:ln>
+        </p:spPr>
+        <p:style>
+          <a:lnRef idx="0"/>
+          <a:fillRef idx="0"/>
+          <a:effectRef idx="0"/>
+          <a:fontRef idx="minor"/>
+        </p:style>
+        <p:txBody>
+          <a:bodyPr lIns="0" tIns="0" rIns="0" bIns="0" anchor="t">
+            <a:noAutofit/>
+          </a:bodyPr>
+          <a:p>
+            <a:pPr defTabSz="914400">
+              <a:lnSpc>
+                <a:spcPct val="100000"/>
+              </a:lnSpc>
+              <a:tabLst>
+                <a:tab pos="0" algn="l"/>
+              </a:tabLst>
+            </a:pPr>
+            <a:r>
+              <a:rPr lang="en-US" sz="1400" b="0" u="none" strike="noStrike">
+                <a:solidFill>
+                  <a:schemeClr val="accent5"/>
+                </a:solidFill>
+                <a:effectLst/>
+                <a:uFillTx/>
+                <a:latin typeface="Calibri"/>
+              </a:rPr>
+              <a:t>Prebrať riadenie projektov kvôli formátu reportu je strieľanie kanónom na vrabce.</a:t>
+            </a:r>
+            <a:endParaRPr lang="en-US" sz="1400" b="0" u="none" strike="noStrike">
+              <a:solidFill>
+                <a:srgbClr val="000000"/>
+              </a:solidFill>
+              <a:effectLst/>
+              <a:uFillTx/>
+              <a:latin typeface="Arial"/>
+            </a:endParaRPr>
+          </a:p>
+        </p:txBody>
+      </p:sp>
+      <p:sp>
+        <p:nvSpPr>
+          <p:cNvPr id="349" name="text-309"/>
+          <p:cNvSpPr/>
+          <p:nvPr/>
+        </p:nvSpPr>
+        <p:spPr>
+          <a:xfrm>
+            <a:off x="6035040" y="5577840"/>
+            <a:ext cx="5604840" cy="411120"/>
+          </a:xfrm>
+          <a:prstGeom prst="rect">
+            <a:avLst/>
+          </a:prstGeom>
+          <a:noFill/>
+          <a:ln w="0">
+            <a:noFill/>
+          </a:ln>
+        </p:spPr>
+        <p:style>
+          <a:lnRef idx="0"/>
+          <a:fillRef idx="0"/>
+          <a:effectRef idx="0"/>
+          <a:fontRef idx="minor"/>
+        </p:style>
+        <p:txBody>
+          <a:bodyPr lIns="0" tIns="0" rIns="0" bIns="0" anchor="t">
+            <a:noAutofit/>
+          </a:bodyPr>
+          <a:p>
+            <a:pPr defTabSz="914400">
+              <a:lnSpc>
+                <a:spcPct val="100000"/>
+              </a:lnSpc>
+              <a:tabLst>
+                <a:tab pos="0" algn="l"/>
+              </a:tabLst>
+            </a:pPr>
+            <a:r>
+              <a:rPr lang="en-US" sz="1600" b="1" u="none" strike="noStrike">
+                <a:solidFill>
+                  <a:schemeClr val="accent1"/>
+                </a:solidFill>
+                <a:effectLst/>
+                <a:uFillTx/>
+                <a:latin typeface="Calibri"/>
+              </a:rPr>
+              <a:t>Záver: </a:t>
+            </a:r>
+            <a:r>
+              <a:rPr lang="en-US" sz="1600" b="0" u="none" strike="noStrike">
+                <a:solidFill>
+                  <a:schemeClr val="dk1"/>
+                </a:solidFill>
+                <a:effectLst/>
+                <a:uFillTx/>
+                <a:latin typeface="Calibri"/>
+              </a:rPr>
+              <a:t>keď stačí dobrá rada, netreba pravidlá ani príkazy.</a:t>
+            </a:r>
+            <a:endParaRPr lang="en-US" sz="1600" b="0" u="none" strike="noStrike">
+              <a:solidFill>
+                <a:srgbClr val="000000"/>
+              </a:solidFill>
+              <a:effectLst/>
+              <a:uFillTx/>
+              <a:latin typeface="Arial"/>
+            </a:endParaRPr>
+          </a:p>
+        </p:txBody>
+      </p:sp>
+      <p:sp>
+        <p:nvSpPr>
+          <p:cNvPr id="350" name="PlaceHolder 3"/>
+          <p:cNvSpPr>
+            <a:spLocks noGrp="1"/>
+          </p:cNvSpPr>
+          <p:nvPr>
+            <p:ph type="sldNum" idx="16"/>
+          </p:nvPr>
+        </p:nvSpPr>
+        <p:spPr>
+          <a:xfrm>
+            <a:off x="11183040" y="6400800"/>
+            <a:ext cx="456840" cy="273960"/>
+          </a:xfrm>
+          <a:prstGeom prst="rect">
+            <a:avLst/>
+          </a:prstGeom>
+          <a:noFill/>
+          <a:ln w="0">
+            <a:noFill/>
+          </a:ln>
+        </p:spPr>
+        <p:txBody>
+          <a:bodyPr lIns="90000" tIns="45000" rIns="90000" bIns="45000" anchor="t">
+            <a:noAutofit/>
+          </a:bodyPr>
+          <a:lstStyle>
+            <a:lvl1pPr indent="0" algn="r" defTabSz="914400">
+              <a:lnSpc>
+                <a:spcPct val="100000"/>
+              </a:lnSpc>
+              <a:buNone/>
+              <a:defRPr lang="en-US" sz="1000" b="0" u="none" strike="noStrike">
+                <a:solidFill>
+                  <a:schemeClr val="accent5"/>
+                </a:solidFill>
+                <a:effectLst/>
+                <a:uFillTx/>
+                <a:latin typeface="Calibri"/>
+              </a:defRPr>
+            </a:lvl1pPr>
+          </a:lstStyle>
+          <a:p>
+            <a:pPr indent="0" algn="r" defTabSz="914400">
+              <a:lnSpc>
+                <a:spcPct val="100000"/>
+              </a:lnSpc>
+              <a:buNone/>
+            </a:pPr>
+            <a:fld id="{73795247-075B-471F-B22E-11FB5CDB012F}" type="slidenum">
+              <a:rPr lang="en-US" sz="1000" b="0" u="none" strike="noStrike">
+                <a:solidFill>
+                  <a:schemeClr val="accent5"/>
+                </a:solidFill>
+                <a:effectLst/>
+                <a:uFillTx/>
+                <a:latin typeface="Calibri"/>
+              </a:rPr>
+              <a:t>12</a:t>
+            </a:fld>
+            <a:endParaRPr lang="en-US" sz="1000" b="0" u="none" strike="noStrike">
+              <a:solidFill>
+                <a:srgbClr val="000000"/>
+              </a:solidFill>
+              <a:effectLst/>
+              <a:uFillTx/>
+              <a:latin typeface="Times New Roman"/>
+            </a:endParaRPr>
+          </a:p>
+        </p:txBody>
+      </p:sp>
+    </p:spTree>
+  </p:cSld>
+  <mc:AlternateContent>
+    <mc:Choice Requires="p14">
+      <p:transition spd="slow" p14:dur="2000"/>
+    </mc:Choice>
+    <mc:Fallback>
+      <p:transition spd="slow"/>
+    </mc:Fallback>
+  </mc:AlternateContent>
+</p:sld>
+</file>
+
+<file path=ppt/slides/slide16.xml><?xml version="1.0" encoding="utf-8"?>
+<p:sld xmlns:a="http://schemas.openxmlformats.org/drawingml/2006/main" xmlns:p="http://schemas.openxmlformats.org/presentationml/2006/main" xmlns:r="http://schemas.openxmlformats.org/officeDocument/2006/relationships" xmlns:p14="http://schemas.microsoft.com/office/powerpoint/2010/main" xmlns:p15="http://schemas.microsoft.com/office/powerpoint/2012/main" xmlns:mc="http://schemas.openxmlformats.org/markup-compatibility/2006">
+  <p:cSld>
+    <p:spTree>
+      <p:nvGrpSpPr>
+        <p:cNvPr id="1" name=""/>
+        <p:cNvGrpSpPr/>
+        <p:nvPr/>
+      </p:nvGrpSpPr>
+      <p:grpSpPr>
+        <a:xfrm>
+          <a:off x="0" y="0"/>
+          <a:ext cx="0" cy="0"/>
+          <a:chOff x="0" y="0"/>
+          <a:chExt cx="0" cy="0"/>
+        </a:xfrm>
+      </p:grpSpPr>
+      <p:sp>
+        <p:nvSpPr>
+          <p:cNvPr id="326" name="PlaceHolder 1"/>
+          <p:cNvSpPr>
+            <a:spLocks noGrp="1"/>
+          </p:cNvSpPr>
+          <p:nvPr>
+            <p:ph hasCustomPrompt="1"/>
+          </p:nvPr>
+        </p:nvSpPr>
+        <p:spPr>
+          <a:xfrm>
+            <a:off x="548640" y="384120"/>
+            <a:ext cx="11094120" cy="273960"/>
+          </a:xfrm>
+          <a:prstGeom prst="rect">
+            <a:avLst/>
+          </a:prstGeom>
+          <a:noFill/>
+          <a:ln w="0">
+            <a:noFill/>
+          </a:ln>
+        </p:spPr>
+        <p:txBody>
+          <a:bodyPr lIns="0" tIns="0" rIns="0" bIns="0" anchor="t">
+            <a:noAutofit/>
+          </a:bodyPr>
+          <a:p>
+            <a:pPr indent="0" algn="l" defTabSz="914400">
+              <a:lnSpc>
+                <a:spcPct val="100000"/>
+              </a:lnSpc>
+              <a:spcBef>
+                <a:spcPts val="221"/>
+              </a:spcBef>
+              <a:buNone/>
+              <a:tabLst>
+                <a:tab pos="0" algn="l"/>
+              </a:tabLst>
+            </a:pPr>
+            <a:r>
+              <a:rPr lang="en-US" sz="1100" b="1" u="none" spc="201" strike="noStrike">
+                <a:solidFill>
+                  <a:schemeClr val="accent1"/>
+                </a:solidFill>
+                <a:effectLst/>
+                <a:uFillTx/>
+                <a:latin typeface="Calibri"/>
+              </a:rPr>
+              <a:t>03 – KANCELÁRIA PROJEKTOVÉHO MANAŽMENTU</a:t>
+            </a:r>
+            <a:endParaRPr lang="en-US" sz="1100" b="0" u="none" strike="noStrike">
+              <a:solidFill>
+                <a:schemeClr val="dk1"/>
+              </a:solidFill>
+              <a:effectLst/>
+              <a:uFillTx/>
+              <a:latin typeface="Calibri"/>
+            </a:endParaRPr>
+          </a:p>
+        </p:txBody>
+      </p:sp>
+      <p:sp>
+        <p:nvSpPr>
+          <p:cNvPr id="327" name="PlaceHolder 2"/>
+          <p:cNvSpPr>
+            <a:spLocks noGrp="1"/>
+          </p:cNvSpPr>
+          <p:nvPr>
+            <p:ph type="title" hasCustomPrompt="1"/>
+          </p:nvPr>
+        </p:nvSpPr>
+        <p:spPr>
+          <a:xfrm>
+            <a:off x="548640" y="676800"/>
+            <a:ext cx="11094120" cy="685440"/>
+          </a:xfrm>
+          <a:prstGeom prst="rect">
+            <a:avLst/>
+          </a:prstGeom>
+          <a:noFill/>
+          <a:ln w="0">
+            <a:noFill/>
+          </a:ln>
+        </p:spPr>
+        <p:txBody>
+          <a:bodyPr lIns="0" tIns="0" rIns="0" bIns="0" anchor="t">
+            <a:noAutofit/>
+          </a:bodyPr>
+          <a:p>
+            <a:pPr indent="0" algn="l" defTabSz="914400">
+              <a:lnSpc>
+                <a:spcPct val="100000"/>
+              </a:lnSpc>
+              <a:buNone/>
+              <a:tabLst>
+                <a:tab pos="0" algn="l"/>
+              </a:tabLst>
+            </a:pPr>
+            <a:r>
+              <a:rPr lang="en-US" sz="3000" b="1" u="none" strike="noStrike">
+                <a:solidFill>
+                  <a:schemeClr val="dk1"/>
+                </a:solidFill>
+                <a:effectLst/>
+                <a:uFillTx/>
+                <a:latin typeface="Cambria"/>
+              </a:rPr>
+              <a:t>Príklad 3: strategický projekt so zákonným termínom</a:t>
+            </a:r>
+            <a:endParaRPr lang="en-US" sz="3000" b="0" u="none" strike="noStrike">
+              <a:solidFill>
+                <a:schemeClr val="dk1"/>
+              </a:solidFill>
+              <a:effectLst/>
+              <a:uFillTx/>
+              <a:latin typeface="Calibri"/>
+            </a:endParaRPr>
+          </a:p>
+        </p:txBody>
+      </p:sp>
+      <p:sp>
+        <p:nvSpPr>
+          <p:cNvPr id="328" name="text-288"/>
+          <p:cNvSpPr/>
+          <p:nvPr/>
+        </p:nvSpPr>
+        <p:spPr>
+          <a:xfrm>
+            <a:off x="548640" y="1600200"/>
+            <a:ext cx="5028840" cy="1234080"/>
+          </a:xfrm>
+          <a:prstGeom prst="rect">
+            <a:avLst/>
+          </a:prstGeom>
+          <a:noFill/>
+          <a:ln w="0">
+            <a:noFill/>
+          </a:ln>
+        </p:spPr>
+        <p:style>
+          <a:lnRef idx="0"/>
+          <a:fillRef idx="0"/>
+          <a:effectRef idx="0"/>
+          <a:fontRef idx="minor"/>
+        </p:style>
+        <p:txBody>
+          <a:bodyPr lIns="0" tIns="0" rIns="0" bIns="0" anchor="t">
+            <a:noAutofit/>
+          </a:bodyPr>
+          <a:p>
+            <a:pPr defTabSz="914400">
+              <a:lnSpc>
+                <a:spcPct val="100000"/>
+              </a:lnSpc>
+              <a:tabLst>
+                <a:tab pos="0" algn="l"/>
+              </a:tabLst>
+            </a:pPr>
+            <a:r>
+              <a:rPr lang="en-US" sz="1600" b="0" u="none" strike="noStrike">
+                <a:solidFill>
+                  <a:schemeClr val="dk1"/>
+                </a:solidFill>
+                <a:effectLst/>
+                <a:uFillTx/>
+                <a:latin typeface="Calibri"/>
+              </a:rPr>
+              <a:t>Banka musí do zákonného termínu prejsť na nový platobný systém. Robia na ňom traja dodávatelia, každý komunikuje s bankou zvlášť a na rozhodnutia sa čaká týždne.</a:t>
+            </a:r>
+            <a:endParaRPr lang="en-US" sz="1600" b="0" u="none" strike="noStrike">
+              <a:solidFill>
+                <a:srgbClr val="000000"/>
+              </a:solidFill>
+              <a:effectLst/>
+              <a:uFillTx/>
+              <a:latin typeface="Arial"/>
+            </a:endParaRPr>
+          </a:p>
+        </p:txBody>
+      </p:sp>
+      <p:sp>
+        <p:nvSpPr>
+          <p:cNvPr id="329" name="line-289"/>
+          <p:cNvSpPr/>
+          <p:nvPr/>
+        </p:nvSpPr>
+        <p:spPr>
+          <a:xfrm>
+            <a:off x="1325880" y="3611880"/>
+            <a:ext cx="1737360" cy="822960"/>
+          </a:xfrm>
+          <a:prstGeom prst="line">
+            <a:avLst/>
+          </a:prstGeom>
+          <a:ln w="22225">
+            <a:solidFill>
+              <a:srgbClr val="D97A1E"/>
+            </a:solidFill>
+            <a:round/>
+            <a:tailEnd len="med" type="triangle" w="med"/>
+          </a:ln>
+        </p:spPr>
+        <p:style>
+          <a:lnRef idx="0"/>
+          <a:fillRef idx="0"/>
+          <a:effectRef idx="0"/>
+          <a:fontRef idx="minor"/>
+        </p:style>
+        <p:txBody>
+          <a:bodyPr lIns="90000" tIns="45000" rIns="90000" bIns="45000" anchor="t" anchorCtr="1">
+            <a:noAutofit/>
+          </a:bodyPr>
+          <a:p>
+            <a:endParaRPr lang="en-US" sz="1800" b="0" u="none" strike="noStrike">
+              <a:solidFill>
+                <a:srgbClr val="000000"/>
+              </a:solidFill>
+              <a:effectLst/>
+              <a:uFillTx/>
+              <a:latin typeface="Arial"/>
+            </a:endParaRPr>
+          </a:p>
+        </p:txBody>
+      </p:sp>
+      <p:sp>
+        <p:nvSpPr>
+          <p:cNvPr id="330" name="card-290"/>
+          <p:cNvSpPr/>
+          <p:nvPr/>
+        </p:nvSpPr>
+        <p:spPr>
+          <a:xfrm>
+            <a:off x="594360" y="3154680"/>
+            <a:ext cx="1462680" cy="548280"/>
+          </a:xfrm>
+          <a:prstGeom prst="roundRect">
+            <a:avLst>
+              <a:gd name="adj" fmla="val 13333"/>
+            </a:avLst>
+          </a:prstGeom>
+          <a:solidFill>
+            <a:schemeClr val="bg2"/>
+          </a:solidFill>
+          <a:ln w="12700">
+            <a:solidFill>
+              <a:srgbClr val="CFE3DC"/>
+            </a:solidFill>
+            <a:round/>
+          </a:ln>
+        </p:spPr>
+        <p:style>
+          <a:lnRef idx="0"/>
+          <a:fillRef idx="0"/>
+          <a:effectRef idx="0"/>
+          <a:fontRef idx="minor"/>
+        </p:style>
+        <p:txBody>
+          <a:bodyPr lIns="90000" tIns="45000" rIns="90000" bIns="45000" anchor="t">
+            <a:noAutofit/>
+          </a:bodyPr>
+          <a:p>
+            <a:endParaRPr lang="en-US" sz="1800" b="0" u="none" strike="noStrike">
+              <a:solidFill>
+                <a:srgbClr val="000000"/>
+              </a:solidFill>
+              <a:effectLst/>
+              <a:uFillTx/>
+              <a:latin typeface="Arial"/>
+            </a:endParaRPr>
+          </a:p>
+        </p:txBody>
+      </p:sp>
+      <p:sp>
+        <p:nvSpPr>
+          <p:cNvPr id="331" name="text-291"/>
+          <p:cNvSpPr/>
+          <p:nvPr/>
+        </p:nvSpPr>
+        <p:spPr>
+          <a:xfrm>
+            <a:off x="594360" y="3154680"/>
+            <a:ext cx="1462680" cy="548280"/>
+          </a:xfrm>
+          <a:prstGeom prst="rect">
+            <a:avLst/>
+          </a:prstGeom>
+          <a:noFill/>
+          <a:ln w="0">
+            <a:noFill/>
+          </a:ln>
+        </p:spPr>
+        <p:style>
+          <a:lnRef idx="0"/>
+          <a:fillRef idx="0"/>
+          <a:effectRef idx="0"/>
+          <a:fontRef idx="minor"/>
+        </p:style>
+        <p:txBody>
+          <a:bodyPr lIns="0" tIns="0" rIns="0" bIns="0" anchor="ctr">
+            <a:noAutofit/>
+          </a:bodyPr>
+          <a:p>
+            <a:pPr algn="ctr" defTabSz="914400">
+              <a:lnSpc>
+                <a:spcPct val="100000"/>
+              </a:lnSpc>
+              <a:tabLst>
+                <a:tab pos="0" algn="l"/>
+              </a:tabLst>
+            </a:pPr>
+            <a:r>
+              <a:rPr lang="en-US" sz="1500" b="1" u="none" strike="noStrike">
+                <a:solidFill>
+                  <a:schemeClr val="dk1"/>
+                </a:solidFill>
+                <a:effectLst/>
+                <a:uFillTx/>
+                <a:latin typeface="Calibri"/>
+              </a:rPr>
+              <a:t>Dodávateľ A</a:t>
+            </a:r>
+            <a:endParaRPr lang="en-US" sz="1500" b="0" u="none" strike="noStrike">
+              <a:solidFill>
+                <a:srgbClr val="000000"/>
+              </a:solidFill>
+              <a:effectLst/>
+              <a:uFillTx/>
+              <a:latin typeface="Arial"/>
+            </a:endParaRPr>
+          </a:p>
+        </p:txBody>
+      </p:sp>
+      <p:sp>
+        <p:nvSpPr>
+          <p:cNvPr id="332" name="line-292"/>
+          <p:cNvSpPr/>
+          <p:nvPr/>
+        </p:nvSpPr>
+        <p:spPr>
+          <a:xfrm>
+            <a:off x="3063240" y="3611880"/>
+            <a:ext cx="360" cy="822960"/>
+          </a:xfrm>
+          <a:prstGeom prst="line">
+            <a:avLst/>
+          </a:prstGeom>
+          <a:ln w="22225">
+            <a:solidFill>
+              <a:srgbClr val="D97A1E"/>
+            </a:solidFill>
+            <a:round/>
+            <a:tailEnd len="med" type="triangle" w="med"/>
+          </a:ln>
+        </p:spPr>
+        <p:style>
+          <a:lnRef idx="0"/>
+          <a:fillRef idx="0"/>
+          <a:effectRef idx="0"/>
+          <a:fontRef idx="minor"/>
+        </p:style>
+        <p:txBody>
+          <a:bodyPr lIns="90000" tIns="45000" rIns="90000" bIns="45000" anchor="t" anchorCtr="1">
+            <a:noAutofit/>
+          </a:bodyPr>
+          <a:p>
+            <a:endParaRPr lang="en-US" sz="1800" b="0" u="none" strike="noStrike">
+              <a:solidFill>
+                <a:srgbClr val="000000"/>
+              </a:solidFill>
+              <a:effectLst/>
+              <a:uFillTx/>
+              <a:latin typeface="Arial"/>
+            </a:endParaRPr>
+          </a:p>
+        </p:txBody>
+      </p:sp>
+      <p:sp>
+        <p:nvSpPr>
+          <p:cNvPr id="333" name="card-293"/>
+          <p:cNvSpPr/>
+          <p:nvPr/>
+        </p:nvSpPr>
+        <p:spPr>
+          <a:xfrm>
+            <a:off x="2331720" y="3154680"/>
+            <a:ext cx="1462680" cy="548280"/>
+          </a:xfrm>
+          <a:prstGeom prst="roundRect">
+            <a:avLst>
+              <a:gd name="adj" fmla="val 13333"/>
+            </a:avLst>
+          </a:prstGeom>
+          <a:solidFill>
+            <a:schemeClr val="bg2"/>
+          </a:solidFill>
+          <a:ln w="12700">
+            <a:solidFill>
+              <a:srgbClr val="CFE3DC"/>
+            </a:solidFill>
+            <a:round/>
+          </a:ln>
+        </p:spPr>
+        <p:style>
+          <a:lnRef idx="0"/>
+          <a:fillRef idx="0"/>
+          <a:effectRef idx="0"/>
+          <a:fontRef idx="minor"/>
+        </p:style>
+        <p:txBody>
+          <a:bodyPr lIns="90000" tIns="45000" rIns="90000" bIns="45000" anchor="t">
+            <a:noAutofit/>
+          </a:bodyPr>
+          <a:p>
+            <a:endParaRPr lang="en-US" sz="1800" b="0" u="none" strike="noStrike">
+              <a:solidFill>
+                <a:srgbClr val="000000"/>
+              </a:solidFill>
+              <a:effectLst/>
+              <a:uFillTx/>
+              <a:latin typeface="Arial"/>
+            </a:endParaRPr>
+          </a:p>
+        </p:txBody>
+      </p:sp>
+      <p:sp>
+        <p:nvSpPr>
+          <p:cNvPr id="334" name="text-294"/>
+          <p:cNvSpPr/>
+          <p:nvPr/>
+        </p:nvSpPr>
+        <p:spPr>
+          <a:xfrm>
+            <a:off x="2331720" y="3154680"/>
+            <a:ext cx="1462680" cy="548280"/>
+          </a:xfrm>
+          <a:prstGeom prst="rect">
+            <a:avLst/>
+          </a:prstGeom>
+          <a:noFill/>
+          <a:ln w="0">
+            <a:noFill/>
+          </a:ln>
+        </p:spPr>
+        <p:style>
+          <a:lnRef idx="0"/>
+          <a:fillRef idx="0"/>
+          <a:effectRef idx="0"/>
+          <a:fontRef idx="minor"/>
+        </p:style>
+        <p:txBody>
+          <a:bodyPr lIns="0" tIns="0" rIns="0" bIns="0" anchor="ctr">
+            <a:noAutofit/>
+          </a:bodyPr>
+          <a:p>
+            <a:pPr algn="ctr" defTabSz="914400">
+              <a:lnSpc>
+                <a:spcPct val="100000"/>
+              </a:lnSpc>
+              <a:tabLst>
+                <a:tab pos="0" algn="l"/>
+              </a:tabLst>
+            </a:pPr>
+            <a:r>
+              <a:rPr lang="en-US" sz="1500" b="1" u="none" strike="noStrike">
+                <a:solidFill>
+                  <a:schemeClr val="dk1"/>
+                </a:solidFill>
+                <a:effectLst/>
+                <a:uFillTx/>
+                <a:latin typeface="Calibri"/>
+              </a:rPr>
+              <a:t>Dodávateľ B</a:t>
+            </a:r>
+            <a:endParaRPr lang="en-US" sz="1500" b="0" u="none" strike="noStrike">
+              <a:solidFill>
+                <a:srgbClr val="000000"/>
+              </a:solidFill>
+              <a:effectLst/>
+              <a:uFillTx/>
+              <a:latin typeface="Arial"/>
+            </a:endParaRPr>
+          </a:p>
+        </p:txBody>
+      </p:sp>
+      <p:sp>
+        <p:nvSpPr>
+          <p:cNvPr id="335" name="line-295"/>
+          <p:cNvSpPr/>
+          <p:nvPr/>
+        </p:nvSpPr>
+        <p:spPr>
+          <a:xfrm flipH="1">
+            <a:off x="3063240" y="3611880"/>
+            <a:ext cx="1737360" cy="822960"/>
+          </a:xfrm>
+          <a:prstGeom prst="line">
+            <a:avLst/>
+          </a:prstGeom>
+          <a:ln w="22225">
+            <a:solidFill>
+              <a:srgbClr val="D97A1E"/>
+            </a:solidFill>
+            <a:round/>
+            <a:tailEnd len="med" type="triangle" w="med"/>
+          </a:ln>
+        </p:spPr>
+        <p:style>
+          <a:lnRef idx="0"/>
+          <a:fillRef idx="0"/>
+          <a:effectRef idx="0"/>
+          <a:fontRef idx="minor"/>
+        </p:style>
+        <p:txBody>
+          <a:bodyPr lIns="90000" tIns="45000" rIns="90000" bIns="45000" anchor="t" anchorCtr="1">
+            <a:noAutofit/>
+          </a:bodyPr>
+          <a:p>
+            <a:endParaRPr lang="en-US" sz="1800" b="0" u="none" strike="noStrike">
+              <a:solidFill>
+                <a:srgbClr val="000000"/>
+              </a:solidFill>
+              <a:effectLst/>
+              <a:uFillTx/>
+              <a:latin typeface="Arial"/>
+            </a:endParaRPr>
+          </a:p>
+        </p:txBody>
+      </p:sp>
+      <p:sp>
+        <p:nvSpPr>
+          <p:cNvPr id="336" name="card-296"/>
+          <p:cNvSpPr/>
+          <p:nvPr/>
+        </p:nvSpPr>
+        <p:spPr>
+          <a:xfrm>
+            <a:off x="4069080" y="3154680"/>
+            <a:ext cx="1462680" cy="548280"/>
+          </a:xfrm>
+          <a:prstGeom prst="roundRect">
+            <a:avLst>
+              <a:gd name="adj" fmla="val 13333"/>
+            </a:avLst>
+          </a:prstGeom>
+          <a:solidFill>
+            <a:schemeClr val="bg2"/>
+          </a:solidFill>
+          <a:ln w="12700">
+            <a:solidFill>
+              <a:srgbClr val="CFE3DC"/>
+            </a:solidFill>
+            <a:round/>
+          </a:ln>
+        </p:spPr>
+        <p:style>
+          <a:lnRef idx="0"/>
+          <a:fillRef idx="0"/>
+          <a:effectRef idx="0"/>
+          <a:fontRef idx="minor"/>
+        </p:style>
+        <p:txBody>
+          <a:bodyPr lIns="90000" tIns="45000" rIns="90000" bIns="45000" anchor="t">
+            <a:noAutofit/>
+          </a:bodyPr>
+          <a:p>
+            <a:endParaRPr lang="en-US" sz="1800" b="0" u="none" strike="noStrike">
+              <a:solidFill>
+                <a:srgbClr val="000000"/>
+              </a:solidFill>
+              <a:effectLst/>
+              <a:uFillTx/>
+              <a:latin typeface="Arial"/>
+            </a:endParaRPr>
+          </a:p>
+        </p:txBody>
+      </p:sp>
+      <p:sp>
+        <p:nvSpPr>
+          <p:cNvPr id="337" name="text-297"/>
+          <p:cNvSpPr/>
+          <p:nvPr/>
+        </p:nvSpPr>
+        <p:spPr>
+          <a:xfrm>
+            <a:off x="4069080" y="3154680"/>
+            <a:ext cx="1462680" cy="548280"/>
+          </a:xfrm>
+          <a:prstGeom prst="rect">
+            <a:avLst/>
+          </a:prstGeom>
+          <a:noFill/>
+          <a:ln w="0">
+            <a:noFill/>
+          </a:ln>
+        </p:spPr>
+        <p:style>
+          <a:lnRef idx="0"/>
+          <a:fillRef idx="0"/>
+          <a:effectRef idx="0"/>
+          <a:fontRef idx="minor"/>
+        </p:style>
+        <p:txBody>
+          <a:bodyPr lIns="0" tIns="0" rIns="0" bIns="0" anchor="ctr">
+            <a:noAutofit/>
+          </a:bodyPr>
+          <a:p>
+            <a:pPr algn="ctr" defTabSz="914400">
+              <a:lnSpc>
+                <a:spcPct val="100000"/>
+              </a:lnSpc>
+              <a:tabLst>
+                <a:tab pos="0" algn="l"/>
+              </a:tabLst>
+            </a:pPr>
+            <a:r>
+              <a:rPr lang="en-US" sz="1500" b="1" u="none" strike="noStrike">
+                <a:solidFill>
+                  <a:schemeClr val="dk1"/>
+                </a:solidFill>
+                <a:effectLst/>
+                <a:uFillTx/>
+                <a:latin typeface="Calibri"/>
+              </a:rPr>
+              <a:t>Dodávateľ C</a:t>
+            </a:r>
+            <a:endParaRPr lang="en-US" sz="1500" b="0" u="none" strike="noStrike">
+              <a:solidFill>
+                <a:srgbClr val="000000"/>
+              </a:solidFill>
+              <a:effectLst/>
+              <a:uFillTx/>
+              <a:latin typeface="Arial"/>
+            </a:endParaRPr>
+          </a:p>
+        </p:txBody>
+      </p:sp>
+      <p:sp>
+        <p:nvSpPr>
+          <p:cNvPr id="338" name="card-298"/>
+          <p:cNvSpPr/>
+          <p:nvPr/>
+        </p:nvSpPr>
+        <p:spPr>
+          <a:xfrm>
+            <a:off x="1965960" y="4434840"/>
+            <a:ext cx="2194200" cy="822600"/>
+          </a:xfrm>
+          <a:prstGeom prst="roundRect">
+            <a:avLst>
+              <a:gd name="adj" fmla="val 8889"/>
+            </a:avLst>
+          </a:prstGeom>
+          <a:solidFill>
+            <a:schemeClr val="accent6"/>
+          </a:solidFill>
+          <a:ln w="19050">
+            <a:solidFill>
+              <a:srgbClr val="D97A1E"/>
+            </a:solidFill>
+            <a:round/>
+          </a:ln>
+        </p:spPr>
+        <p:style>
+          <a:lnRef idx="0"/>
+          <a:fillRef idx="0"/>
+          <a:effectRef idx="0"/>
+          <a:fontRef idx="minor"/>
+        </p:style>
+        <p:txBody>
+          <a:bodyPr lIns="90000" tIns="45000" rIns="90000" bIns="45000" anchor="t">
+            <a:noAutofit/>
+          </a:bodyPr>
+          <a:p>
+            <a:endParaRPr lang="en-US" sz="1800" b="0" u="none" strike="noStrike">
+              <a:solidFill>
+                <a:srgbClr val="000000"/>
+              </a:solidFill>
+              <a:effectLst/>
+              <a:uFillTx/>
+              <a:latin typeface="Arial"/>
+            </a:endParaRPr>
+          </a:p>
+        </p:txBody>
+      </p:sp>
+      <p:sp>
+        <p:nvSpPr>
+          <p:cNvPr id="339" name="text-299"/>
+          <p:cNvSpPr/>
+          <p:nvPr/>
+        </p:nvSpPr>
+        <p:spPr>
+          <a:xfrm>
+            <a:off x="1965960" y="4434840"/>
+            <a:ext cx="2194200" cy="822600"/>
+          </a:xfrm>
+          <a:prstGeom prst="rect">
+            <a:avLst/>
+          </a:prstGeom>
+          <a:noFill/>
+          <a:ln w="0">
+            <a:noFill/>
+          </a:ln>
+        </p:spPr>
+        <p:style>
+          <a:lnRef idx="0"/>
+          <a:fillRef idx="0"/>
+          <a:effectRef idx="0"/>
+          <a:fontRef idx="minor"/>
+        </p:style>
+        <p:txBody>
+          <a:bodyPr lIns="0" tIns="0" rIns="0" bIns="0" anchor="ctr">
+            <a:noAutofit/>
+          </a:bodyPr>
+          <a:p>
+            <a:pPr algn="ctr" defTabSz="914400">
+              <a:lnSpc>
+                <a:spcPct val="100000"/>
+              </a:lnSpc>
+              <a:tabLst>
+                <a:tab pos="0" algn="l"/>
+              </a:tabLst>
+            </a:pPr>
+            <a:r>
+              <a:rPr lang="en-US" sz="1500" b="1" u="none" strike="noStrike">
+                <a:solidFill>
+                  <a:schemeClr val="dk1"/>
+                </a:solidFill>
+                <a:effectLst/>
+                <a:uFillTx/>
+                <a:latin typeface="Calibri"/>
+              </a:rPr>
+              <a:t>Banka</a:t>
+            </a:r>
+            <a:endParaRPr lang="en-US" sz="1500" b="0" u="none" strike="noStrike">
+              <a:solidFill>
+                <a:srgbClr val="000000"/>
+              </a:solidFill>
+              <a:effectLst/>
+              <a:uFillTx/>
+              <a:latin typeface="Arial"/>
+            </a:endParaRPr>
+          </a:p>
+          <a:p>
+            <a:pPr algn="ctr" defTabSz="914400">
+              <a:lnSpc>
+                <a:spcPct val="100000"/>
+              </a:lnSpc>
+              <a:tabLst>
+                <a:tab pos="0" algn="l"/>
+              </a:tabLst>
+            </a:pPr>
+            <a:r>
+              <a:rPr lang="en-US" sz="1300" b="0" i="1" u="none" strike="noStrike">
+                <a:solidFill>
+                  <a:schemeClr val="accent2"/>
+                </a:solidFill>
+                <a:effectLst/>
+                <a:uFillTx/>
+                <a:latin typeface="Calibri"/>
+              </a:rPr>
+              <a:t>3 dodávatelia, 1 termín</a:t>
+            </a:r>
+            <a:endParaRPr lang="en-US" sz="1300" b="0" u="none" strike="noStrike">
+              <a:solidFill>
+                <a:srgbClr val="000000"/>
+              </a:solidFill>
+              <a:effectLst/>
+              <a:uFillTx/>
+              <a:latin typeface="Arial"/>
+            </a:endParaRPr>
+          </a:p>
+        </p:txBody>
+      </p:sp>
+      <p:sp>
+        <p:nvSpPr>
+          <p:cNvPr id="340" name="card-300"/>
+          <p:cNvSpPr/>
+          <p:nvPr/>
+        </p:nvSpPr>
+        <p:spPr>
+          <a:xfrm>
+            <a:off x="6035040" y="1600200"/>
+            <a:ext cx="5604840" cy="1115280"/>
+          </a:xfrm>
+          <a:prstGeom prst="roundRect">
+            <a:avLst>
+              <a:gd name="adj" fmla="val 6557"/>
+            </a:avLst>
+          </a:prstGeom>
+          <a:solidFill>
+            <a:schemeClr val="bg2"/>
+          </a:solidFill>
+          <a:ln w="0">
+            <a:noFill/>
+          </a:ln>
+        </p:spPr>
+        <p:style>
+          <a:lnRef idx="0"/>
+          <a:fillRef idx="0"/>
+          <a:effectRef idx="0"/>
+          <a:fontRef idx="minor"/>
+        </p:style>
+        <p:txBody>
+          <a:bodyPr lIns="90000" tIns="45000" rIns="90000" bIns="45000" anchor="t">
+            <a:noAutofit/>
+          </a:bodyPr>
+          <a:p>
+            <a:endParaRPr lang="en-US" sz="1800" b="0" u="none" strike="noStrike">
+              <a:solidFill>
+                <a:srgbClr val="000000"/>
+              </a:solidFill>
+              <a:effectLst/>
+              <a:uFillTx/>
+              <a:latin typeface="Arial"/>
+            </a:endParaRPr>
+          </a:p>
+        </p:txBody>
+      </p:sp>
+      <p:sp>
+        <p:nvSpPr>
+          <p:cNvPr id="341" name="text-301"/>
+          <p:cNvSpPr/>
+          <p:nvPr/>
+        </p:nvSpPr>
+        <p:spPr>
+          <a:xfrm>
+            <a:off x="6309360" y="1737360"/>
+            <a:ext cx="5028840" cy="347040"/>
+          </a:xfrm>
+          <a:prstGeom prst="rect">
+            <a:avLst/>
+          </a:prstGeom>
+          <a:noFill/>
+          <a:ln w="0">
+            <a:noFill/>
+          </a:ln>
+        </p:spPr>
+        <p:style>
+          <a:lnRef idx="0"/>
+          <a:fillRef idx="0"/>
+          <a:effectRef idx="0"/>
+          <a:fontRef idx="minor"/>
+        </p:style>
+        <p:txBody>
+          <a:bodyPr lIns="0" tIns="0" rIns="0" bIns="0" anchor="t">
+            <a:noAutofit/>
+          </a:bodyPr>
+          <a:p>
+            <a:pPr defTabSz="914400">
+              <a:lnSpc>
+                <a:spcPct val="100000"/>
+              </a:lnSpc>
+              <a:tabLst>
+                <a:tab pos="0" algn="l"/>
+              </a:tabLst>
+            </a:pPr>
+            <a:r>
+              <a:rPr lang="en-US" sz="1700" b="1" u="none" strike="noStrike">
+                <a:solidFill>
+                  <a:schemeClr val="dk1"/>
+                </a:solidFill>
+                <a:effectLst/>
+                <a:uFillTx/>
+                <a:latin typeface="Cambria"/>
+                <a:ea typeface="Cambria"/>
+              </a:rPr>
+              <a:t>Podporné PMO</a:t>
+            </a:r>
+            <a:endParaRPr lang="en-US" sz="1700" b="0" u="none" strike="noStrike">
+              <a:solidFill>
+                <a:srgbClr val="000000"/>
+              </a:solidFill>
+              <a:effectLst/>
+              <a:uFillTx/>
+              <a:latin typeface="Arial"/>
+            </a:endParaRPr>
+          </a:p>
+        </p:txBody>
+      </p:sp>
+      <p:sp>
+        <p:nvSpPr>
+          <p:cNvPr id="342" name="text-302"/>
+          <p:cNvSpPr/>
+          <p:nvPr/>
+        </p:nvSpPr>
+        <p:spPr>
+          <a:xfrm>
+            <a:off x="6309360" y="2103120"/>
+            <a:ext cx="5120280" cy="548280"/>
+          </a:xfrm>
+          <a:prstGeom prst="rect">
+            <a:avLst/>
+          </a:prstGeom>
+          <a:noFill/>
+          <a:ln w="0">
+            <a:noFill/>
+          </a:ln>
+        </p:spPr>
+        <p:style>
+          <a:lnRef idx="0"/>
+          <a:fillRef idx="0"/>
+          <a:effectRef idx="0"/>
+          <a:fontRef idx="minor"/>
+        </p:style>
+        <p:txBody>
+          <a:bodyPr lIns="0" tIns="0" rIns="0" bIns="0" anchor="t">
+            <a:noAutofit/>
+          </a:bodyPr>
+          <a:p>
+            <a:pPr defTabSz="914400">
+              <a:lnSpc>
+                <a:spcPct val="100000"/>
+              </a:lnSpc>
+              <a:tabLst>
+                <a:tab pos="0" algn="l"/>
+              </a:tabLst>
+            </a:pPr>
+            <a:r>
+              <a:rPr lang="en-US" sz="1400" b="0" u="none" strike="noStrike">
+                <a:solidFill>
+                  <a:schemeClr val="accent5"/>
+                </a:solidFill>
+                <a:effectLst/>
+                <a:uFillTx/>
+                <a:latin typeface="Calibri"/>
+              </a:rPr>
+              <a:t>Šablóny a rady nepomôžu – problém nie je vo formáte, ale v tom, že nikto nerozhoduje.</a:t>
+            </a:r>
+            <a:endParaRPr lang="en-US" sz="1400" b="0" u="none" strike="noStrike">
+              <a:solidFill>
+                <a:srgbClr val="000000"/>
+              </a:solidFill>
+              <a:effectLst/>
+              <a:uFillTx/>
+              <a:latin typeface="Arial"/>
+            </a:endParaRPr>
+          </a:p>
+        </p:txBody>
+      </p:sp>
+      <p:sp>
+        <p:nvSpPr>
+          <p:cNvPr id="343" name="card-303"/>
+          <p:cNvSpPr/>
+          <p:nvPr/>
+        </p:nvSpPr>
+        <p:spPr>
+          <a:xfrm>
+            <a:off x="6035040" y="2898720"/>
+            <a:ext cx="5604840" cy="1115280"/>
+          </a:xfrm>
+          <a:prstGeom prst="roundRect">
+            <a:avLst>
+              <a:gd name="adj" fmla="val 6557"/>
+            </a:avLst>
+          </a:prstGeom>
+          <a:solidFill>
+            <a:schemeClr val="bg2"/>
+          </a:solidFill>
+          <a:ln w="0">
+            <a:noFill/>
+          </a:ln>
+        </p:spPr>
+        <p:style>
+          <a:lnRef idx="0"/>
+          <a:fillRef idx="0"/>
+          <a:effectRef idx="0"/>
+          <a:fontRef idx="minor"/>
+        </p:style>
+        <p:txBody>
+          <a:bodyPr lIns="90000" tIns="45000" rIns="90000" bIns="45000" anchor="t">
+            <a:noAutofit/>
+          </a:bodyPr>
+          <a:p>
+            <a:endParaRPr lang="en-US" sz="1800" b="0" u="none" strike="noStrike">
+              <a:solidFill>
+                <a:srgbClr val="FFFFFF"/>
+              </a:solidFill>
+              <a:effectLst/>
+              <a:uFillTx/>
+              <a:latin typeface="Arial"/>
+            </a:endParaRPr>
+          </a:p>
+        </p:txBody>
+      </p:sp>
+      <p:sp>
+        <p:nvSpPr>
+          <p:cNvPr id="344" name="text-304"/>
+          <p:cNvSpPr/>
+          <p:nvPr/>
+        </p:nvSpPr>
+        <p:spPr>
+          <a:xfrm>
+            <a:off x="6309360" y="3035880"/>
+            <a:ext cx="5028840" cy="347040"/>
+          </a:xfrm>
+          <a:prstGeom prst="rect">
+            <a:avLst/>
+          </a:prstGeom>
+          <a:noFill/>
+          <a:ln w="0">
+            <a:noFill/>
+          </a:ln>
+        </p:spPr>
+        <p:style>
+          <a:lnRef idx="0"/>
+          <a:fillRef idx="0"/>
+          <a:effectRef idx="0"/>
+          <a:fontRef idx="minor"/>
+        </p:style>
+        <p:txBody>
+          <a:bodyPr lIns="0" tIns="0" rIns="0" bIns="0" anchor="t">
+            <a:noAutofit/>
+          </a:bodyPr>
+          <a:p>
+            <a:pPr defTabSz="914400">
+              <a:lnSpc>
+                <a:spcPct val="100000"/>
+              </a:lnSpc>
+              <a:tabLst>
+                <a:tab pos="0" algn="l"/>
+              </a:tabLst>
+            </a:pPr>
+            <a:r>
+              <a:rPr lang="en-US" sz="1700" b="1" u="none" strike="noStrike">
+                <a:solidFill>
+                  <a:schemeClr val="dk1"/>
+                </a:solidFill>
+                <a:effectLst/>
+                <a:uFillTx/>
+                <a:latin typeface="Cambria"/>
+                <a:ea typeface="Cambria"/>
+              </a:rPr>
+              <a:t>Riadiace PMO</a:t>
+            </a:r>
+            <a:endParaRPr lang="en-US" sz="1700" b="0" u="none" strike="noStrike">
+              <a:solidFill>
+                <a:srgbClr val="000000"/>
+              </a:solidFill>
+              <a:effectLst/>
+              <a:uFillTx/>
+              <a:latin typeface="Arial"/>
+            </a:endParaRPr>
+          </a:p>
+        </p:txBody>
+      </p:sp>
+      <p:sp>
+        <p:nvSpPr>
+          <p:cNvPr id="345" name="text-305"/>
+          <p:cNvSpPr/>
+          <p:nvPr/>
+        </p:nvSpPr>
+        <p:spPr>
+          <a:xfrm>
+            <a:off x="6309360" y="3401640"/>
+            <a:ext cx="5120280" cy="548280"/>
+          </a:xfrm>
+          <a:prstGeom prst="rect">
+            <a:avLst/>
+          </a:prstGeom>
+          <a:noFill/>
+          <a:ln w="0">
+            <a:noFill/>
+          </a:ln>
+        </p:spPr>
+        <p:style>
+          <a:lnRef idx="0"/>
+          <a:fillRef idx="0"/>
+          <a:effectRef idx="0"/>
+          <a:fontRef idx="minor"/>
+        </p:style>
+        <p:txBody>
+          <a:bodyPr lIns="0" tIns="0" rIns="0" bIns="0" anchor="t">
+            <a:noAutofit/>
+          </a:bodyPr>
+          <a:p>
+            <a:pPr defTabSz="914400">
+              <a:lnSpc>
+                <a:spcPct val="100000"/>
+              </a:lnSpc>
+              <a:tabLst>
+                <a:tab pos="0" algn="l"/>
+              </a:tabLst>
+            </a:pPr>
+            <a:r>
+              <a:rPr lang="en-US" sz="1400" b="0" u="none" strike="noStrike">
+                <a:solidFill>
+                  <a:schemeClr val="accent5"/>
+                </a:solidFill>
+                <a:effectLst/>
+                <a:uFillTx/>
+                <a:latin typeface="Calibri"/>
+              </a:rPr>
+              <a:t>Jednotné reporty ukážu, kde to viazne. Rozhodovanie však zostane rozdrobené a pomalé.</a:t>
+            </a:r>
+            <a:endParaRPr lang="en-US" sz="1400" b="0" u="none" strike="noStrike">
+              <a:solidFill>
+                <a:srgbClr val="000000"/>
+              </a:solidFill>
+              <a:effectLst/>
+              <a:uFillTx/>
+              <a:latin typeface="Arial"/>
+            </a:endParaRPr>
+          </a:p>
+        </p:txBody>
+      </p:sp>
+      <p:sp>
+        <p:nvSpPr>
+          <p:cNvPr id="346" name="card-306"/>
+          <p:cNvSpPr/>
+          <p:nvPr/>
+        </p:nvSpPr>
+        <p:spPr>
+          <a:xfrm>
+            <a:off x="6035040" y="4197240"/>
+            <a:ext cx="5604840" cy="1115280"/>
+          </a:xfrm>
+          <a:prstGeom prst="roundRect">
+            <a:avLst>
+              <a:gd name="adj" fmla="val 6557"/>
+            </a:avLst>
+          </a:prstGeom>
+          <a:solidFill>
+            <a:schemeClr val="accent1"/>
+          </a:solidFill>
+          <a:ln w="0">
+            <a:noFill/>
+          </a:ln>
+        </p:spPr>
+        <p:style>
+          <a:lnRef idx="0"/>
+          <a:fillRef idx="0"/>
+          <a:effectRef idx="0"/>
+          <a:fontRef idx="minor"/>
+        </p:style>
+        <p:txBody>
+          <a:bodyPr lIns="90000" tIns="45000" rIns="90000" bIns="45000" anchor="t">
+            <a:noAutofit/>
+          </a:bodyPr>
+          <a:p>
+            <a:endParaRPr lang="en-US" sz="1800" b="0" u="none" strike="noStrike">
+              <a:solidFill>
+                <a:srgbClr val="000000"/>
+              </a:solidFill>
+              <a:effectLst/>
+              <a:uFillTx/>
+              <a:latin typeface="Arial"/>
+            </a:endParaRPr>
+          </a:p>
+        </p:txBody>
+      </p:sp>
+      <p:sp>
+        <p:nvSpPr>
+          <p:cNvPr id="347" name="text-307"/>
+          <p:cNvSpPr/>
+          <p:nvPr/>
+        </p:nvSpPr>
+        <p:spPr>
+          <a:xfrm>
+            <a:off x="6309360" y="4334400"/>
+            <a:ext cx="5028840" cy="347040"/>
+          </a:xfrm>
+          <a:prstGeom prst="rect">
+            <a:avLst/>
+          </a:prstGeom>
+          <a:noFill/>
+          <a:ln w="0">
+            <a:noFill/>
+          </a:ln>
+        </p:spPr>
+        <p:style>
+          <a:lnRef idx="0"/>
+          <a:fillRef idx="0"/>
+          <a:effectRef idx="0"/>
+          <a:fontRef idx="minor"/>
+        </p:style>
+        <p:txBody>
+          <a:bodyPr lIns="0" tIns="0" rIns="0" bIns="0" anchor="t">
+            <a:noAutofit/>
+          </a:bodyPr>
+          <a:p>
+            <a:pPr defTabSz="914400">
+              <a:lnSpc>
+                <a:spcPct val="100000"/>
+              </a:lnSpc>
+              <a:tabLst>
+                <a:tab pos="0" algn="l"/>
+              </a:tabLst>
+            </a:pPr>
+            <a:r>
+              <a:rPr lang="en-US" sz="1700" b="1" u="none" strike="noStrike">
+                <a:solidFill>
+                  <a:schemeClr val="lt1"/>
+                </a:solidFill>
+                <a:effectLst/>
+                <a:uFillTx/>
+                <a:latin typeface="Cambria"/>
+                <a:ea typeface="Cambria"/>
+              </a:rPr>
+              <a:t>Direktívne PMO</a:t>
+            </a:r>
+            <a:endParaRPr lang="en-US" sz="1700" b="0" u="none" strike="noStrike">
+              <a:solidFill>
+                <a:srgbClr val="000000"/>
+              </a:solidFill>
+              <a:effectLst/>
+              <a:uFillTx/>
+              <a:latin typeface="Arial"/>
+            </a:endParaRPr>
+          </a:p>
+        </p:txBody>
+      </p:sp>
+      <p:sp>
+        <p:nvSpPr>
+          <p:cNvPr id="348" name="text-308"/>
+          <p:cNvSpPr/>
+          <p:nvPr/>
+        </p:nvSpPr>
+        <p:spPr>
+          <a:xfrm>
+            <a:off x="6309360" y="4700160"/>
+            <a:ext cx="5120280" cy="548280"/>
+          </a:xfrm>
+          <a:prstGeom prst="rect">
+            <a:avLst/>
+          </a:prstGeom>
+          <a:noFill/>
+          <a:ln w="0">
+            <a:noFill/>
+          </a:ln>
+        </p:spPr>
+        <p:style>
+          <a:lnRef idx="0"/>
+          <a:fillRef idx="0"/>
+          <a:effectRef idx="0"/>
+          <a:fontRef idx="minor"/>
+        </p:style>
+        <p:txBody>
+          <a:bodyPr lIns="0" tIns="0" rIns="0" bIns="0" anchor="t">
+            <a:noAutofit/>
+          </a:bodyPr>
+          <a:p>
+            <a:pPr defTabSz="914400">
+              <a:lnSpc>
+                <a:spcPct val="100000"/>
+              </a:lnSpc>
+              <a:tabLst>
+                <a:tab pos="0" algn="l"/>
+              </a:tabLst>
+            </a:pPr>
+            <a:r>
+              <a:rPr lang="en-US" sz="1400" b="0" u="none" strike="noStrike">
+                <a:solidFill>
+                  <a:schemeClr val="lt1"/>
+                </a:solidFill>
+                <a:effectLst/>
+                <a:uFillTx/>
+                <a:latin typeface="Calibri"/>
+              </a:rPr>
+              <a:t>Prevezme riadenie celého programu: jeden manažér, spoločné denné stretnutie a rozhodnutia v ten istý deň.</a:t>
+            </a:r>
+            <a:endParaRPr lang="en-US" sz="1400" b="0" u="none" strike="noStrike">
+              <a:solidFill>
+                <a:srgbClr val="000000"/>
+              </a:solidFill>
+              <a:effectLst/>
+              <a:uFillTx/>
+              <a:latin typeface="Arial"/>
+            </a:endParaRPr>
+          </a:p>
+        </p:txBody>
+      </p:sp>
+      <p:sp>
+        <p:nvSpPr>
+          <p:cNvPr id="349" name="text-309"/>
+          <p:cNvSpPr/>
+          <p:nvPr/>
+        </p:nvSpPr>
+        <p:spPr>
+          <a:xfrm>
+            <a:off x="6035040" y="5577840"/>
+            <a:ext cx="5604840" cy="411120"/>
+          </a:xfrm>
+          <a:prstGeom prst="rect">
+            <a:avLst/>
+          </a:prstGeom>
+          <a:noFill/>
+          <a:ln w="0">
+            <a:noFill/>
+          </a:ln>
+        </p:spPr>
+        <p:style>
+          <a:lnRef idx="0"/>
+          <a:fillRef idx="0"/>
+          <a:effectRef idx="0"/>
+          <a:fontRef idx="minor"/>
+        </p:style>
+        <p:txBody>
+          <a:bodyPr lIns="0" tIns="0" rIns="0" bIns="0" anchor="t">
+            <a:noAutofit/>
+          </a:bodyPr>
+          <a:p>
+            <a:pPr defTabSz="914400">
+              <a:lnSpc>
+                <a:spcPct val="100000"/>
+              </a:lnSpc>
+              <a:tabLst>
+                <a:tab pos="0" algn="l"/>
+              </a:tabLst>
+            </a:pPr>
+            <a:r>
+              <a:rPr lang="en-US" sz="1600" b="1" u="none" strike="noStrike">
+                <a:solidFill>
+                  <a:schemeClr val="accent1"/>
+                </a:solidFill>
+                <a:effectLst/>
+                <a:uFillTx/>
+                <a:latin typeface="Calibri"/>
+              </a:rPr>
+              <a:t>Záver: </a:t>
+            </a:r>
+            <a:r>
+              <a:rPr lang="en-US" sz="1600" b="0" u="none" strike="noStrike">
+                <a:solidFill>
+                  <a:schemeClr val="dk1"/>
+                </a:solidFill>
+                <a:effectLst/>
+                <a:uFillTx/>
+                <a:latin typeface="Calibri"/>
+              </a:rPr>
+              <a:t>pri strategickom projekte sa prísna kontrola oplatí.</a:t>
+            </a:r>
+            <a:endParaRPr lang="en-US" sz="1600" b="0" u="none" strike="noStrike">
+              <a:solidFill>
+                <a:srgbClr val="000000"/>
+              </a:solidFill>
+              <a:effectLst/>
+              <a:uFillTx/>
+              <a:latin typeface="Arial"/>
+            </a:endParaRPr>
+          </a:p>
+        </p:txBody>
+      </p:sp>
+      <p:sp>
+        <p:nvSpPr>
+          <p:cNvPr id="350" name="PlaceHolder 3"/>
+          <p:cNvSpPr>
+            <a:spLocks noGrp="1"/>
+          </p:cNvSpPr>
+          <p:nvPr>
+            <p:ph type="sldNum" idx="16"/>
+          </p:nvPr>
+        </p:nvSpPr>
+        <p:spPr>
+          <a:xfrm>
+            <a:off x="11183040" y="6400800"/>
+            <a:ext cx="456840" cy="273960"/>
+          </a:xfrm>
+          <a:prstGeom prst="rect">
+            <a:avLst/>
+          </a:prstGeom>
+          <a:noFill/>
+          <a:ln w="0">
+            <a:noFill/>
+          </a:ln>
+        </p:spPr>
+        <p:txBody>
+          <a:bodyPr lIns="90000" tIns="45000" rIns="90000" bIns="45000" anchor="t">
+            <a:noAutofit/>
+          </a:bodyPr>
+          <a:lstStyle>
+            <a:lvl1pPr indent="0" algn="r" defTabSz="914400">
+              <a:lnSpc>
+                <a:spcPct val="100000"/>
+              </a:lnSpc>
+              <a:buNone/>
+              <a:defRPr lang="en-US" sz="1000" b="0" u="none" strike="noStrike">
+                <a:solidFill>
+                  <a:schemeClr val="accent5"/>
+                </a:solidFill>
+                <a:effectLst/>
+                <a:uFillTx/>
+                <a:latin typeface="Calibri"/>
+              </a:defRPr>
+            </a:lvl1pPr>
+          </a:lstStyle>
+          <a:p>
+            <a:pPr indent="0" algn="r" defTabSz="914400">
+              <a:lnSpc>
+                <a:spcPct val="100000"/>
+              </a:lnSpc>
+              <a:buNone/>
+            </a:pPr>
+            <a:fld id="{73795247-075B-471F-B22E-11FB5CDB012F}" type="slidenum">
               <a:rPr lang="en-US" sz="1000" b="0" u="none" strike="noStrike">
                 <a:solidFill>
                   <a:schemeClr val="accent5"/>
